--- a/lessons/lesson-11/slides.pptx
+++ b/lessons/lesson-11/slides.pptx
@@ -2,31 +2,32 @@
 <file path=ppt/presentation.xml><?xml version="1.0" encoding="utf-8"?>
 <p:presentation xmlns:p="http://schemas.openxmlformats.org/presentationml/2006/main">
   <p:sldMasterIdLst>
-    <p:sldMasterId xmlns:r="http://schemas.openxmlformats.org/officeDocument/2006/relationships" id="2147483648" r:id="Rb68680c573ec4bd6"/>
+    <p:sldMasterId xmlns:r="http://schemas.openxmlformats.org/officeDocument/2006/relationships" id="2147483648" r:id="R0f09adf1053c48b9"/>
   </p:sldMasterIdLst>
   <p:notesMasterIdLst>
-    <p:notesMasterId xmlns:r="http://schemas.openxmlformats.org/officeDocument/2006/relationships" r:id="R8a89b42e8e014da1"/>
+    <p:notesMasterId xmlns:r="http://schemas.openxmlformats.org/officeDocument/2006/relationships" r:id="Rd9b5959486bf4f71"/>
   </p:notesMasterIdLst>
   <p:sldIdLst>
-    <p:sldId xmlns:r="http://schemas.openxmlformats.org/officeDocument/2006/relationships" id="256" r:id="Rc3a43011a5424e28"/>
-    <p:sldId xmlns:r="http://schemas.openxmlformats.org/officeDocument/2006/relationships" id="257" r:id="R58f7bff1dbbd435a"/>
-    <p:sldId xmlns:r="http://schemas.openxmlformats.org/officeDocument/2006/relationships" id="258" r:id="R290b51743dc4477f"/>
-    <p:sldId xmlns:r="http://schemas.openxmlformats.org/officeDocument/2006/relationships" id="259" r:id="Red5504c0a0a44082"/>
-    <p:sldId xmlns:r="http://schemas.openxmlformats.org/officeDocument/2006/relationships" id="260" r:id="R2d040e55840c4737"/>
-    <p:sldId xmlns:r="http://schemas.openxmlformats.org/officeDocument/2006/relationships" id="261" r:id="R0ae37d96049a4c39"/>
-    <p:sldId xmlns:r="http://schemas.openxmlformats.org/officeDocument/2006/relationships" id="262" r:id="R44fe960b2f6a4445"/>
-    <p:sldId xmlns:r="http://schemas.openxmlformats.org/officeDocument/2006/relationships" id="263" r:id="R438c21cbb1f64a72"/>
-    <p:sldId xmlns:r="http://schemas.openxmlformats.org/officeDocument/2006/relationships" id="264" r:id="Red2b1f2f34fc40c7"/>
-    <p:sldId xmlns:r="http://schemas.openxmlformats.org/officeDocument/2006/relationships" id="265" r:id="R1661afeeaff14fc9"/>
-    <p:sldId xmlns:r="http://schemas.openxmlformats.org/officeDocument/2006/relationships" id="266" r:id="Ra948802ed52145ef"/>
-    <p:sldId xmlns:r="http://schemas.openxmlformats.org/officeDocument/2006/relationships" id="267" r:id="R3011f303497c4eb5"/>
-    <p:sldId xmlns:r="http://schemas.openxmlformats.org/officeDocument/2006/relationships" id="268" r:id="Rca9cfbea9e6d49d6"/>
-    <p:sldId xmlns:r="http://schemas.openxmlformats.org/officeDocument/2006/relationships" id="269" r:id="R42b48bc1c99942eb"/>
-    <p:sldId xmlns:r="http://schemas.openxmlformats.org/officeDocument/2006/relationships" id="270" r:id="R19abd37d34e44c77"/>
-    <p:sldId xmlns:r="http://schemas.openxmlformats.org/officeDocument/2006/relationships" id="271" r:id="R396d6135109d490a"/>
-    <p:sldId xmlns:r="http://schemas.openxmlformats.org/officeDocument/2006/relationships" id="272" r:id="Rd2f02814e3714291"/>
-    <p:sldId xmlns:r="http://schemas.openxmlformats.org/officeDocument/2006/relationships" id="273" r:id="R4f41c50303ae43e0"/>
-    <p:sldId xmlns:r="http://schemas.openxmlformats.org/officeDocument/2006/relationships" id="274" r:id="R5d83e51bfb77425a"/>
+    <p:sldId xmlns:r="http://schemas.openxmlformats.org/officeDocument/2006/relationships" id="256" r:id="R4d9116ee02d14076"/>
+    <p:sldId xmlns:r="http://schemas.openxmlformats.org/officeDocument/2006/relationships" id="257" r:id="Rce063e5f289846c1"/>
+    <p:sldId xmlns:r="http://schemas.openxmlformats.org/officeDocument/2006/relationships" id="258" r:id="R7ae7dea1f3db4494"/>
+    <p:sldId xmlns:r="http://schemas.openxmlformats.org/officeDocument/2006/relationships" id="259" r:id="R96b1d11b0d4342df"/>
+    <p:sldId xmlns:r="http://schemas.openxmlformats.org/officeDocument/2006/relationships" id="260" r:id="R7b1b98c603c44e9c"/>
+    <p:sldId xmlns:r="http://schemas.openxmlformats.org/officeDocument/2006/relationships" id="261" r:id="R7d66edf1b2344a37"/>
+    <p:sldId xmlns:r="http://schemas.openxmlformats.org/officeDocument/2006/relationships" id="262" r:id="Rdd91a8a77cca4a10"/>
+    <p:sldId xmlns:r="http://schemas.openxmlformats.org/officeDocument/2006/relationships" id="263" r:id="R74a0fd7a477c4577"/>
+    <p:sldId xmlns:r="http://schemas.openxmlformats.org/officeDocument/2006/relationships" id="264" r:id="Rde54ed9aa7744885"/>
+    <p:sldId xmlns:r="http://schemas.openxmlformats.org/officeDocument/2006/relationships" id="265" r:id="R15e27466d9134259"/>
+    <p:sldId xmlns:r="http://schemas.openxmlformats.org/officeDocument/2006/relationships" id="266" r:id="Rc2eeae25d4ca4c76"/>
+    <p:sldId xmlns:r="http://schemas.openxmlformats.org/officeDocument/2006/relationships" id="267" r:id="R367144dfc6794a1f"/>
+    <p:sldId xmlns:r="http://schemas.openxmlformats.org/officeDocument/2006/relationships" id="268" r:id="Rdb57c97d103f4226"/>
+    <p:sldId xmlns:r="http://schemas.openxmlformats.org/officeDocument/2006/relationships" id="269" r:id="R09539d423cf74b31"/>
+    <p:sldId xmlns:r="http://schemas.openxmlformats.org/officeDocument/2006/relationships" id="270" r:id="Redf3648a0d4e41cd"/>
+    <p:sldId xmlns:r="http://schemas.openxmlformats.org/officeDocument/2006/relationships" id="271" r:id="Raad2d49f8307438d"/>
+    <p:sldId xmlns:r="http://schemas.openxmlformats.org/officeDocument/2006/relationships" id="272" r:id="Rafbb420537e24352"/>
+    <p:sldId xmlns:r="http://schemas.openxmlformats.org/officeDocument/2006/relationships" id="273" r:id="R41a066c404ac4294"/>
+    <p:sldId xmlns:r="http://schemas.openxmlformats.org/officeDocument/2006/relationships" id="274" r:id="R13950958d75149ee"/>
+    <p:sldId xmlns:r="http://schemas.openxmlformats.org/officeDocument/2006/relationships" id="275" r:id="R1560b3d0f4074b37"/>
   </p:sldIdLst>
   <p:sldSz cx="12192000" cy="6858000"/>
   <p:notesSz cx="6858000" cy="9144000"/>
@@ -406,7 +407,7 @@
           <a:lstStyle xmlns:a="http://schemas.openxmlformats.org/drawingml/2006/main"/>
           <a:p xmlns:a="http://schemas.openxmlformats.org/drawingml/2006/main">
             <a:r>
-              <a:t>开场回扣第 10 课：Agent 能在受限权限下跑通一次，还不等于能够重复运行、固定评价、保留失败并安全回退。本课只把可重复科研动作改写为受限循环，不复刻完整系统。</a:t>
+              <a:t>本讲聚焦“实验自动化、AutoResearch 循环与结果追踪”。封面只保留正式课名，课堂问题从下一页展开。</a:t>
             </a:r>
           </a:p>
           <a:p xmlns:a="http://schemas.openxmlformats.org/drawingml/2006/main">
@@ -426,12 +427,7 @@
           </a:p>
           <a:p xmlns:a="http://schemas.openxmlformats.org/drawingml/2006/main">
             <a:r>
-              <a:t>- /Users/bright/Projects/courses/graduate/lessons/备课规划.md</a:t>
-            </a:r>
-          </a:p>
-          <a:p xmlns:a="http://schemas.openxmlformats.org/drawingml/2006/main">
-            <a:r>
-              <a:t>- /Users/bright/Projects/courses/graduate/lessons/lesson-11/handout.md</a:t>
+              <a:t>- /Users/bright/Projects/courses/graduate/lessons/lesson-11/slides.md</a:t>
             </a:r>
           </a:p>
           <a:p xmlns:a="http://schemas.openxmlformats.org/drawingml/2006/main">
@@ -1406,7 +1402,7 @@
           <a:lstStyle xmlns:a="http://schemas.openxmlformats.org/drawingml/2006/main"/>
           <a:p xmlns:a="http://schemas.openxmlformats.org/drawingml/2006/main">
             <a:r>
-              <a:t>用退出卡收束开场：循环成立的证据不是能跑，而是约束、工件、失败和审核都可追踪。第 12 课把这些要素重新组合为学生自己的工作流；第 13 课再评价实际影响。</a:t>
+              <a:t>回收本讲核心概念及其关系。本页不新增任务；请学生用边界句检查自己的项目工件。</a:t>
             </a:r>
           </a:p>
           <a:p xmlns:a="http://schemas.openxmlformats.org/drawingml/2006/main">
@@ -1421,22 +1417,17 @@
           </a:p>
           <a:p xmlns:a="http://schemas.openxmlformats.org/drawingml/2006/main">
             <a:r>
-              <a:t>- /Users/bright/Projects/courses/graduate/course/assignments.md</a:t>
-            </a:r>
-          </a:p>
-          <a:p xmlns:a="http://schemas.openxmlformats.org/drawingml/2006/main">
-            <a:r>
               <a:t>- /Users/bright/Projects/courses/graduate/course/syllabus.md</a:t>
             </a:r>
           </a:p>
           <a:p xmlns:a="http://schemas.openxmlformats.org/drawingml/2006/main">
             <a:r>
-              <a:t>- /Users/bright/Projects/courses/graduate/lessons/备课规划.md</a:t>
-            </a:r>
-          </a:p>
-          <a:p xmlns:a="http://schemas.openxmlformats.org/drawingml/2006/main">
-            <a:r>
               <a:t>- /Users/bright/Projects/courses/graduate/lessons/lesson-11/handout.md</a:t>
+            </a:r>
+          </a:p>
+          <a:p xmlns:a="http://schemas.openxmlformats.org/drawingml/2006/main">
+            <a:r>
+              <a:t>- /Users/bright/Projects/courses/graduate/lessons/lesson-11/slides.md</a:t>
             </a:r>
           </a:p>
           <a:p xmlns:a="http://schemas.openxmlformats.org/drawingml/2006/main">
@@ -1537,6 +1528,111 @@
           <a:p xmlns:a="http://schemas.openxmlformats.org/drawingml/2006/main">
             <a:r>
               <a:t>- /Users/bright/Projects/courses/graduate/course/syllabus.md</a:t>
+            </a:r>
+          </a:p>
+          <a:p xmlns:a="http://schemas.openxmlformats.org/drawingml/2006/main">
+            <a:r>
+              <a:t>[/Sources]</a:t>
+            </a:r>
+          </a:p>
+        </p:txBody>
+      </p:sp>
+      <p:sp>
+        <p:nvSpPr>
+          <p:cNvPr id="4" name="Slide Number Placeholder 3"/>
+          <p:cNvSpPr>
+            <a:spLocks xmlns:a="http://schemas.openxmlformats.org/drawingml/2006/main" noGrp="1"/>
+          </p:cNvSpPr>
+          <p:nvPr>
+            <p:ph type="sldNum" idx="5"/>
+          </p:nvPr>
+        </p:nvSpPr>
+        <p:spPr/>
+        <p:txBody>
+          <a:bodyPr xmlns:a="http://schemas.openxmlformats.org/drawingml/2006/main"/>
+          <a:lstStyle xmlns:a="http://schemas.openxmlformats.org/drawingml/2006/main"/>
+          <a:p xmlns:a="http://schemas.openxmlformats.org/drawingml/2006/main"/>
+        </p:txBody>
+      </p:sp>
+    </p:spTree>
+  </p:cSld>
+  <p:clrMapOvr>
+    <a:masterClrMapping xmlns:a="http://schemas.openxmlformats.org/drawingml/2006/main"/>
+  </p:clrMapOvr>
+</p:notes>
+</file>
+
+<file path=ppt/notesSlides/notesSlide20.xml><?xml version="1.0" encoding="utf-8"?>
+<p:notes xmlns:p="http://schemas.openxmlformats.org/presentationml/2006/main">
+  <p:cSld>
+    <p:spTree>
+      <p:nvGrpSpPr>
+        <p:cNvPr id="1" name=""/>
+        <p:cNvGrpSpPr/>
+        <p:nvPr/>
+      </p:nvGrpSpPr>
+      <p:grpSpPr>
+        <a:xfrm xmlns:a="http://schemas.openxmlformats.org/drawingml/2006/main"/>
+      </p:grpSpPr>
+      <p:sp>
+        <p:nvSpPr>
+          <p:cNvPr id="2" name="Slide Image Placeholder 1"/>
+          <p:cNvSpPr>
+            <a:spLocks xmlns:a="http://schemas.openxmlformats.org/drawingml/2006/main" noGrp="1"/>
+          </p:cNvSpPr>
+          <p:nvPr>
+            <p:ph type="sldImg" idx="0"/>
+          </p:nvPr>
+        </p:nvSpPr>
+        <p:spPr/>
+      </p:sp>
+      <p:sp>
+        <p:nvSpPr>
+          <p:cNvPr id="3" name="Notes Placeholder 2"/>
+          <p:cNvSpPr>
+            <a:spLocks xmlns:a="http://schemas.openxmlformats.org/drawingml/2006/main" noGrp="1"/>
+          </p:cNvSpPr>
+          <p:nvPr>
+            <p:ph type="body" idx="1"/>
+          </p:nvPr>
+        </p:nvSpPr>
+        <p:spPr/>
+        <p:txBody>
+          <a:bodyPr xmlns:a="http://schemas.openxmlformats.org/drawingml/2006/main"/>
+          <a:lstStyle xmlns:a="http://schemas.openxmlformats.org/drawingml/2006/main"/>
+          <a:p xmlns:a="http://schemas.openxmlformats.org/drawingml/2006/main">
+            <a:r>
+              <a:t>用退出卡收束开场：循环成立的证据不是能跑，而是约束、工件、失败和审核都可追踪。第 12 课把这些要素重新组合为学生自己的工作流；第 13 课再评价实际影响。</a:t>
+            </a:r>
+          </a:p>
+          <a:p xmlns:a="http://schemas.openxmlformats.org/drawingml/2006/main">
+            <a:r>
+              <a:t/>
+            </a:r>
+          </a:p>
+          <a:p xmlns:a="http://schemas.openxmlformats.org/drawingml/2006/main">
+            <a:r>
+              <a:t>[Sources]</a:t>
+            </a:r>
+          </a:p>
+          <a:p xmlns:a="http://schemas.openxmlformats.org/drawingml/2006/main">
+            <a:r>
+              <a:t>- /Users/bright/Projects/courses/graduate/course/assignments.md</a:t>
+            </a:r>
+          </a:p>
+          <a:p xmlns:a="http://schemas.openxmlformats.org/drawingml/2006/main">
+            <a:r>
+              <a:t>- /Users/bright/Projects/courses/graduate/course/syllabus.md</a:t>
+            </a:r>
+          </a:p>
+          <a:p xmlns:a="http://schemas.openxmlformats.org/drawingml/2006/main">
+            <a:r>
+              <a:t>- /Users/bright/Projects/courses/graduate/lessons/备课规划.md</a:t>
+            </a:r>
+          </a:p>
+          <a:p xmlns:a="http://schemas.openxmlformats.org/drawingml/2006/main">
+            <a:r>
+              <a:t>- /Users/bright/Projects/courses/graduate/lessons/lesson-11/handout.md</a:t>
             </a:r>
           </a:p>
           <a:p xmlns:a="http://schemas.openxmlformats.org/drawingml/2006/main">
@@ -2277,7 +2373,7 @@
           <p:nvPr/>
         </p:nvPicPr>
         <p:blipFill>
-          <a:blip xmlns:r="http://schemas.openxmlformats.org/officeDocument/2006/relationships" xmlns:a="http://schemas.openxmlformats.org/drawingml/2006/main" r:embed="R77d90bcdf7fa4a97">
+          <a:blip xmlns:r="http://schemas.openxmlformats.org/officeDocument/2006/relationships" xmlns:a="http://schemas.openxmlformats.org/drawingml/2006/main" r:embed="R38a37bfe44584eb4">
             <a:duotone>
               <a:prstClr val="black"/>
               <a:schemeClr val="accent1">
@@ -2455,7 +2551,7 @@
           <p:nvPr/>
         </p:nvPicPr>
         <p:blipFill rotWithShape="1">
-          <a:blip xmlns:r="http://schemas.openxmlformats.org/officeDocument/2006/relationships" xmlns:a="http://schemas.openxmlformats.org/drawingml/2006/main" r:embed="R6e79a70517954ea0"/>
+          <a:blip xmlns:r="http://schemas.openxmlformats.org/officeDocument/2006/relationships" xmlns:a="http://schemas.openxmlformats.org/drawingml/2006/main" r:embed="R805d0be40a524ea1"/>
           <a:srcRect xmlns:a="http://schemas.openxmlformats.org/drawingml/2006/main" l="74359" t="0" r="1346" b="0"/>
           <a:stretch xmlns:a="http://schemas.openxmlformats.org/drawingml/2006/main"/>
         </p:blipFill>
@@ -2478,7 +2574,7 @@
           <p:nvPr/>
         </p:nvPicPr>
         <p:blipFill rotWithShape="1">
-          <a:blip xmlns:r="http://schemas.openxmlformats.org/officeDocument/2006/relationships" xmlns:a="http://schemas.openxmlformats.org/drawingml/2006/main" r:embed="R09ccf1bd37a04fc2">
+          <a:blip xmlns:r="http://schemas.openxmlformats.org/officeDocument/2006/relationships" xmlns:a="http://schemas.openxmlformats.org/drawingml/2006/main" r:embed="R0817c778968b477e">
             <a:alphaModFix amt="35000"/>
           </a:blip>
           <a:srcRect xmlns:a="http://schemas.openxmlformats.org/drawingml/2006/main" l="0" t="9831" r="0" b="36385"/>
@@ -2740,7 +2836,7 @@
           <p:nvPr/>
         </p:nvPicPr>
         <p:blipFill>
-          <a:blip xmlns:r="http://schemas.openxmlformats.org/officeDocument/2006/relationships" xmlns:a="http://schemas.openxmlformats.org/drawingml/2006/main" r:embed="Rdc490e5727fc4b99"/>
+          <a:blip xmlns:r="http://schemas.openxmlformats.org/officeDocument/2006/relationships" xmlns:a="http://schemas.openxmlformats.org/drawingml/2006/main" r:embed="Rafcf050de164425e"/>
           <a:srcRect xmlns:a="http://schemas.openxmlformats.org/drawingml/2006/main" l="0" t="0" r="54251" b="0"/>
           <a:stretch xmlns:a="http://schemas.openxmlformats.org/drawingml/2006/main"/>
         </p:blipFill>
@@ -2997,7 +3093,7 @@
           <p:nvPr/>
         </p:nvPicPr>
         <p:blipFill rotWithShape="1">
-          <a:blip xmlns:r="http://schemas.openxmlformats.org/officeDocument/2006/relationships" xmlns:a="http://schemas.openxmlformats.org/drawingml/2006/main" r:embed="R64713872c6ff419b"/>
+          <a:blip xmlns:r="http://schemas.openxmlformats.org/officeDocument/2006/relationships" xmlns:a="http://schemas.openxmlformats.org/drawingml/2006/main" r:embed="R1883c2283db4463f"/>
           <a:srcRect xmlns:a="http://schemas.openxmlformats.org/drawingml/2006/main" l="0" t="0" r="1346" b="0"/>
           <a:stretch xmlns:a="http://schemas.openxmlformats.org/drawingml/2006/main"/>
         </p:blipFill>
@@ -3180,7 +3276,7 @@
           <p:nvPr/>
         </p:nvPicPr>
         <p:blipFill>
-          <a:blip xmlns:r="http://schemas.openxmlformats.org/officeDocument/2006/relationships" xmlns:a="http://schemas.openxmlformats.org/drawingml/2006/main" r:embed="R6010eb3e632540d6"/>
+          <a:blip xmlns:r="http://schemas.openxmlformats.org/officeDocument/2006/relationships" xmlns:a="http://schemas.openxmlformats.org/drawingml/2006/main" r:embed="R39e302bf53e54380"/>
           <a:stretch xmlns:a="http://schemas.openxmlformats.org/drawingml/2006/main">
             <a:fillRect l="0" t="0" r="0" b="0"/>
           </a:stretch>
@@ -3276,7 +3372,7 @@
           <p:nvPr/>
         </p:nvPicPr>
         <p:blipFill>
-          <a:blip xmlns:r="http://schemas.openxmlformats.org/officeDocument/2006/relationships" xmlns:a="http://schemas.openxmlformats.org/drawingml/2006/main" r:embed="Ra716c918d9e54165">
+          <a:blip xmlns:r="http://schemas.openxmlformats.org/officeDocument/2006/relationships" xmlns:a="http://schemas.openxmlformats.org/drawingml/2006/main" r:embed="Ref42fc509d804a06">
             <a:duotone>
               <a:prstClr val="black"/>
               <a:schemeClr val="accent1">
@@ -3443,7 +3539,7 @@
           <p:nvPr/>
         </p:nvPicPr>
         <p:blipFill rotWithShape="1">
-          <a:blip xmlns:r="http://schemas.openxmlformats.org/officeDocument/2006/relationships" xmlns:a="http://schemas.openxmlformats.org/drawingml/2006/main" r:embed="R421538541d2040b5">
+          <a:blip xmlns:r="http://schemas.openxmlformats.org/officeDocument/2006/relationships" xmlns:a="http://schemas.openxmlformats.org/drawingml/2006/main" r:embed="R96b78f9e867445f0">
             <a:alphaModFix amt="20000"/>
             <a:duotone>
               <a:schemeClr val="accent4">
@@ -3541,10 +3637,10 @@
   </p:cSld>
   <p:clrMap bg1="lt1" tx1="dk1" bg2="lt2" tx2="dk2" accent1="accent1" accent2="accent2" accent3="accent3" accent4="accent4" accent5="accent5" accent6="accent6" hlink="hlink" folHlink="folHlink"/>
   <p:sldLayoutIdLst>
-    <p:sldLayoutId xmlns:r="http://schemas.openxmlformats.org/officeDocument/2006/relationships" id="2147483649" r:id="R4b5c9cf81a014229"/>
-    <p:sldLayoutId xmlns:r="http://schemas.openxmlformats.org/officeDocument/2006/relationships" id="2147483650" r:id="Rf30c2f50726346fb"/>
-    <p:sldLayoutId xmlns:r="http://schemas.openxmlformats.org/officeDocument/2006/relationships" id="2147483651" r:id="R9154193f9a104887"/>
-    <p:sldLayoutId xmlns:r="http://schemas.openxmlformats.org/officeDocument/2006/relationships" id="2147483652" r:id="R21d759a1da814757"/>
+    <p:sldLayoutId xmlns:r="http://schemas.openxmlformats.org/officeDocument/2006/relationships" id="2147483649" r:id="R13ebd4a877434c98"/>
+    <p:sldLayoutId xmlns:r="http://schemas.openxmlformats.org/officeDocument/2006/relationships" id="2147483650" r:id="R08c3bcf7783a40fd"/>
+    <p:sldLayoutId xmlns:r="http://schemas.openxmlformats.org/officeDocument/2006/relationships" id="2147483651" r:id="Ra583cbc3df74413f"/>
+    <p:sldLayoutId xmlns:r="http://schemas.openxmlformats.org/officeDocument/2006/relationships" id="2147483652" r:id="R614c558457054b52"/>
   </p:sldLayoutIdLst>
   <p:hf hdr="0" ftr="0" dt="0"/>
   <p:txStyles>
@@ -4077,120 +4173,6 @@
       </p:grpSpPr>
       <p:sp>
         <p:nvSpPr>
-          <p:cNvPr id="3" name="内容占位符 2">
-            <a:extLst xmlns:a="http://schemas.openxmlformats.org/drawingml/2006/main">
-              <a:ext uri="{FF2B5EF4-FFF2-40B4-BE49-F238E27FC236}">
-                <a16:creationId xmlns:a16="http://schemas.microsoft.com/office/drawing/2014/main" id="{D1D30E0E-D2D5-4C08-A919-2A1C2D5A8D02}"/>
-              </a:ext>
-            </a:extLst>
-          </p:cNvPr>
-          <p:cNvSpPr>
-            <a:spLocks xmlns:a="http://schemas.openxmlformats.org/drawingml/2006/main" noGrp="1"/>
-          </p:cNvSpPr>
-          <p:nvPr>
-            <p:ph idx="10"/>
-          </p:nvPr>
-        </p:nvSpPr>
-        <p:spPr>
-          <a:xfrm xmlns:a="http://schemas.openxmlformats.org/drawingml/2006/main">
-            <a:off x="1143000" y="3009900"/>
-            <a:ext cx="9906000" cy="2362200"/>
-          </a:xfrm>
-        </p:spPr>
-        <p:txBody>
-          <a:bodyPr xmlns:a="http://schemas.openxmlformats.org/drawingml/2006/main" lIns="76200" tIns="38100" rIns="76200" bIns="38100" anchor="ctr"/>
-          <a:lstStyle xmlns:a="http://schemas.openxmlformats.org/drawingml/2006/main"/>
-          <a:p xmlns:a="http://schemas.openxmlformats.org/drawingml/2006/main">
-            <a:pPr algn="ctr">
-              <a:lnSpc>
-                <a:spcPct val="125000"/>
-              </a:lnSpc>
-              <a:buNone/>
-            </a:pPr>
-            <a:r>
-              <a:rPr sz="1800" b="0">
-                <a:solidFill>
-                  <a:srgbClr val="263746"/>
-                </a:solidFill>
-                <a:latin typeface="Microsoft YaHei"/>
-                <a:ea typeface="Microsoft YaHei"/>
-                <a:cs typeface="Microsoft YaHei"/>
-              </a:rPr>
-              <a:t>一次受限执行 → 可重复受限循环 → 个人工作流设计</a:t>
-            </a:r>
-            <a:endParaRPr>
-              <a:latin typeface="+mn-ea"/>
-              <a:ea typeface="+mn-ea"/>
-              <a:cs typeface="+mn-ea"/>
-            </a:endParaRPr>
-          </a:p>
-          <a:p xmlns:a="http://schemas.openxmlformats.org/drawingml/2006/main">
-            <a:r>
-              <a:rPr>
-                <a:latin typeface="+mn-ea"/>
-                <a:ea typeface="+mn-ea"/>
-                <a:cs typeface="+mn-ea"/>
-              </a:rPr>
-              <a:t/>
-            </a:r>
-            <a:endParaRPr>
-              <a:latin typeface="+mn-ea"/>
-              <a:ea typeface="+mn-ea"/>
-              <a:cs typeface="+mn-ea"/>
-            </a:endParaRPr>
-          </a:p>
-          <a:p xmlns:a="http://schemas.openxmlformats.org/drawingml/2006/main">
-            <a:pPr algn="ctr">
-              <a:lnSpc>
-                <a:spcPct val="125000"/>
-              </a:lnSpc>
-              <a:buNone/>
-            </a:pPr>
-            <a:r>
-              <a:rPr sz="1800" b="0">
-                <a:solidFill>
-                  <a:srgbClr val="263746"/>
-                </a:solidFill>
-                <a:latin typeface="Microsoft YaHei"/>
-                <a:ea typeface="Microsoft YaHei"/>
-                <a:cs typeface="Microsoft YaHei"/>
-              </a:rPr>
-              <a:t>五步 · 四约束 · 失败保留 · 人工审核</a:t>
-            </a:r>
-            <a:endParaRPr>
-              <a:latin typeface="+mn-ea"/>
-              <a:ea typeface="+mn-ea"/>
-              <a:cs typeface="+mn-ea"/>
-            </a:endParaRPr>
-          </a:p>
-          <a:p xmlns:a="http://schemas.openxmlformats.org/drawingml/2006/main">
-            <a:pPr algn="ctr">
-              <a:lnSpc>
-                <a:spcPct val="125000"/>
-              </a:lnSpc>
-              <a:buNone/>
-            </a:pPr>
-            <a:r>
-              <a:rPr sz="1800" b="0">
-                <a:solidFill>
-                  <a:srgbClr val="263746"/>
-                </a:solidFill>
-                <a:latin typeface="Microsoft YaHei"/>
-                <a:ea typeface="Microsoft YaHei"/>
-                <a:cs typeface="Microsoft YaHei"/>
-              </a:rPr>
-              <a:t>第十一讲｜阶段七：原型验证（实验追踪）</a:t>
-            </a:r>
-            <a:endParaRPr>
-              <a:latin typeface="+mn-ea"/>
-              <a:ea typeface="+mn-ea"/>
-              <a:cs typeface="+mn-ea"/>
-            </a:endParaRPr>
-          </a:p>
-        </p:txBody>
-      </p:sp>
-      <p:sp>
-        <p:nvSpPr>
           <p:cNvPr id="2" name="矩形 11">
             <a:extLst xmlns:a="http://schemas.openxmlformats.org/drawingml/2006/main">
               <a:ext uri="{FF2B5EF4-FFF2-40B4-BE49-F238E27FC236}">
@@ -4205,8 +4187,8 @@
         </p:nvSpPr>
         <p:spPr>
           <a:xfrm xmlns:a="http://schemas.openxmlformats.org/drawingml/2006/main">
-            <a:off x="1238250" y="1257300"/>
-            <a:ext cx="9715500" cy="1638300"/>
+            <a:off x="1143000" y="1790700"/>
+            <a:ext cx="9906000" cy="1524000"/>
           </a:xfrm>
           <a:prstGeom xmlns:a="http://schemas.openxmlformats.org/drawingml/2006/main" prst="rect">
             <a:avLst/>
@@ -4220,12 +4202,12 @@
           <a:p xmlns:a="http://schemas.openxmlformats.org/drawingml/2006/main">
             <a:pPr algn="ctr">
               <a:lnSpc>
-                <a:spcPct val="110000"/>
+                <a:spcPct val="112000"/>
               </a:lnSpc>
               <a:buNone/>
             </a:pPr>
             <a:r>
-              <a:rPr sz="3150" b="1">
+              <a:rPr sz="2850" b="1">
                 <a:solidFill>
                   <a:srgbClr val="C8161E"/>
                 </a:solidFill>
@@ -4233,7 +4215,7 @@
                 <a:ea typeface="Microsoft YaHei"/>
                 <a:cs typeface="Microsoft YaHei"/>
               </a:rPr>
-              <a:t>实验自动化与 AutoResearch 循环</a:t>
+              <a:t>第11讲 实验自动化、AutoResearch 循环与结果追踪</a:t>
             </a:r>
             <a:endParaRPr sz="4000" b="1" kern="0" spc="20">
               <a:solidFill>
@@ -4375,6 +4357,7 @@
           <a:lstStyle xmlns:a="http://schemas.openxmlformats.org/drawingml/2006/main"/>
           <a:p xmlns:a="http://schemas.openxmlformats.org/drawingml/2006/main">
             <a:pPr algn="ctr">
+              <a:buNone/>
               <a:defRPr sz="1350" b="1">
                 <a:solidFill>
                   <a:srgbClr val="C8161E"/>
@@ -4430,6 +4413,7 @@
           <a:lstStyle xmlns:a="http://schemas.openxmlformats.org/drawingml/2006/main"/>
           <a:p xmlns:a="http://schemas.openxmlformats.org/drawingml/2006/main">
             <a:pPr algn="ctr">
+              <a:buNone/>
               <a:defRPr sz="1350" b="1">
                 <a:solidFill>
                   <a:srgbClr val="FFFFFF"/>
@@ -4485,6 +4469,7 @@
           <a:lstStyle xmlns:a="http://schemas.openxmlformats.org/drawingml/2006/main"/>
           <a:p xmlns:a="http://schemas.openxmlformats.org/drawingml/2006/main">
             <a:pPr algn="ctr">
+              <a:buNone/>
               <a:defRPr sz="1350" b="1">
                 <a:solidFill>
                   <a:srgbClr val="263746"/>
@@ -4540,6 +4525,7 @@
           <a:lstStyle xmlns:a="http://schemas.openxmlformats.org/drawingml/2006/main"/>
           <a:p xmlns:a="http://schemas.openxmlformats.org/drawingml/2006/main">
             <a:pPr algn="ctr">
+              <a:buNone/>
               <a:defRPr sz="1350" b="1">
                 <a:solidFill>
                   <a:srgbClr val="FFFFFF"/>
@@ -4595,6 +4581,7 @@
           <a:lstStyle xmlns:a="http://schemas.openxmlformats.org/drawingml/2006/main"/>
           <a:p xmlns:a="http://schemas.openxmlformats.org/drawingml/2006/main">
             <a:pPr algn="ctr">
+              <a:buNone/>
               <a:defRPr sz="1350" b="1">
                 <a:solidFill>
                   <a:srgbClr val="263746"/>
@@ -4650,6 +4637,7 @@
           <a:lstStyle xmlns:a="http://schemas.openxmlformats.org/drawingml/2006/main"/>
           <a:p xmlns:a="http://schemas.openxmlformats.org/drawingml/2006/main">
             <a:pPr algn="ctr">
+              <a:buNone/>
               <a:defRPr sz="1350" b="1">
                 <a:solidFill>
                   <a:srgbClr val="FFFFFF"/>
@@ -4705,6 +4693,7 @@
           <a:lstStyle xmlns:a="http://schemas.openxmlformats.org/drawingml/2006/main"/>
           <a:p xmlns:a="http://schemas.openxmlformats.org/drawingml/2006/main">
             <a:pPr algn="ctr">
+              <a:buNone/>
               <a:defRPr sz="1350" b="1">
                 <a:solidFill>
                   <a:srgbClr val="263746"/>
@@ -4760,6 +4749,7 @@
           <a:lstStyle xmlns:a="http://schemas.openxmlformats.org/drawingml/2006/main"/>
           <a:p xmlns:a="http://schemas.openxmlformats.org/drawingml/2006/main">
             <a:pPr algn="ctr">
+              <a:buNone/>
               <a:defRPr sz="1350" b="1">
                 <a:solidFill>
                   <a:srgbClr val="FFFFFF"/>
@@ -4815,6 +4805,7 @@
           <a:lstStyle xmlns:a="http://schemas.openxmlformats.org/drawingml/2006/main"/>
           <a:p xmlns:a="http://schemas.openxmlformats.org/drawingml/2006/main">
             <a:pPr algn="ctr">
+              <a:buNone/>
               <a:defRPr sz="1350" b="1">
                 <a:solidFill>
                   <a:srgbClr val="263746"/>
@@ -4996,6 +4987,7 @@
           <a:lstStyle xmlns:a="http://schemas.openxmlformats.org/drawingml/2006/main"/>
           <a:p xmlns:a="http://schemas.openxmlformats.org/drawingml/2006/main">
             <a:pPr algn="ctr">
+              <a:buNone/>
               <a:defRPr sz="1275" b="1">
                 <a:solidFill>
                   <a:srgbClr val="FFFFFF"/>
@@ -5140,6 +5132,7 @@
           <a:lstStyle xmlns:a="http://schemas.openxmlformats.org/drawingml/2006/main"/>
           <a:p xmlns:a="http://schemas.openxmlformats.org/drawingml/2006/main">
             <a:pPr algn="ctr">
+              <a:buNone/>
               <a:defRPr sz="1275" b="1">
                 <a:solidFill>
                   <a:srgbClr val="FFFFFF"/>
@@ -5284,6 +5277,7 @@
           <a:lstStyle xmlns:a="http://schemas.openxmlformats.org/drawingml/2006/main"/>
           <a:p xmlns:a="http://schemas.openxmlformats.org/drawingml/2006/main">
             <a:pPr algn="ctr">
+              <a:buNone/>
               <a:defRPr sz="1275" b="1">
                 <a:solidFill>
                   <a:srgbClr val="FFFFFF"/>
@@ -5428,6 +5422,7 @@
           <a:lstStyle xmlns:a="http://schemas.openxmlformats.org/drawingml/2006/main"/>
           <a:p xmlns:a="http://schemas.openxmlformats.org/drawingml/2006/main">
             <a:pPr algn="ctr">
+              <a:buNone/>
               <a:defRPr sz="1275" b="1">
                 <a:solidFill>
                   <a:srgbClr val="FFFFFF"/>
@@ -5572,6 +5567,7 @@
           <a:lstStyle xmlns:a="http://schemas.openxmlformats.org/drawingml/2006/main"/>
           <a:p xmlns:a="http://schemas.openxmlformats.org/drawingml/2006/main">
             <a:pPr algn="ctr">
+              <a:buNone/>
               <a:defRPr sz="1275" b="1">
                 <a:solidFill>
                   <a:srgbClr val="FFFFFF"/>
@@ -5716,6 +5712,7 @@
           <a:lstStyle xmlns:a="http://schemas.openxmlformats.org/drawingml/2006/main"/>
           <a:p xmlns:a="http://schemas.openxmlformats.org/drawingml/2006/main">
             <a:pPr algn="ctr">
+              <a:buNone/>
               <a:defRPr sz="1650" b="1">
                 <a:solidFill>
                   <a:srgbClr val="FFFFFF"/>
@@ -5769,6 +5766,7 @@
           <a:lstStyle xmlns:a="http://schemas.openxmlformats.org/drawingml/2006/main"/>
           <a:p xmlns:a="http://schemas.openxmlformats.org/drawingml/2006/main">
             <a:pPr algn="ctr">
+              <a:buNone/>
               <a:defRPr sz="1725" b="1">
                 <a:solidFill>
                   <a:srgbClr val="C8161E"/>
@@ -5918,6 +5916,7 @@
           <a:lstStyle xmlns:a="http://schemas.openxmlformats.org/drawingml/2006/main"/>
           <a:p xmlns:a="http://schemas.openxmlformats.org/drawingml/2006/main">
             <a:pPr algn="ctr">
+              <a:buNone/>
               <a:defRPr sz="1350" b="1">
                 <a:solidFill>
                   <a:srgbClr val="FFFFFF"/>
@@ -5973,6 +5972,7 @@
           <a:lstStyle xmlns:a="http://schemas.openxmlformats.org/drawingml/2006/main"/>
           <a:p xmlns:a="http://schemas.openxmlformats.org/drawingml/2006/main">
             <a:pPr algn="ctr">
+              <a:buNone/>
               <a:defRPr sz="1350" b="1">
                 <a:solidFill>
                   <a:srgbClr val="FFFFFF"/>
@@ -6884,6 +6884,7 @@
           <a:lstStyle xmlns:a="http://schemas.openxmlformats.org/drawingml/2006/main"/>
           <a:p xmlns:a="http://schemas.openxmlformats.org/drawingml/2006/main">
             <a:pPr algn="ctr">
+              <a:buNone/>
               <a:defRPr sz="2025" b="1">
                 <a:solidFill>
                   <a:srgbClr val="FFFFFF"/>
@@ -7033,6 +7034,7 @@
           <a:lstStyle xmlns:a="http://schemas.openxmlformats.org/drawingml/2006/main"/>
           <a:p xmlns:a="http://schemas.openxmlformats.org/drawingml/2006/main">
             <a:pPr algn="ctr">
+              <a:buNone/>
               <a:defRPr sz="1875" b="1">
                 <a:solidFill>
                   <a:srgbClr val="FFFFFF"/>
@@ -7245,6 +7247,7 @@
           <a:lstStyle xmlns:a="http://schemas.openxmlformats.org/drawingml/2006/main"/>
           <a:p xmlns:a="http://schemas.openxmlformats.org/drawingml/2006/main">
             <a:pPr algn="ctr">
+              <a:buNone/>
               <a:defRPr sz="1800" b="1">
                 <a:solidFill>
                   <a:srgbClr val="18354E"/>
@@ -7300,6 +7303,7 @@
           <a:lstStyle xmlns:a="http://schemas.openxmlformats.org/drawingml/2006/main"/>
           <a:p xmlns:a="http://schemas.openxmlformats.org/drawingml/2006/main">
             <a:pPr algn="ctr">
+              <a:buNone/>
               <a:defRPr sz="2100" b="1">
                 <a:solidFill>
                   <a:srgbClr val="FFFFFF"/>
@@ -7522,6 +7526,7 @@
           <a:lstStyle xmlns:a="http://schemas.openxmlformats.org/drawingml/2006/main"/>
           <a:p xmlns:a="http://schemas.openxmlformats.org/drawingml/2006/main">
             <a:pPr algn="ctr">
+              <a:buNone/>
               <a:defRPr sz="1725" b="1">
                 <a:solidFill>
                   <a:srgbClr val="FFFFFF"/>
@@ -7671,6 +7676,7 @@
           <a:lstStyle xmlns:a="http://schemas.openxmlformats.org/drawingml/2006/main"/>
           <a:p xmlns:a="http://schemas.openxmlformats.org/drawingml/2006/main">
             <a:pPr algn="ctr">
+              <a:buNone/>
               <a:defRPr sz="1350" b="1">
                 <a:solidFill>
                   <a:srgbClr val="FFFFFF"/>
@@ -7726,6 +7732,7 @@
           <a:lstStyle xmlns:a="http://schemas.openxmlformats.org/drawingml/2006/main"/>
           <a:p xmlns:a="http://schemas.openxmlformats.org/drawingml/2006/main">
             <a:pPr algn="ctr">
+              <a:buNone/>
               <a:defRPr sz="1350" b="1">
                 <a:solidFill>
                   <a:srgbClr val="FFFFFF"/>
@@ -7781,6 +7788,7 @@
           <a:lstStyle xmlns:a="http://schemas.openxmlformats.org/drawingml/2006/main"/>
           <a:p xmlns:a="http://schemas.openxmlformats.org/drawingml/2006/main">
             <a:pPr algn="ctr">
+              <a:buNone/>
               <a:defRPr sz="1350" b="1">
                 <a:solidFill>
                   <a:srgbClr val="FFFFFF"/>
@@ -9298,6 +9306,7 @@
           <a:lstStyle xmlns:a="http://schemas.openxmlformats.org/drawingml/2006/main"/>
           <a:p xmlns:a="http://schemas.openxmlformats.org/drawingml/2006/main">
             <a:pPr algn="ctr">
+              <a:buNone/>
               <a:defRPr sz="1500" b="1">
                 <a:solidFill>
                   <a:srgbClr val="C8161E"/>
@@ -9449,6 +9458,7 @@
           <a:lstStyle xmlns:a="http://schemas.openxmlformats.org/drawingml/2006/main"/>
           <a:p xmlns:a="http://schemas.openxmlformats.org/drawingml/2006/main">
             <a:pPr algn="ctr">
+              <a:buNone/>
               <a:defRPr sz="2250" b="1">
                 <a:solidFill>
                   <a:srgbClr val="FFFFFF"/>
@@ -9508,6 +9518,7 @@
           <a:lstStyle xmlns:a="http://schemas.openxmlformats.org/drawingml/2006/main"/>
           <a:p xmlns:a="http://schemas.openxmlformats.org/drawingml/2006/main">
             <a:pPr algn="ctr">
+              <a:buNone/>
               <a:defRPr sz="2100" b="1">
                 <a:solidFill>
                   <a:srgbClr val="18354E"/>
@@ -9563,6 +9574,7 @@
           <a:lstStyle xmlns:a="http://schemas.openxmlformats.org/drawingml/2006/main"/>
           <a:p xmlns:a="http://schemas.openxmlformats.org/drawingml/2006/main">
             <a:pPr algn="ctr">
+              <a:buNone/>
               <a:defRPr sz="1800" b="1">
                 <a:solidFill>
                   <a:srgbClr val="FFFFFF"/>
@@ -9618,6 +9630,7 @@
           <a:lstStyle xmlns:a="http://schemas.openxmlformats.org/drawingml/2006/main"/>
           <a:p xmlns:a="http://schemas.openxmlformats.org/drawingml/2006/main">
             <a:pPr algn="l">
+              <a:buNone/>
               <a:defRPr sz="1800" b="1">
                 <a:solidFill>
                   <a:srgbClr val="C8161E"/>
@@ -9673,6 +9686,7 @@
           <a:lstStyle xmlns:a="http://schemas.openxmlformats.org/drawingml/2006/main"/>
           <a:p xmlns:a="http://schemas.openxmlformats.org/drawingml/2006/main">
             <a:pPr algn="l">
+              <a:buNone/>
               <a:defRPr sz="1800" b="1">
                 <a:solidFill>
                   <a:srgbClr val="C8161E"/>
@@ -9728,6 +9742,7 @@
           <a:lstStyle xmlns:a="http://schemas.openxmlformats.org/drawingml/2006/main"/>
           <a:p xmlns:a="http://schemas.openxmlformats.org/drawingml/2006/main">
             <a:pPr algn="l">
+              <a:buNone/>
               <a:defRPr sz="1800" b="1">
                 <a:solidFill>
                   <a:srgbClr val="C8161E"/>
@@ -9783,6 +9798,7 @@
           <a:lstStyle xmlns:a="http://schemas.openxmlformats.org/drawingml/2006/main"/>
           <a:p xmlns:a="http://schemas.openxmlformats.org/drawingml/2006/main">
             <a:pPr algn="l">
+              <a:buNone/>
               <a:defRPr sz="1800" b="1">
                 <a:solidFill>
                   <a:srgbClr val="C8161E"/>
@@ -9995,6 +10011,7 @@
           <a:lstStyle xmlns:a="http://schemas.openxmlformats.org/drawingml/2006/main"/>
           <a:p xmlns:a="http://schemas.openxmlformats.org/drawingml/2006/main">
             <a:pPr algn="ctr">
+              <a:buNone/>
               <a:defRPr sz="1350" b="1">
                 <a:solidFill>
                   <a:srgbClr val="C8161E"/>
@@ -10050,6 +10067,7 @@
           <a:lstStyle xmlns:a="http://schemas.openxmlformats.org/drawingml/2006/main"/>
           <a:p xmlns:a="http://schemas.openxmlformats.org/drawingml/2006/main">
             <a:pPr algn="ctr">
+              <a:buNone/>
               <a:defRPr sz="1800" b="1">
                 <a:solidFill>
                   <a:srgbClr val="FFFFFF"/>
@@ -10236,6 +10254,7 @@
           <a:lstStyle xmlns:a="http://schemas.openxmlformats.org/drawingml/2006/main"/>
           <a:p xmlns:a="http://schemas.openxmlformats.org/drawingml/2006/main">
             <a:pPr algn="ctr">
+              <a:buNone/>
               <a:defRPr sz="1800" b="1">
                 <a:solidFill>
                   <a:srgbClr val="FFFFFF"/>
@@ -10424,6 +10443,7 @@
           <a:lstStyle xmlns:a="http://schemas.openxmlformats.org/drawingml/2006/main"/>
           <a:p xmlns:a="http://schemas.openxmlformats.org/drawingml/2006/main">
             <a:pPr algn="ctr">
+              <a:buNone/>
               <a:defRPr sz="1725" b="1">
                 <a:solidFill>
                   <a:srgbClr val="FFFFFF"/>
@@ -10575,6 +10595,7 @@
           <a:lstStyle xmlns:a="http://schemas.openxmlformats.org/drawingml/2006/main"/>
           <a:p xmlns:a="http://schemas.openxmlformats.org/drawingml/2006/main">
             <a:pPr algn="ctr">
+              <a:buNone/>
               <a:defRPr sz="1275" b="1">
                 <a:solidFill>
                   <a:srgbClr val="FFFFFF"/>
@@ -10630,6 +10651,7 @@
           <a:lstStyle xmlns:a="http://schemas.openxmlformats.org/drawingml/2006/main"/>
           <a:p xmlns:a="http://schemas.openxmlformats.org/drawingml/2006/main">
             <a:pPr algn="l">
+              <a:buNone/>
               <a:defRPr sz="1500" b="1">
                 <a:solidFill>
                   <a:srgbClr val="263746"/>
@@ -10687,6 +10709,7 @@
           <a:lstStyle xmlns:a="http://schemas.openxmlformats.org/drawingml/2006/main"/>
           <a:p xmlns:a="http://schemas.openxmlformats.org/drawingml/2006/main">
             <a:pPr algn="ctr">
+              <a:buNone/>
               <a:defRPr sz="1275" b="1">
                 <a:solidFill>
                   <a:srgbClr val="FFFFFF"/>
@@ -10742,6 +10765,7 @@
           <a:lstStyle xmlns:a="http://schemas.openxmlformats.org/drawingml/2006/main"/>
           <a:p xmlns:a="http://schemas.openxmlformats.org/drawingml/2006/main">
             <a:pPr algn="l">
+              <a:buNone/>
               <a:defRPr sz="1500" b="1">
                 <a:solidFill>
                   <a:srgbClr val="263746"/>
@@ -10799,6 +10823,7 @@
           <a:lstStyle xmlns:a="http://schemas.openxmlformats.org/drawingml/2006/main"/>
           <a:p xmlns:a="http://schemas.openxmlformats.org/drawingml/2006/main">
             <a:pPr algn="ctr">
+              <a:buNone/>
               <a:defRPr sz="1275" b="1">
                 <a:solidFill>
                   <a:srgbClr val="FFFFFF"/>
@@ -10854,6 +10879,7 @@
           <a:lstStyle xmlns:a="http://schemas.openxmlformats.org/drawingml/2006/main"/>
           <a:p xmlns:a="http://schemas.openxmlformats.org/drawingml/2006/main">
             <a:pPr algn="l">
+              <a:buNone/>
               <a:defRPr sz="1500" b="1">
                 <a:solidFill>
                   <a:srgbClr val="263746"/>
@@ -10911,6 +10937,7 @@
           <a:lstStyle xmlns:a="http://schemas.openxmlformats.org/drawingml/2006/main"/>
           <a:p xmlns:a="http://schemas.openxmlformats.org/drawingml/2006/main">
             <a:pPr algn="ctr">
+              <a:buNone/>
               <a:defRPr sz="1275" b="1">
                 <a:solidFill>
                   <a:srgbClr val="FFFFFF"/>
@@ -10966,6 +10993,7 @@
           <a:lstStyle xmlns:a="http://schemas.openxmlformats.org/drawingml/2006/main"/>
           <a:p xmlns:a="http://schemas.openxmlformats.org/drawingml/2006/main">
             <a:pPr algn="l">
+              <a:buNone/>
               <a:defRPr sz="1500" b="1">
                 <a:solidFill>
                   <a:srgbClr val="263746"/>
@@ -11023,6 +11051,7 @@
           <a:lstStyle xmlns:a="http://schemas.openxmlformats.org/drawingml/2006/main"/>
           <a:p xmlns:a="http://schemas.openxmlformats.org/drawingml/2006/main">
             <a:pPr algn="ctr">
+              <a:buNone/>
               <a:defRPr sz="1275" b="1">
                 <a:solidFill>
                   <a:srgbClr val="FFFFFF"/>
@@ -11078,6 +11107,7 @@
           <a:lstStyle xmlns:a="http://schemas.openxmlformats.org/drawingml/2006/main"/>
           <a:p xmlns:a="http://schemas.openxmlformats.org/drawingml/2006/main">
             <a:pPr algn="l">
+              <a:buNone/>
               <a:defRPr sz="1500" b="1">
                 <a:solidFill>
                   <a:srgbClr val="263746"/>
@@ -11135,6 +11165,7 @@
           <a:lstStyle xmlns:a="http://schemas.openxmlformats.org/drawingml/2006/main"/>
           <a:p xmlns:a="http://schemas.openxmlformats.org/drawingml/2006/main">
             <a:pPr algn="ctr">
+              <a:buNone/>
               <a:defRPr sz="1275" b="1">
                 <a:solidFill>
                   <a:srgbClr val="FFFFFF"/>
@@ -11190,6 +11221,7 @@
           <a:lstStyle xmlns:a="http://schemas.openxmlformats.org/drawingml/2006/main"/>
           <a:p xmlns:a="http://schemas.openxmlformats.org/drawingml/2006/main">
             <a:pPr algn="l">
+              <a:buNone/>
               <a:defRPr sz="1500" b="1">
                 <a:solidFill>
                   <a:srgbClr val="263746"/>
@@ -11245,6 +11277,7 @@
           <a:lstStyle xmlns:a="http://schemas.openxmlformats.org/drawingml/2006/main"/>
           <a:p xmlns:a="http://schemas.openxmlformats.org/drawingml/2006/main">
             <a:pPr algn="ctr">
+              <a:buNone/>
               <a:defRPr sz="1950" b="1">
                 <a:solidFill>
                   <a:srgbClr val="FFFFFF"/>
@@ -11478,6 +11511,7 @@
           <a:lstStyle xmlns:a="http://schemas.openxmlformats.org/drawingml/2006/main"/>
           <a:p xmlns:a="http://schemas.openxmlformats.org/drawingml/2006/main">
             <a:pPr algn="ctr">
+              <a:buNone/>
               <a:defRPr sz="1425" b="1">
                 <a:solidFill>
                   <a:srgbClr val="C8161E"/>
@@ -11627,6 +11661,7 @@
           <a:lstStyle xmlns:a="http://schemas.openxmlformats.org/drawingml/2006/main"/>
           <a:p xmlns:a="http://schemas.openxmlformats.org/drawingml/2006/main">
             <a:pPr algn="ctr">
+              <a:buNone/>
               <a:defRPr sz="1725" b="1">
                 <a:solidFill>
                   <a:srgbClr val="FFFFFF"/>
@@ -11682,6 +11717,7 @@
           <a:lstStyle xmlns:a="http://schemas.openxmlformats.org/drawingml/2006/main"/>
           <a:p xmlns:a="http://schemas.openxmlformats.org/drawingml/2006/main">
             <a:pPr algn="l">
+              <a:buNone/>
               <a:defRPr sz="1350" b="1">
                 <a:solidFill>
                   <a:srgbClr val="263746"/>
@@ -11737,6 +11773,7 @@
           <a:lstStyle xmlns:a="http://schemas.openxmlformats.org/drawingml/2006/main"/>
           <a:p xmlns:a="http://schemas.openxmlformats.org/drawingml/2006/main">
             <a:pPr algn="l">
+              <a:buNone/>
               <a:defRPr sz="1350" b="1">
                 <a:solidFill>
                   <a:srgbClr val="263746"/>
@@ -11792,6 +11829,7 @@
           <a:lstStyle xmlns:a="http://schemas.openxmlformats.org/drawingml/2006/main"/>
           <a:p xmlns:a="http://schemas.openxmlformats.org/drawingml/2006/main">
             <a:pPr algn="l">
+              <a:buNone/>
               <a:defRPr sz="1350" b="1">
                 <a:solidFill>
                   <a:srgbClr val="263746"/>
@@ -11847,6 +11885,7 @@
           <a:lstStyle xmlns:a="http://schemas.openxmlformats.org/drawingml/2006/main"/>
           <a:p xmlns:a="http://schemas.openxmlformats.org/drawingml/2006/main">
             <a:pPr algn="l">
+              <a:buNone/>
               <a:defRPr sz="1350" b="1">
                 <a:solidFill>
                   <a:srgbClr val="263746"/>
@@ -11902,6 +11941,7 @@
           <a:lstStyle xmlns:a="http://schemas.openxmlformats.org/drawingml/2006/main"/>
           <a:p xmlns:a="http://schemas.openxmlformats.org/drawingml/2006/main">
             <a:pPr algn="l">
+              <a:buNone/>
               <a:defRPr sz="1350" b="1">
                 <a:solidFill>
                   <a:srgbClr val="C8161E"/>
@@ -11957,6 +11997,7 @@
           <a:lstStyle xmlns:a="http://schemas.openxmlformats.org/drawingml/2006/main"/>
           <a:p xmlns:a="http://schemas.openxmlformats.org/drawingml/2006/main">
             <a:pPr algn="l">
+              <a:buNone/>
               <a:defRPr sz="1350" b="1">
                 <a:solidFill>
                   <a:srgbClr val="263746"/>
@@ -12012,6 +12053,7 @@
           <a:lstStyle xmlns:a="http://schemas.openxmlformats.org/drawingml/2006/main"/>
           <a:p xmlns:a="http://schemas.openxmlformats.org/drawingml/2006/main">
             <a:pPr algn="l">
+              <a:buNone/>
               <a:defRPr sz="1350" b="1">
                 <a:solidFill>
                   <a:srgbClr val="263746"/>
@@ -12067,6 +12109,7 @@
           <a:lstStyle xmlns:a="http://schemas.openxmlformats.org/drawingml/2006/main"/>
           <a:p xmlns:a="http://schemas.openxmlformats.org/drawingml/2006/main">
             <a:pPr algn="ctr">
+              <a:buNone/>
               <a:defRPr sz="1425" b="1">
                 <a:solidFill>
                   <a:srgbClr val="FFFFFF"/>
@@ -12122,6 +12165,7 @@
           <a:lstStyle xmlns:a="http://schemas.openxmlformats.org/drawingml/2006/main"/>
           <a:p xmlns:a="http://schemas.openxmlformats.org/drawingml/2006/main">
             <a:pPr algn="ctr">
+              <a:buNone/>
               <a:defRPr sz="1350" b="1">
                 <a:solidFill>
                   <a:srgbClr val="FFFFFF"/>
@@ -12177,6 +12221,7 @@
           <a:lstStyle xmlns:a="http://schemas.openxmlformats.org/drawingml/2006/main"/>
           <a:p xmlns:a="http://schemas.openxmlformats.org/drawingml/2006/main">
             <a:pPr algn="l">
+              <a:buNone/>
               <a:defRPr sz="1350" b="1">
                 <a:solidFill>
                   <a:srgbClr val="263746"/>
@@ -12232,6 +12277,7 @@
           <a:lstStyle xmlns:a="http://schemas.openxmlformats.org/drawingml/2006/main"/>
           <a:p xmlns:a="http://schemas.openxmlformats.org/drawingml/2006/main">
             <a:pPr algn="ctr">
+              <a:buNone/>
               <a:defRPr sz="1350" b="1">
                 <a:solidFill>
                   <a:srgbClr val="FFFFFF"/>
@@ -12287,6 +12333,7 @@
           <a:lstStyle xmlns:a="http://schemas.openxmlformats.org/drawingml/2006/main"/>
           <a:p xmlns:a="http://schemas.openxmlformats.org/drawingml/2006/main">
             <a:pPr algn="l">
+              <a:buNone/>
               <a:defRPr sz="1350" b="1">
                 <a:solidFill>
                   <a:srgbClr val="263746"/>
@@ -12342,6 +12389,7 @@
           <a:lstStyle xmlns:a="http://schemas.openxmlformats.org/drawingml/2006/main"/>
           <a:p xmlns:a="http://schemas.openxmlformats.org/drawingml/2006/main">
             <a:pPr algn="ctr">
+              <a:buNone/>
               <a:defRPr sz="1350" b="1">
                 <a:solidFill>
                   <a:srgbClr val="FFFFFF"/>
@@ -12397,6 +12445,7 @@
           <a:lstStyle xmlns:a="http://schemas.openxmlformats.org/drawingml/2006/main"/>
           <a:p xmlns:a="http://schemas.openxmlformats.org/drawingml/2006/main">
             <a:pPr algn="l">
+              <a:buNone/>
               <a:defRPr sz="1350" b="1">
                 <a:solidFill>
                   <a:srgbClr val="263746"/>
@@ -12452,6 +12501,7 @@
           <a:lstStyle xmlns:a="http://schemas.openxmlformats.org/drawingml/2006/main"/>
           <a:p xmlns:a="http://schemas.openxmlformats.org/drawingml/2006/main">
             <a:pPr algn="ctr">
+              <a:buNone/>
               <a:defRPr sz="1350" b="1">
                 <a:solidFill>
                   <a:srgbClr val="FFFFFF"/>
@@ -12507,6 +12557,7 @@
           <a:lstStyle xmlns:a="http://schemas.openxmlformats.org/drawingml/2006/main"/>
           <a:p xmlns:a="http://schemas.openxmlformats.org/drawingml/2006/main">
             <a:pPr algn="l">
+              <a:buNone/>
               <a:defRPr sz="1350" b="1">
                 <a:solidFill>
                   <a:srgbClr val="263746"/>
@@ -12562,6 +12613,7 @@
           <a:lstStyle xmlns:a="http://schemas.openxmlformats.org/drawingml/2006/main"/>
           <a:p xmlns:a="http://schemas.openxmlformats.org/drawingml/2006/main">
             <a:pPr algn="ctr">
+              <a:buNone/>
               <a:defRPr sz="1350" b="1">
                 <a:solidFill>
                   <a:srgbClr val="FFFFFF"/>
@@ -12617,6 +12669,7 @@
           <a:lstStyle xmlns:a="http://schemas.openxmlformats.org/drawingml/2006/main"/>
           <a:p xmlns:a="http://schemas.openxmlformats.org/drawingml/2006/main">
             <a:pPr algn="l">
+              <a:buNone/>
               <a:defRPr sz="1350" b="1">
                 <a:solidFill>
                   <a:srgbClr val="263746"/>
@@ -12672,6 +12725,7 @@
           <a:lstStyle xmlns:a="http://schemas.openxmlformats.org/drawingml/2006/main"/>
           <a:p xmlns:a="http://schemas.openxmlformats.org/drawingml/2006/main">
             <a:pPr algn="ctr">
+              <a:buNone/>
               <a:defRPr sz="1350" b="1">
                 <a:solidFill>
                   <a:srgbClr val="FFFFFF"/>
@@ -12727,6 +12781,7 @@
           <a:lstStyle xmlns:a="http://schemas.openxmlformats.org/drawingml/2006/main"/>
           <a:p xmlns:a="http://schemas.openxmlformats.org/drawingml/2006/main">
             <a:pPr algn="l">
+              <a:buNone/>
               <a:defRPr sz="1350" b="1">
                 <a:solidFill>
                   <a:srgbClr val="263746"/>
@@ -12782,6 +12837,7 @@
           <a:lstStyle xmlns:a="http://schemas.openxmlformats.org/drawingml/2006/main"/>
           <a:p xmlns:a="http://schemas.openxmlformats.org/drawingml/2006/main">
             <a:pPr algn="ctr">
+              <a:buNone/>
               <a:defRPr sz="1350" b="1">
                 <a:solidFill>
                   <a:srgbClr val="FFFFFF"/>
@@ -12837,6 +12893,7 @@
           <a:lstStyle xmlns:a="http://schemas.openxmlformats.org/drawingml/2006/main"/>
           <a:p xmlns:a="http://schemas.openxmlformats.org/drawingml/2006/main">
             <a:pPr algn="l">
+              <a:buNone/>
               <a:defRPr sz="1350" b="1">
                 <a:solidFill>
                   <a:srgbClr val="263746"/>
@@ -12890,6 +12947,7 @@
           <a:lstStyle xmlns:a="http://schemas.openxmlformats.org/drawingml/2006/main"/>
           <a:p xmlns:a="http://schemas.openxmlformats.org/drawingml/2006/main">
             <a:pPr algn="ctr">
+              <a:buNone/>
               <a:defRPr sz="1575" b="1">
                 <a:solidFill>
                   <a:srgbClr val="C8161E"/>
@@ -13039,6 +13097,7 @@
           <a:lstStyle xmlns:a="http://schemas.openxmlformats.org/drawingml/2006/main"/>
           <a:p xmlns:a="http://schemas.openxmlformats.org/drawingml/2006/main">
             <a:pPr algn="ctr">
+              <a:buNone/>
               <a:defRPr sz="1950" b="1">
                 <a:solidFill>
                   <a:srgbClr val="FFFFFF"/>
@@ -13225,6 +13284,7 @@
           <a:lstStyle xmlns:a="http://schemas.openxmlformats.org/drawingml/2006/main"/>
           <a:p xmlns:a="http://schemas.openxmlformats.org/drawingml/2006/main">
             <a:pPr algn="ctr">
+              <a:buNone/>
               <a:defRPr sz="1950" b="1">
                 <a:solidFill>
                   <a:srgbClr val="FFFFFF"/>
@@ -13282,6 +13342,7 @@
           <a:lstStyle xmlns:a="http://schemas.openxmlformats.org/drawingml/2006/main"/>
           <a:p xmlns:a="http://schemas.openxmlformats.org/drawingml/2006/main">
             <a:pPr algn="ctr">
+              <a:buNone/>
               <a:defRPr sz="1200" b="1">
                 <a:solidFill>
                   <a:srgbClr val="FFFFFF"/>
@@ -13337,6 +13398,7 @@
           <a:lstStyle xmlns:a="http://schemas.openxmlformats.org/drawingml/2006/main"/>
           <a:p xmlns:a="http://schemas.openxmlformats.org/drawingml/2006/main">
             <a:pPr algn="l">
+              <a:buNone/>
               <a:defRPr sz="1425" b="1">
                 <a:solidFill>
                   <a:srgbClr val="263746"/>
@@ -13394,6 +13456,7 @@
           <a:lstStyle xmlns:a="http://schemas.openxmlformats.org/drawingml/2006/main"/>
           <a:p xmlns:a="http://schemas.openxmlformats.org/drawingml/2006/main">
             <a:pPr algn="ctr">
+              <a:buNone/>
               <a:defRPr sz="1200" b="1">
                 <a:solidFill>
                   <a:srgbClr val="FFFFFF"/>
@@ -13449,6 +13512,7 @@
           <a:lstStyle xmlns:a="http://schemas.openxmlformats.org/drawingml/2006/main"/>
           <a:p xmlns:a="http://schemas.openxmlformats.org/drawingml/2006/main">
             <a:pPr algn="l">
+              <a:buNone/>
               <a:defRPr sz="1425" b="1">
                 <a:solidFill>
                   <a:srgbClr val="263746"/>
@@ -13506,6 +13570,7 @@
           <a:lstStyle xmlns:a="http://schemas.openxmlformats.org/drawingml/2006/main"/>
           <a:p xmlns:a="http://schemas.openxmlformats.org/drawingml/2006/main">
             <a:pPr algn="ctr">
+              <a:buNone/>
               <a:defRPr sz="1200" b="1">
                 <a:solidFill>
                   <a:srgbClr val="FFFFFF"/>
@@ -13561,6 +13626,7 @@
           <a:lstStyle xmlns:a="http://schemas.openxmlformats.org/drawingml/2006/main"/>
           <a:p xmlns:a="http://schemas.openxmlformats.org/drawingml/2006/main">
             <a:pPr algn="l">
+              <a:buNone/>
               <a:defRPr sz="1425" b="1">
                 <a:solidFill>
                   <a:srgbClr val="263746"/>
@@ -13618,6 +13684,7 @@
           <a:lstStyle xmlns:a="http://schemas.openxmlformats.org/drawingml/2006/main"/>
           <a:p xmlns:a="http://schemas.openxmlformats.org/drawingml/2006/main">
             <a:pPr algn="ctr">
+              <a:buNone/>
               <a:defRPr sz="1200" b="1">
                 <a:solidFill>
                   <a:srgbClr val="FFFFFF"/>
@@ -13673,6 +13740,7 @@
           <a:lstStyle xmlns:a="http://schemas.openxmlformats.org/drawingml/2006/main"/>
           <a:p xmlns:a="http://schemas.openxmlformats.org/drawingml/2006/main">
             <a:pPr algn="l">
+              <a:buNone/>
               <a:defRPr sz="1425" b="1">
                 <a:solidFill>
                   <a:srgbClr val="263746"/>
@@ -13730,6 +13798,7 @@
           <a:lstStyle xmlns:a="http://schemas.openxmlformats.org/drawingml/2006/main"/>
           <a:p xmlns:a="http://schemas.openxmlformats.org/drawingml/2006/main">
             <a:pPr algn="ctr">
+              <a:buNone/>
               <a:defRPr sz="1200" b="1">
                 <a:solidFill>
                   <a:srgbClr val="FFFFFF"/>
@@ -13785,6 +13854,7 @@
           <a:lstStyle xmlns:a="http://schemas.openxmlformats.org/drawingml/2006/main"/>
           <a:p xmlns:a="http://schemas.openxmlformats.org/drawingml/2006/main">
             <a:pPr algn="l">
+              <a:buNone/>
               <a:defRPr sz="1425" b="1">
                 <a:solidFill>
                   <a:srgbClr val="C8161E"/>
@@ -13842,6 +13912,7 @@
           <a:lstStyle xmlns:a="http://schemas.openxmlformats.org/drawingml/2006/main"/>
           <a:p xmlns:a="http://schemas.openxmlformats.org/drawingml/2006/main">
             <a:pPr algn="ctr">
+              <a:buNone/>
               <a:defRPr sz="1800" b="1">
                 <a:solidFill>
                   <a:srgbClr val="FFFFFF"/>
@@ -13907,10 +13978,13 @@
           </a:xfrm>
         </p:spPr>
         <p:txBody>
-          <a:bodyPr xmlns:a="http://schemas.openxmlformats.org/drawingml/2006/main" lIns="76200" tIns="0" rIns="76200" bIns="0" anchor="ctr"/>
+          <a:bodyPr xmlns:a="http://schemas.openxmlformats.org/drawingml/2006/main" lIns="76200" tIns="38100" rIns="76200" bIns="38100" anchor="ctr"/>
           <a:lstStyle xmlns:a="http://schemas.openxmlformats.org/drawingml/2006/main"/>
           <a:p xmlns:a="http://schemas.openxmlformats.org/drawingml/2006/main">
             <a:pPr algn="l">
+              <a:lnSpc>
+                <a:spcPct val="112000"/>
+              </a:lnSpc>
               <a:buNone/>
             </a:pPr>
             <a:r>
@@ -13922,7 +13996,7 @@
                 <a:ea typeface="Microsoft YaHei"/>
                 <a:cs typeface="Microsoft YaHei"/>
               </a:rPr>
-              <a:t>退出卡与第 12 课预告</a:t>
+              <a:t>本讲知识点总结</a:t>
             </a:r>
             <a:endParaRPr/>
           </a:p>
@@ -13958,27 +14032,31 @@
       </p:sp>
       <p:sp>
         <p:nvSpPr>
-          <p:cNvPr id="6" name="p19-left-h">
-            <a:extLst xmlns:a="http://schemas.openxmlformats.org/drawingml/2006/main">
-              <a:ext uri="{FF2B5EF4-FFF2-40B4-BE49-F238E27FC236}">
-                <a16:creationId xmlns:a16="http://schemas.microsoft.com/office/drawing/2014/main" id="{EDCA3F70-9960-4195-885E-4253381D5E0E}"/>
-              </a:ext>
-            </a:extLst>
-          </p:cNvPr>
-          <p:cNvSpPr>
-            <a:spLocks xmlns:a="http://schemas.openxmlformats.org/drawingml/2006/main" noGrp="1"/>
-          </p:cNvSpPr>
-          <p:nvPr/>
-        </p:nvSpPr>
-        <p:spPr>
-          <a:xfrm xmlns:a="http://schemas.openxmlformats.org/drawingml/2006/main">
-            <a:off x="628650" y="990600"/>
-            <a:ext cx="5429250" cy="514350"/>
-          </a:xfrm>
-          <a:prstGeom xmlns:a="http://schemas.openxmlformats.org/drawingml/2006/main" prst="rect">
-            <a:avLst/>
-          </a:prstGeom>
-          <a:noFill xmlns:a="http://schemas.openxmlformats.org/drawingml/2006/main"/>
+          <p:cNvPr id="6" name="summary-11-number-0">
+            <a:extLst xmlns:a="http://schemas.openxmlformats.org/drawingml/2006/main">
+              <a:ext uri="{FF2B5EF4-FFF2-40B4-BE49-F238E27FC236}">
+                <a16:creationId xmlns:a16="http://schemas.microsoft.com/office/drawing/2014/main" id="{29C6BC45-65A6-4C99-95B0-3E44A167B380}"/>
+              </a:ext>
+            </a:extLst>
+          </p:cNvPr>
+          <p:cNvSpPr>
+            <a:spLocks xmlns:a="http://schemas.openxmlformats.org/drawingml/2006/main" noGrp="1"/>
+          </p:cNvSpPr>
+          <p:nvPr/>
+        </p:nvSpPr>
+        <p:spPr>
+          <a:xfrm xmlns:a="http://schemas.openxmlformats.org/drawingml/2006/main">
+            <a:off x="457200" y="1219200"/>
+            <a:ext cx="476250" cy="476250"/>
+          </a:xfrm>
+          <a:prstGeom xmlns:a="http://schemas.openxmlformats.org/drawingml/2006/main" prst="roundRect">
+            <a:avLst>
+              <a:gd name="adj" fmla="val 16000"/>
+            </a:avLst>
+          </a:prstGeom>
+          <a:solidFill xmlns:a="http://schemas.openxmlformats.org/drawingml/2006/main">
+            <a:srgbClr val="18354E"/>
+          </a:solidFill>
           <a:ln xmlns:a="http://schemas.openxmlformats.org/drawingml/2006/main" w="0">
             <a:noFill/>
             <a:prstDash val="solid"/>
@@ -13989,71 +14067,18 @@
           <a:lstStyle xmlns:a="http://schemas.openxmlformats.org/drawingml/2006/main"/>
           <a:p xmlns:a="http://schemas.openxmlformats.org/drawingml/2006/main">
             <a:pPr algn="ctr">
-              <a:defRPr sz="2025" b="1">
-                <a:solidFill>
-                  <a:srgbClr val="C8161E"/>
-                </a:solidFill>
-              </a:defRPr>
-            </a:pPr>
-            <a:r>
-              <a:rPr sz="2025" b="1">
-                <a:solidFill>
-                  <a:srgbClr val="C8161E"/>
-                </a:solidFill>
-                <a:latin typeface="Microsoft YaHei"/>
-                <a:ea typeface="Microsoft YaHei"/>
-                <a:cs typeface="Microsoft YaHei"/>
-              </a:rPr>
-              <a:t>退出卡</a:t>
-            </a:r>
-          </a:p>
-        </p:txBody>
-      </p:sp>
-      <p:sp>
-        <p:nvSpPr>
-          <p:cNvPr id="7" name="p19-n-0">
-            <a:extLst xmlns:a="http://schemas.openxmlformats.org/drawingml/2006/main">
-              <a:ext uri="{FF2B5EF4-FFF2-40B4-BE49-F238E27FC236}">
-                <a16:creationId xmlns:a16="http://schemas.microsoft.com/office/drawing/2014/main" id="{5AB31FEF-2823-46BD-8487-F2DBC2CFEDFD}"/>
-              </a:ext>
-            </a:extLst>
-          </p:cNvPr>
-          <p:cNvSpPr>
-            <a:spLocks xmlns:a="http://schemas.openxmlformats.org/drawingml/2006/main" noGrp="1"/>
-          </p:cNvSpPr>
-          <p:nvPr/>
-        </p:nvSpPr>
-        <p:spPr>
-          <a:xfrm xmlns:a="http://schemas.openxmlformats.org/drawingml/2006/main">
-            <a:off x="723900" y="1676400"/>
-            <a:ext cx="438150" cy="419100"/>
-          </a:xfrm>
-          <a:prstGeom xmlns:a="http://schemas.openxmlformats.org/drawingml/2006/main" prst="roundRect">
-            <a:avLst>
-              <a:gd name="adj" fmla="val 18182"/>
-            </a:avLst>
-          </a:prstGeom>
-          <a:solidFill xmlns:a="http://schemas.openxmlformats.org/drawingml/2006/main">
-            <a:srgbClr val="18354E"/>
-          </a:solidFill>
-          <a:ln xmlns:a="http://schemas.openxmlformats.org/drawingml/2006/main" w="0">
-            <a:noFill/>
-            <a:prstDash val="solid"/>
-          </a:ln>
-        </p:spPr>
-        <p:txBody>
-          <a:bodyPr xmlns:a="http://schemas.openxmlformats.org/drawingml/2006/main" lIns="76200" tIns="38100" rIns="76200" bIns="38100" anchor="ctr"/>
-          <a:lstStyle xmlns:a="http://schemas.openxmlformats.org/drawingml/2006/main"/>
-          <a:p xmlns:a="http://schemas.openxmlformats.org/drawingml/2006/main">
-            <a:pPr algn="ctr">
-              <a:defRPr sz="1200" b="1">
+              <a:lnSpc>
+                <a:spcPct val="112000"/>
+              </a:lnSpc>
+              <a:buNone/>
+              <a:defRPr sz="1500" b="1">
                 <a:solidFill>
                   <a:srgbClr val="FFFFFF"/>
                 </a:solidFill>
               </a:defRPr>
             </a:pPr>
             <a:r>
-              <a:rPr sz="1200" b="1">
+              <a:rPr sz="1500" b="1">
                 <a:solidFill>
                   <a:srgbClr val="FFFFFF"/>
                 </a:solidFill>
@@ -14068,28 +14093,30 @@
       </p:sp>
       <p:sp>
         <p:nvSpPr>
-          <p:cNvPr id="8" name="p19-q-0">
-            <a:extLst xmlns:a="http://schemas.openxmlformats.org/drawingml/2006/main">
-              <a:ext uri="{FF2B5EF4-FFF2-40B4-BE49-F238E27FC236}">
-                <a16:creationId xmlns:a16="http://schemas.microsoft.com/office/drawing/2014/main" id="{4E3358AA-1F51-4C93-940D-1E7DB8B57D8F}"/>
-              </a:ext>
-            </a:extLst>
-          </p:cNvPr>
-          <p:cNvSpPr>
-            <a:spLocks xmlns:a="http://schemas.openxmlformats.org/drawingml/2006/main" noGrp="1"/>
-          </p:cNvSpPr>
-          <p:nvPr/>
-        </p:nvSpPr>
-        <p:spPr>
-          <a:xfrm xmlns:a="http://schemas.openxmlformats.org/drawingml/2006/main">
-            <a:off x="1314450" y="1676400"/>
-            <a:ext cx="4629150" cy="419100"/>
-          </a:xfrm>
-          <a:prstGeom xmlns:a="http://schemas.openxmlformats.org/drawingml/2006/main" prst="rect">
-            <a:avLst/>
-          </a:prstGeom>
-          <a:solidFill xmlns:a="http://schemas.openxmlformats.org/drawingml/2006/main">
-            <a:srgbClr val="F3F6F7"/>
+          <p:cNvPr id="7" name="summary-11-heading-0">
+            <a:extLst xmlns:a="http://schemas.openxmlformats.org/drawingml/2006/main">
+              <a:ext uri="{FF2B5EF4-FFF2-40B4-BE49-F238E27FC236}">
+                <a16:creationId xmlns:a16="http://schemas.microsoft.com/office/drawing/2014/main" id="{358F5058-2662-4EC8-859A-909FBEF35FDA}"/>
+              </a:ext>
+            </a:extLst>
+          </p:cNvPr>
+          <p:cNvSpPr>
+            <a:spLocks xmlns:a="http://schemas.openxmlformats.org/drawingml/2006/main" noGrp="1"/>
+          </p:cNvSpPr>
+          <p:nvPr/>
+        </p:nvSpPr>
+        <p:spPr>
+          <a:xfrm xmlns:a="http://schemas.openxmlformats.org/drawingml/2006/main">
+            <a:off x="1028700" y="1162050"/>
+            <a:ext cx="2152650" cy="590550"/>
+          </a:xfrm>
+          <a:prstGeom xmlns:a="http://schemas.openxmlformats.org/drawingml/2006/main" prst="roundRect">
+            <a:avLst>
+              <a:gd name="adj" fmla="val 12903"/>
+            </a:avLst>
+          </a:prstGeom>
+          <a:solidFill xmlns:a="http://schemas.openxmlformats.org/drawingml/2006/main">
+            <a:srgbClr val="E8F0F6"/>
           </a:solidFill>
           <a:ln xmlns:a="http://schemas.openxmlformats.org/drawingml/2006/main" w="0">
             <a:noFill/>
@@ -14100,53 +14127,120 @@
           <a:bodyPr xmlns:a="http://schemas.openxmlformats.org/drawingml/2006/main" lIns="76200" tIns="38100" rIns="76200" bIns="38100" anchor="ctr"/>
           <a:lstStyle xmlns:a="http://schemas.openxmlformats.org/drawingml/2006/main"/>
           <a:p xmlns:a="http://schemas.openxmlformats.org/drawingml/2006/main">
-            <a:pPr algn="l">
-              <a:defRPr sz="1350" b="1">
-                <a:solidFill>
-                  <a:srgbClr val="263746"/>
-                </a:solidFill>
-              </a:defRPr>
-            </a:pPr>
-            <a:r>
-              <a:rPr sz="1350" b="1">
-                <a:solidFill>
-                  <a:srgbClr val="263746"/>
-                </a:solidFill>
-                <a:latin typeface="Microsoft YaHei"/>
-                <a:ea typeface="Microsoft YaHei"/>
-                <a:cs typeface="Microsoft YaHei"/>
-              </a:rPr>
-              <a:t>四约束最容易缺哪一项？</a:t>
-            </a:r>
-          </a:p>
-        </p:txBody>
-      </p:sp>
-      <p:sp>
-        <p:nvSpPr>
-          <p:cNvPr id="9" name="p19-n-1">
-            <a:extLst xmlns:a="http://schemas.openxmlformats.org/drawingml/2006/main">
-              <a:ext uri="{FF2B5EF4-FFF2-40B4-BE49-F238E27FC236}">
-                <a16:creationId xmlns:a16="http://schemas.microsoft.com/office/drawing/2014/main" id="{4F308E6E-283E-461F-9226-6DA4379BA3BE}"/>
-              </a:ext>
-            </a:extLst>
-          </p:cNvPr>
-          <p:cNvSpPr>
-            <a:spLocks xmlns:a="http://schemas.openxmlformats.org/drawingml/2006/main" noGrp="1"/>
-          </p:cNvSpPr>
-          <p:nvPr/>
-        </p:nvSpPr>
-        <p:spPr>
-          <a:xfrm xmlns:a="http://schemas.openxmlformats.org/drawingml/2006/main">
-            <a:off x="723900" y="2362200"/>
-            <a:ext cx="438150" cy="419100"/>
+            <a:pPr algn="ctr">
+              <a:lnSpc>
+                <a:spcPct val="112000"/>
+              </a:lnSpc>
+              <a:buNone/>
+              <a:defRPr sz="1725" b="1">
+                <a:solidFill>
+                  <a:srgbClr val="18354E"/>
+                </a:solidFill>
+              </a:defRPr>
+            </a:pPr>
+            <a:r>
+              <a:rPr sz="1725" b="1">
+                <a:solidFill>
+                  <a:srgbClr val="18354E"/>
+                </a:solidFill>
+                <a:latin typeface="Microsoft YaHei"/>
+                <a:ea typeface="Microsoft YaHei"/>
+                <a:cs typeface="Microsoft YaHei"/>
+              </a:rPr>
+              <a:t>循环五步</a:t>
+            </a:r>
+          </a:p>
+        </p:txBody>
+      </p:sp>
+      <p:sp>
+        <p:nvSpPr>
+          <p:cNvPr id="8" name="summary-11-detail-0">
+            <a:extLst xmlns:a="http://schemas.openxmlformats.org/drawingml/2006/main">
+              <a:ext uri="{FF2B5EF4-FFF2-40B4-BE49-F238E27FC236}">
+                <a16:creationId xmlns:a16="http://schemas.microsoft.com/office/drawing/2014/main" id="{579EFCB4-D0A7-40D3-931D-B285616E4906}"/>
+              </a:ext>
+            </a:extLst>
+          </p:cNvPr>
+          <p:cNvSpPr>
+            <a:spLocks xmlns:a="http://schemas.openxmlformats.org/drawingml/2006/main" noGrp="1"/>
+          </p:cNvSpPr>
+          <p:nvPr/>
+        </p:nvSpPr>
+        <p:spPr>
+          <a:xfrm xmlns:a="http://schemas.openxmlformats.org/drawingml/2006/main">
+            <a:off x="457200" y="2095500"/>
+            <a:ext cx="2724150" cy="1676400"/>
           </a:xfrm>
           <a:prstGeom xmlns:a="http://schemas.openxmlformats.org/drawingml/2006/main" prst="roundRect">
             <a:avLst>
-              <a:gd name="adj" fmla="val 18182"/>
+              <a:gd name="adj" fmla="val 4545"/>
             </a:avLst>
           </a:prstGeom>
           <a:solidFill xmlns:a="http://schemas.openxmlformats.org/drawingml/2006/main">
-            <a:srgbClr val="18354E"/>
+            <a:srgbClr val="FFFFFF"/>
+          </a:solidFill>
+          <a:ln xmlns:a="http://schemas.openxmlformats.org/drawingml/2006/main" w="9525">
+            <a:solidFill>
+              <a:srgbClr val="D6DDE2"/>
+            </a:solidFill>
+            <a:prstDash val="solid"/>
+          </a:ln>
+        </p:spPr>
+        <p:txBody>
+          <a:bodyPr xmlns:a="http://schemas.openxmlformats.org/drawingml/2006/main" lIns="76200" tIns="38100" rIns="76200" bIns="38100" anchor="ctr"/>
+          <a:lstStyle xmlns:a="http://schemas.openxmlformats.org/drawingml/2006/main"/>
+          <a:p xmlns:a="http://schemas.openxmlformats.org/drawingml/2006/main">
+            <a:pPr algn="ctr">
+              <a:lnSpc>
+                <a:spcPct val="116000"/>
+              </a:lnSpc>
+              <a:buNone/>
+              <a:defRPr sz="1500" b="1">
+                <a:solidFill>
+                  <a:srgbClr val="263746"/>
+                </a:solidFill>
+              </a:defRPr>
+            </a:pPr>
+            <a:r>
+              <a:rPr sz="1500" b="1">
+                <a:solidFill>
+                  <a:srgbClr val="263746"/>
+                </a:solidFill>
+                <a:latin typeface="Microsoft YaHei"/>
+                <a:ea typeface="Microsoft YaHei"/>
+                <a:cs typeface="Microsoft YaHei"/>
+              </a:rPr>
+              <a:t>假设 → 运行 → 度量 → 评价 → 回写或回退</a:t>
+            </a:r>
+          </a:p>
+        </p:txBody>
+      </p:sp>
+      <p:sp>
+        <p:nvSpPr>
+          <p:cNvPr id="9" name="summary-11-number-1">
+            <a:extLst xmlns:a="http://schemas.openxmlformats.org/drawingml/2006/main">
+              <a:ext uri="{FF2B5EF4-FFF2-40B4-BE49-F238E27FC236}">
+                <a16:creationId xmlns:a16="http://schemas.microsoft.com/office/drawing/2014/main" id="{70E2CA75-44A2-4263-8D28-805EF9D35870}"/>
+              </a:ext>
+            </a:extLst>
+          </p:cNvPr>
+          <p:cNvSpPr>
+            <a:spLocks xmlns:a="http://schemas.openxmlformats.org/drawingml/2006/main" noGrp="1"/>
+          </p:cNvSpPr>
+          <p:nvPr/>
+        </p:nvSpPr>
+        <p:spPr>
+          <a:xfrm xmlns:a="http://schemas.openxmlformats.org/drawingml/2006/main">
+            <a:off x="3371850" y="1219200"/>
+            <a:ext cx="476250" cy="476250"/>
+          </a:xfrm>
+          <a:prstGeom xmlns:a="http://schemas.openxmlformats.org/drawingml/2006/main" prst="roundRect">
+            <a:avLst>
+              <a:gd name="adj" fmla="val 16000"/>
+            </a:avLst>
+          </a:prstGeom>
+          <a:solidFill xmlns:a="http://schemas.openxmlformats.org/drawingml/2006/main">
+            <a:srgbClr val="28745A"/>
           </a:solidFill>
           <a:ln xmlns:a="http://schemas.openxmlformats.org/drawingml/2006/main" w="0">
             <a:noFill/>
@@ -14158,14 +14252,18 @@
           <a:lstStyle xmlns:a="http://schemas.openxmlformats.org/drawingml/2006/main"/>
           <a:p xmlns:a="http://schemas.openxmlformats.org/drawingml/2006/main">
             <a:pPr algn="ctr">
-              <a:defRPr sz="1200" b="1">
+              <a:lnSpc>
+                <a:spcPct val="112000"/>
+              </a:lnSpc>
+              <a:buNone/>
+              <a:defRPr sz="1500" b="1">
                 <a:solidFill>
                   <a:srgbClr val="FFFFFF"/>
                 </a:solidFill>
               </a:defRPr>
             </a:pPr>
             <a:r>
-              <a:rPr sz="1200" b="1">
+              <a:rPr sz="1500" b="1">
                 <a:solidFill>
                   <a:srgbClr val="FFFFFF"/>
                 </a:solidFill>
@@ -14180,28 +14278,30 @@
       </p:sp>
       <p:sp>
         <p:nvSpPr>
-          <p:cNvPr id="10" name="p19-q-1">
-            <a:extLst xmlns:a="http://schemas.openxmlformats.org/drawingml/2006/main">
-              <a:ext uri="{FF2B5EF4-FFF2-40B4-BE49-F238E27FC236}">
-                <a16:creationId xmlns:a16="http://schemas.microsoft.com/office/drawing/2014/main" id="{B119FBEA-A27D-4862-8578-7A77E1201B8C}"/>
-              </a:ext>
-            </a:extLst>
-          </p:cNvPr>
-          <p:cNvSpPr>
-            <a:spLocks xmlns:a="http://schemas.openxmlformats.org/drawingml/2006/main" noGrp="1"/>
-          </p:cNvSpPr>
-          <p:nvPr/>
-        </p:nvSpPr>
-        <p:spPr>
-          <a:xfrm xmlns:a="http://schemas.openxmlformats.org/drawingml/2006/main">
-            <a:off x="1314450" y="2362200"/>
-            <a:ext cx="4629150" cy="419100"/>
-          </a:xfrm>
-          <a:prstGeom xmlns:a="http://schemas.openxmlformats.org/drawingml/2006/main" prst="rect">
-            <a:avLst/>
-          </a:prstGeom>
-          <a:solidFill xmlns:a="http://schemas.openxmlformats.org/drawingml/2006/main">
-            <a:srgbClr val="F3F6F7"/>
+          <p:cNvPr id="10" name="summary-11-heading-1">
+            <a:extLst xmlns:a="http://schemas.openxmlformats.org/drawingml/2006/main">
+              <a:ext uri="{FF2B5EF4-FFF2-40B4-BE49-F238E27FC236}">
+                <a16:creationId xmlns:a16="http://schemas.microsoft.com/office/drawing/2014/main" id="{24C46275-294A-410F-8846-DBA294770D41}"/>
+              </a:ext>
+            </a:extLst>
+          </p:cNvPr>
+          <p:cNvSpPr>
+            <a:spLocks xmlns:a="http://schemas.openxmlformats.org/drawingml/2006/main" noGrp="1"/>
+          </p:cNvSpPr>
+          <p:nvPr/>
+        </p:nvSpPr>
+        <p:spPr>
+          <a:xfrm xmlns:a="http://schemas.openxmlformats.org/drawingml/2006/main">
+            <a:off x="3943350" y="1162050"/>
+            <a:ext cx="2152650" cy="590550"/>
+          </a:xfrm>
+          <a:prstGeom xmlns:a="http://schemas.openxmlformats.org/drawingml/2006/main" prst="roundRect">
+            <a:avLst>
+              <a:gd name="adj" fmla="val 12903"/>
+            </a:avLst>
+          </a:prstGeom>
+          <a:solidFill xmlns:a="http://schemas.openxmlformats.org/drawingml/2006/main">
+            <a:srgbClr val="E7F2ED"/>
           </a:solidFill>
           <a:ln xmlns:a="http://schemas.openxmlformats.org/drawingml/2006/main" w="0">
             <a:noFill/>
@@ -14212,49 +14312,116 @@
           <a:bodyPr xmlns:a="http://schemas.openxmlformats.org/drawingml/2006/main" lIns="76200" tIns="38100" rIns="76200" bIns="38100" anchor="ctr"/>
           <a:lstStyle xmlns:a="http://schemas.openxmlformats.org/drawingml/2006/main"/>
           <a:p xmlns:a="http://schemas.openxmlformats.org/drawingml/2006/main">
-            <a:pPr algn="l">
-              <a:defRPr sz="1350" b="1">
-                <a:solidFill>
-                  <a:srgbClr val="263746"/>
-                </a:solidFill>
-              </a:defRPr>
-            </a:pPr>
-            <a:r>
-              <a:rPr sz="1350" b="1">
-                <a:solidFill>
-                  <a:srgbClr val="263746"/>
-                </a:solidFill>
-                <a:latin typeface="Microsoft YaHei"/>
-                <a:ea typeface="Microsoft YaHei"/>
-                <a:cs typeface="Microsoft YaHei"/>
-              </a:rPr>
-              <a:t>哪个位置最需要人工确认？</a:t>
-            </a:r>
-          </a:p>
-        </p:txBody>
-      </p:sp>
-      <p:sp>
-        <p:nvSpPr>
-          <p:cNvPr id="11" name="p19-n-2">
-            <a:extLst xmlns:a="http://schemas.openxmlformats.org/drawingml/2006/main">
-              <a:ext uri="{FF2B5EF4-FFF2-40B4-BE49-F238E27FC236}">
-                <a16:creationId xmlns:a16="http://schemas.microsoft.com/office/drawing/2014/main" id="{49FCD9F5-00A0-48DC-8C7D-7BDBB0852813}"/>
-              </a:ext>
-            </a:extLst>
-          </p:cNvPr>
-          <p:cNvSpPr>
-            <a:spLocks xmlns:a="http://schemas.openxmlformats.org/drawingml/2006/main" noGrp="1"/>
-          </p:cNvSpPr>
-          <p:nvPr/>
-        </p:nvSpPr>
-        <p:spPr>
-          <a:xfrm xmlns:a="http://schemas.openxmlformats.org/drawingml/2006/main">
-            <a:off x="723900" y="3048000"/>
-            <a:ext cx="438150" cy="419100"/>
+            <a:pPr algn="ctr">
+              <a:lnSpc>
+                <a:spcPct val="112000"/>
+              </a:lnSpc>
+              <a:buNone/>
+              <a:defRPr sz="1725" b="1">
+                <a:solidFill>
+                  <a:srgbClr val="28745A"/>
+                </a:solidFill>
+              </a:defRPr>
+            </a:pPr>
+            <a:r>
+              <a:rPr sz="1725" b="1">
+                <a:solidFill>
+                  <a:srgbClr val="28745A"/>
+                </a:solidFill>
+                <a:latin typeface="Microsoft YaHei"/>
+                <a:ea typeface="Microsoft YaHei"/>
+                <a:cs typeface="Microsoft YaHei"/>
+              </a:rPr>
+              <a:t>四项约束</a:t>
+            </a:r>
+          </a:p>
+        </p:txBody>
+      </p:sp>
+      <p:sp>
+        <p:nvSpPr>
+          <p:cNvPr id="11" name="summary-11-detail-1">
+            <a:extLst xmlns:a="http://schemas.openxmlformats.org/drawingml/2006/main">
+              <a:ext uri="{FF2B5EF4-FFF2-40B4-BE49-F238E27FC236}">
+                <a16:creationId xmlns:a16="http://schemas.microsoft.com/office/drawing/2014/main" id="{2002AEF6-1CFD-4BF2-9098-3981CCF1335D}"/>
+              </a:ext>
+            </a:extLst>
+          </p:cNvPr>
+          <p:cNvSpPr>
+            <a:spLocks xmlns:a="http://schemas.openxmlformats.org/drawingml/2006/main" noGrp="1"/>
+          </p:cNvSpPr>
+          <p:nvPr/>
+        </p:nvSpPr>
+        <p:spPr>
+          <a:xfrm xmlns:a="http://schemas.openxmlformats.org/drawingml/2006/main">
+            <a:off x="3371850" y="2095500"/>
+            <a:ext cx="2724150" cy="1676400"/>
           </a:xfrm>
           <a:prstGeom xmlns:a="http://schemas.openxmlformats.org/drawingml/2006/main" prst="roundRect">
             <a:avLst>
-              <a:gd name="adj" fmla="val 18182"/>
+              <a:gd name="adj" fmla="val 4545"/>
+            </a:avLst>
+          </a:prstGeom>
+          <a:solidFill xmlns:a="http://schemas.openxmlformats.org/drawingml/2006/main">
+            <a:srgbClr val="FFFFFF"/>
+          </a:solidFill>
+          <a:ln xmlns:a="http://schemas.openxmlformats.org/drawingml/2006/main" w="9525">
+            <a:solidFill>
+              <a:srgbClr val="D6DDE2"/>
+            </a:solidFill>
+            <a:prstDash val="solid"/>
+          </a:ln>
+        </p:spPr>
+        <p:txBody>
+          <a:bodyPr xmlns:a="http://schemas.openxmlformats.org/drawingml/2006/main" lIns="76200" tIns="38100" rIns="76200" bIns="38100" anchor="ctr"/>
+          <a:lstStyle xmlns:a="http://schemas.openxmlformats.org/drawingml/2006/main"/>
+          <a:p xmlns:a="http://schemas.openxmlformats.org/drawingml/2006/main">
+            <a:pPr algn="ctr">
+              <a:lnSpc>
+                <a:spcPct val="116000"/>
+              </a:lnSpc>
+              <a:buNone/>
+              <a:defRPr sz="1500" b="1">
+                <a:solidFill>
+                  <a:srgbClr val="263746"/>
+                </a:solidFill>
+              </a:defRPr>
+            </a:pPr>
+            <a:r>
+              <a:rPr sz="1500" b="1">
+                <a:solidFill>
+                  <a:srgbClr val="263746"/>
+                </a:solidFill>
+                <a:latin typeface="Microsoft YaHei"/>
+                <a:ea typeface="Microsoft YaHei"/>
+                <a:cs typeface="Microsoft YaHei"/>
+              </a:rPr>
+              <a:t>固定指标、预算、停止条件与回退机制预先写明</a:t>
+            </a:r>
+          </a:p>
+        </p:txBody>
+      </p:sp>
+      <p:sp>
+        <p:nvSpPr>
+          <p:cNvPr id="12" name="summary-11-number-2">
+            <a:extLst xmlns:a="http://schemas.openxmlformats.org/drawingml/2006/main">
+              <a:ext uri="{FF2B5EF4-FFF2-40B4-BE49-F238E27FC236}">
+                <a16:creationId xmlns:a16="http://schemas.microsoft.com/office/drawing/2014/main" id="{2475D5AA-D53F-4CCD-9E5E-43D0274CA5F3}"/>
+              </a:ext>
+            </a:extLst>
+          </p:cNvPr>
+          <p:cNvSpPr>
+            <a:spLocks xmlns:a="http://schemas.openxmlformats.org/drawingml/2006/main" noGrp="1"/>
+          </p:cNvSpPr>
+          <p:nvPr/>
+        </p:nvSpPr>
+        <p:spPr>
+          <a:xfrm xmlns:a="http://schemas.openxmlformats.org/drawingml/2006/main">
+            <a:off x="6286500" y="1219200"/>
+            <a:ext cx="476250" cy="476250"/>
+          </a:xfrm>
+          <a:prstGeom xmlns:a="http://schemas.openxmlformats.org/drawingml/2006/main" prst="roundRect">
+            <a:avLst>
+              <a:gd name="adj" fmla="val 16000"/>
             </a:avLst>
           </a:prstGeom>
           <a:solidFill xmlns:a="http://schemas.openxmlformats.org/drawingml/2006/main">
@@ -14270,14 +14437,18 @@
           <a:lstStyle xmlns:a="http://schemas.openxmlformats.org/drawingml/2006/main"/>
           <a:p xmlns:a="http://schemas.openxmlformats.org/drawingml/2006/main">
             <a:pPr algn="ctr">
-              <a:defRPr sz="1200" b="1">
+              <a:lnSpc>
+                <a:spcPct val="112000"/>
+              </a:lnSpc>
+              <a:buNone/>
+              <a:defRPr sz="1500" b="1">
                 <a:solidFill>
                   <a:srgbClr val="FFFFFF"/>
                 </a:solidFill>
               </a:defRPr>
             </a:pPr>
             <a:r>
-              <a:rPr sz="1200" b="1">
+              <a:rPr sz="1500" b="1">
                 <a:solidFill>
                   <a:srgbClr val="FFFFFF"/>
                 </a:solidFill>
@@ -14292,25 +14463,27 @@
       </p:sp>
       <p:sp>
         <p:nvSpPr>
-          <p:cNvPr id="12" name="p19-q-2">
-            <a:extLst xmlns:a="http://schemas.openxmlformats.org/drawingml/2006/main">
-              <a:ext uri="{FF2B5EF4-FFF2-40B4-BE49-F238E27FC236}">
-                <a16:creationId xmlns:a16="http://schemas.microsoft.com/office/drawing/2014/main" id="{60A963BD-194B-445B-9B56-B5763BD22110}"/>
-              </a:ext>
-            </a:extLst>
-          </p:cNvPr>
-          <p:cNvSpPr>
-            <a:spLocks xmlns:a="http://schemas.openxmlformats.org/drawingml/2006/main" noGrp="1"/>
-          </p:cNvSpPr>
-          <p:nvPr/>
-        </p:nvSpPr>
-        <p:spPr>
-          <a:xfrm xmlns:a="http://schemas.openxmlformats.org/drawingml/2006/main">
-            <a:off x="1314450" y="3048000"/>
-            <a:ext cx="4629150" cy="419100"/>
-          </a:xfrm>
-          <a:prstGeom xmlns:a="http://schemas.openxmlformats.org/drawingml/2006/main" prst="rect">
-            <a:avLst/>
+          <p:cNvPr id="13" name="summary-11-heading-2">
+            <a:extLst xmlns:a="http://schemas.openxmlformats.org/drawingml/2006/main">
+              <a:ext uri="{FF2B5EF4-FFF2-40B4-BE49-F238E27FC236}">
+                <a16:creationId xmlns:a16="http://schemas.microsoft.com/office/drawing/2014/main" id="{AF9308F0-639C-44BE-A05C-CF4386A83FE9}"/>
+              </a:ext>
+            </a:extLst>
+          </p:cNvPr>
+          <p:cNvSpPr>
+            <a:spLocks xmlns:a="http://schemas.openxmlformats.org/drawingml/2006/main" noGrp="1"/>
+          </p:cNvSpPr>
+          <p:nvPr/>
+        </p:nvSpPr>
+        <p:spPr>
+          <a:xfrm xmlns:a="http://schemas.openxmlformats.org/drawingml/2006/main">
+            <a:off x="6858000" y="1162050"/>
+            <a:ext cx="2152650" cy="590550"/>
+          </a:xfrm>
+          <a:prstGeom xmlns:a="http://schemas.openxmlformats.org/drawingml/2006/main" prst="roundRect">
+            <a:avLst>
+              <a:gd name="adj" fmla="val 12903"/>
+            </a:avLst>
           </a:prstGeom>
           <a:solidFill xmlns:a="http://schemas.openxmlformats.org/drawingml/2006/main">
             <a:srgbClr val="F8E9EA"/>
@@ -14324,15 +14497,19 @@
           <a:bodyPr xmlns:a="http://schemas.openxmlformats.org/drawingml/2006/main" lIns="76200" tIns="38100" rIns="76200" bIns="38100" anchor="ctr"/>
           <a:lstStyle xmlns:a="http://schemas.openxmlformats.org/drawingml/2006/main"/>
           <a:p xmlns:a="http://schemas.openxmlformats.org/drawingml/2006/main">
-            <a:pPr algn="l">
-              <a:defRPr sz="1350" b="1">
+            <a:pPr algn="ctr">
+              <a:lnSpc>
+                <a:spcPct val="112000"/>
+              </a:lnSpc>
+              <a:buNone/>
+              <a:defRPr sz="1725" b="1">
                 <a:solidFill>
                   <a:srgbClr val="C8161E"/>
                 </a:solidFill>
               </a:defRPr>
             </a:pPr>
             <a:r>
-              <a:rPr sz="1350" b="1">
+              <a:rPr sz="1725" b="1">
                 <a:solidFill>
                   <a:srgbClr val="C8161E"/>
                 </a:solidFill>
@@ -14340,37 +14517,100 @@
                 <a:ea typeface="Microsoft YaHei"/>
                 <a:cs typeface="Microsoft YaHei"/>
               </a:rPr>
-              <a:t>是否把两个案例外推成自主科研？</a:t>
-            </a:r>
-          </a:p>
-        </p:txBody>
-      </p:sp>
-      <p:sp>
-        <p:nvSpPr>
-          <p:cNvPr id="13" name="p19-n-3">
-            <a:extLst xmlns:a="http://schemas.openxmlformats.org/drawingml/2006/main">
-              <a:ext uri="{FF2B5EF4-FFF2-40B4-BE49-F238E27FC236}">
-                <a16:creationId xmlns:a16="http://schemas.microsoft.com/office/drawing/2014/main" id="{567C7C96-4CF9-4D8F-9F59-66FD5EF6AC42}"/>
-              </a:ext>
-            </a:extLst>
-          </p:cNvPr>
-          <p:cNvSpPr>
-            <a:spLocks xmlns:a="http://schemas.openxmlformats.org/drawingml/2006/main" noGrp="1"/>
-          </p:cNvSpPr>
-          <p:nvPr/>
-        </p:nvSpPr>
-        <p:spPr>
-          <a:xfrm xmlns:a="http://schemas.openxmlformats.org/drawingml/2006/main">
-            <a:off x="723900" y="3733800"/>
-            <a:ext cx="438150" cy="419100"/>
+              <a:t>失败追踪</a:t>
+            </a:r>
+          </a:p>
+        </p:txBody>
+      </p:sp>
+      <p:sp>
+        <p:nvSpPr>
+          <p:cNvPr id="14" name="summary-11-detail-2">
+            <a:extLst xmlns:a="http://schemas.openxmlformats.org/drawingml/2006/main">
+              <a:ext uri="{FF2B5EF4-FFF2-40B4-BE49-F238E27FC236}">
+                <a16:creationId xmlns:a16="http://schemas.microsoft.com/office/drawing/2014/main" id="{40AD225D-2501-40BA-B69A-FB46E8182D0A}"/>
+              </a:ext>
+            </a:extLst>
+          </p:cNvPr>
+          <p:cNvSpPr>
+            <a:spLocks xmlns:a="http://schemas.openxmlformats.org/drawingml/2006/main" noGrp="1"/>
+          </p:cNvSpPr>
+          <p:nvPr/>
+        </p:nvSpPr>
+        <p:spPr>
+          <a:xfrm xmlns:a="http://schemas.openxmlformats.org/drawingml/2006/main">
+            <a:off x="6286500" y="2095500"/>
+            <a:ext cx="2724150" cy="1676400"/>
           </a:xfrm>
           <a:prstGeom xmlns:a="http://schemas.openxmlformats.org/drawingml/2006/main" prst="roundRect">
             <a:avLst>
-              <a:gd name="adj" fmla="val 18182"/>
+              <a:gd name="adj" fmla="val 4545"/>
             </a:avLst>
           </a:prstGeom>
           <a:solidFill xmlns:a="http://schemas.openxmlformats.org/drawingml/2006/main">
-            <a:srgbClr val="18354E"/>
+            <a:srgbClr val="FFFFFF"/>
+          </a:solidFill>
+          <a:ln xmlns:a="http://schemas.openxmlformats.org/drawingml/2006/main" w="9525">
+            <a:solidFill>
+              <a:srgbClr val="D6DDE2"/>
+            </a:solidFill>
+            <a:prstDash val="solid"/>
+          </a:ln>
+        </p:spPr>
+        <p:txBody>
+          <a:bodyPr xmlns:a="http://schemas.openxmlformats.org/drawingml/2006/main" lIns="76200" tIns="38100" rIns="76200" bIns="38100" anchor="ctr"/>
+          <a:lstStyle xmlns:a="http://schemas.openxmlformats.org/drawingml/2006/main"/>
+          <a:p xmlns:a="http://schemas.openxmlformats.org/drawingml/2006/main">
+            <a:pPr algn="ctr">
+              <a:lnSpc>
+                <a:spcPct val="116000"/>
+              </a:lnSpc>
+              <a:buNone/>
+              <a:defRPr sz="1500" b="1">
+                <a:solidFill>
+                  <a:srgbClr val="263746"/>
+                </a:solidFill>
+              </a:defRPr>
+            </a:pPr>
+            <a:r>
+              <a:rPr sz="1500" b="1">
+                <a:solidFill>
+                  <a:srgbClr val="263746"/>
+                </a:solidFill>
+                <a:latin typeface="Microsoft YaHei"/>
+                <a:ea typeface="Microsoft YaHei"/>
+                <a:cs typeface="Microsoft YaHei"/>
+              </a:rPr>
+              <a:t>失败与成功共同构成总迭代数，不能只保留最佳结果</a:t>
+            </a:r>
+          </a:p>
+        </p:txBody>
+      </p:sp>
+      <p:sp>
+        <p:nvSpPr>
+          <p:cNvPr id="15" name="summary-11-number-3">
+            <a:extLst xmlns:a="http://schemas.openxmlformats.org/drawingml/2006/main">
+              <a:ext uri="{FF2B5EF4-FFF2-40B4-BE49-F238E27FC236}">
+                <a16:creationId xmlns:a16="http://schemas.microsoft.com/office/drawing/2014/main" id="{1BDED630-538C-45C5-9AE0-939E86FED1B7}"/>
+              </a:ext>
+            </a:extLst>
+          </p:cNvPr>
+          <p:cNvSpPr>
+            <a:spLocks xmlns:a="http://schemas.openxmlformats.org/drawingml/2006/main" noGrp="1"/>
+          </p:cNvSpPr>
+          <p:nvPr/>
+        </p:nvSpPr>
+        <p:spPr>
+          <a:xfrm xmlns:a="http://schemas.openxmlformats.org/drawingml/2006/main">
+            <a:off x="9201150" y="1219200"/>
+            <a:ext cx="476250" cy="476250"/>
+          </a:xfrm>
+          <a:prstGeom xmlns:a="http://schemas.openxmlformats.org/drawingml/2006/main" prst="roundRect">
+            <a:avLst>
+              <a:gd name="adj" fmla="val 16000"/>
+            </a:avLst>
+          </a:prstGeom>
+          <a:solidFill xmlns:a="http://schemas.openxmlformats.org/drawingml/2006/main">
+            <a:srgbClr val="A86C12"/>
           </a:solidFill>
           <a:ln xmlns:a="http://schemas.openxmlformats.org/drawingml/2006/main" w="0">
             <a:noFill/>
@@ -14382,14 +14622,18 @@
           <a:lstStyle xmlns:a="http://schemas.openxmlformats.org/drawingml/2006/main"/>
           <a:p xmlns:a="http://schemas.openxmlformats.org/drawingml/2006/main">
             <a:pPr algn="ctr">
-              <a:defRPr sz="1200" b="1">
+              <a:lnSpc>
+                <a:spcPct val="112000"/>
+              </a:lnSpc>
+              <a:buNone/>
+              <a:defRPr sz="1500" b="1">
                 <a:solidFill>
                   <a:srgbClr val="FFFFFF"/>
                 </a:solidFill>
               </a:defRPr>
             </a:pPr>
             <a:r>
-              <a:rPr sz="1200" b="1">
+              <a:rPr sz="1500" b="1">
                 <a:solidFill>
                   <a:srgbClr val="FFFFFF"/>
                 </a:solidFill>
@@ -14404,28 +14648,30 @@
       </p:sp>
       <p:sp>
         <p:nvSpPr>
-          <p:cNvPr id="14" name="p19-q-3">
-            <a:extLst xmlns:a="http://schemas.openxmlformats.org/drawingml/2006/main">
-              <a:ext uri="{FF2B5EF4-FFF2-40B4-BE49-F238E27FC236}">
-                <a16:creationId xmlns:a16="http://schemas.microsoft.com/office/drawing/2014/main" id="{81B0B8AB-7317-410E-950D-18303074E901}"/>
-              </a:ext>
-            </a:extLst>
-          </p:cNvPr>
-          <p:cNvSpPr>
-            <a:spLocks xmlns:a="http://schemas.openxmlformats.org/drawingml/2006/main" noGrp="1"/>
-          </p:cNvSpPr>
-          <p:nvPr/>
-        </p:nvSpPr>
-        <p:spPr>
-          <a:xfrm xmlns:a="http://schemas.openxmlformats.org/drawingml/2006/main">
-            <a:off x="1314450" y="3733800"/>
-            <a:ext cx="4629150" cy="419100"/>
-          </a:xfrm>
-          <a:prstGeom xmlns:a="http://schemas.openxmlformats.org/drawingml/2006/main" prst="rect">
-            <a:avLst/>
-          </a:prstGeom>
-          <a:solidFill xmlns:a="http://schemas.openxmlformats.org/drawingml/2006/main">
-            <a:srgbClr val="F3F6F7"/>
+          <p:cNvPr id="16" name="summary-11-heading-3">
+            <a:extLst xmlns:a="http://schemas.openxmlformats.org/drawingml/2006/main">
+              <a:ext uri="{FF2B5EF4-FFF2-40B4-BE49-F238E27FC236}">
+                <a16:creationId xmlns:a16="http://schemas.microsoft.com/office/drawing/2014/main" id="{87940C95-5A0C-4097-B558-67C13245FC14}"/>
+              </a:ext>
+            </a:extLst>
+          </p:cNvPr>
+          <p:cNvSpPr>
+            <a:spLocks xmlns:a="http://schemas.openxmlformats.org/drawingml/2006/main" noGrp="1"/>
+          </p:cNvSpPr>
+          <p:nvPr/>
+        </p:nvSpPr>
+        <p:spPr>
+          <a:xfrm xmlns:a="http://schemas.openxmlformats.org/drawingml/2006/main">
+            <a:off x="9772650" y="1162050"/>
+            <a:ext cx="2152650" cy="590550"/>
+          </a:xfrm>
+          <a:prstGeom xmlns:a="http://schemas.openxmlformats.org/drawingml/2006/main" prst="roundRect">
+            <a:avLst>
+              <a:gd name="adj" fmla="val 12903"/>
+            </a:avLst>
+          </a:prstGeom>
+          <a:solidFill xmlns:a="http://schemas.openxmlformats.org/drawingml/2006/main">
+            <a:srgbClr val="FAF0DD"/>
           </a:solidFill>
           <a:ln xmlns:a="http://schemas.openxmlformats.org/drawingml/2006/main" w="0">
             <a:noFill/>
@@ -14436,15 +14682,82 @@
           <a:bodyPr xmlns:a="http://schemas.openxmlformats.org/drawingml/2006/main" lIns="76200" tIns="38100" rIns="76200" bIns="38100" anchor="ctr"/>
           <a:lstStyle xmlns:a="http://schemas.openxmlformats.org/drawingml/2006/main"/>
           <a:p xmlns:a="http://schemas.openxmlformats.org/drawingml/2006/main">
-            <a:pPr algn="l">
-              <a:defRPr sz="1350" b="1">
+            <a:pPr algn="ctr">
+              <a:lnSpc>
+                <a:spcPct val="112000"/>
+              </a:lnSpc>
+              <a:buNone/>
+              <a:defRPr sz="1725" b="1">
+                <a:solidFill>
+                  <a:srgbClr val="A86C12"/>
+                </a:solidFill>
+              </a:defRPr>
+            </a:pPr>
+            <a:r>
+              <a:rPr sz="1725" b="1">
+                <a:solidFill>
+                  <a:srgbClr val="A86C12"/>
+                </a:solidFill>
+                <a:latin typeface="Microsoft YaHei"/>
+                <a:ea typeface="Microsoft YaHei"/>
+                <a:cs typeface="Microsoft YaHei"/>
+              </a:rPr>
+              <a:t>人工审核</a:t>
+            </a:r>
+          </a:p>
+        </p:txBody>
+      </p:sp>
+      <p:sp>
+        <p:nvSpPr>
+          <p:cNvPr id="17" name="summary-11-detail-3">
+            <a:extLst xmlns:a="http://schemas.openxmlformats.org/drawingml/2006/main">
+              <a:ext uri="{FF2B5EF4-FFF2-40B4-BE49-F238E27FC236}">
+                <a16:creationId xmlns:a16="http://schemas.microsoft.com/office/drawing/2014/main" id="{C0337A77-7180-4FF8-9854-34DA44025974}"/>
+              </a:ext>
+            </a:extLst>
+          </p:cNvPr>
+          <p:cNvSpPr>
+            <a:spLocks xmlns:a="http://schemas.openxmlformats.org/drawingml/2006/main" noGrp="1"/>
+          </p:cNvSpPr>
+          <p:nvPr/>
+        </p:nvSpPr>
+        <p:spPr>
+          <a:xfrm xmlns:a="http://schemas.openxmlformats.org/drawingml/2006/main">
+            <a:off x="9201150" y="2095500"/>
+            <a:ext cx="2724150" cy="1676400"/>
+          </a:xfrm>
+          <a:prstGeom xmlns:a="http://schemas.openxmlformats.org/drawingml/2006/main" prst="roundRect">
+            <a:avLst>
+              <a:gd name="adj" fmla="val 4545"/>
+            </a:avLst>
+          </a:prstGeom>
+          <a:solidFill xmlns:a="http://schemas.openxmlformats.org/drawingml/2006/main">
+            <a:srgbClr val="FFFFFF"/>
+          </a:solidFill>
+          <a:ln xmlns:a="http://schemas.openxmlformats.org/drawingml/2006/main" w="9525">
+            <a:solidFill>
+              <a:srgbClr val="D6DDE2"/>
+            </a:solidFill>
+            <a:prstDash val="solid"/>
+          </a:ln>
+        </p:spPr>
+        <p:txBody>
+          <a:bodyPr xmlns:a="http://schemas.openxmlformats.org/drawingml/2006/main" lIns="76200" tIns="38100" rIns="76200" bIns="38100" anchor="ctr"/>
+          <a:lstStyle xmlns:a="http://schemas.openxmlformats.org/drawingml/2006/main"/>
+          <a:p xmlns:a="http://schemas.openxmlformats.org/drawingml/2006/main">
+            <a:pPr algn="ctr">
+              <a:lnSpc>
+                <a:spcPct val="116000"/>
+              </a:lnSpc>
+              <a:buNone/>
+              <a:defRPr sz="1500" b="1">
                 <a:solidFill>
                   <a:srgbClr val="263746"/>
                 </a:solidFill>
               </a:defRPr>
             </a:pPr>
             <a:r>
-              <a:rPr sz="1350" b="1">
+              <a:rPr sz="1500" b="1">
                 <a:solidFill>
                   <a:srgbClr val="263746"/>
                 </a:solidFill>
@@ -14452,35 +14765,37 @@
                 <a:ea typeface="Microsoft YaHei"/>
                 <a:cs typeface="Microsoft YaHei"/>
               </a:rPr>
-              <a:t>进入第 12 课前的最小卡点？</a:t>
-            </a:r>
-          </a:p>
-        </p:txBody>
-      </p:sp>
-      <p:sp>
-        <p:nvSpPr>
-          <p:cNvPr id="15" name="p19-right-h">
-            <a:extLst xmlns:a="http://schemas.openxmlformats.org/drawingml/2006/main">
-              <a:ext uri="{FF2B5EF4-FFF2-40B4-BE49-F238E27FC236}">
-                <a16:creationId xmlns:a16="http://schemas.microsoft.com/office/drawing/2014/main" id="{985278BB-3341-4954-BB09-2C4DEB9E41DA}"/>
-              </a:ext>
-            </a:extLst>
-          </p:cNvPr>
-          <p:cNvSpPr>
-            <a:spLocks xmlns:a="http://schemas.openxmlformats.org/drawingml/2006/main" noGrp="1"/>
-          </p:cNvSpPr>
-          <p:nvPr/>
-        </p:nvSpPr>
-        <p:spPr>
-          <a:xfrm xmlns:a="http://schemas.openxmlformats.org/drawingml/2006/main">
-            <a:off x="6667500" y="990600"/>
-            <a:ext cx="4895850" cy="514350"/>
-          </a:xfrm>
-          <a:prstGeom xmlns:a="http://schemas.openxmlformats.org/drawingml/2006/main" prst="rect">
-            <a:avLst/>
-          </a:prstGeom>
-          <a:solidFill xmlns:a="http://schemas.openxmlformats.org/drawingml/2006/main">
-            <a:srgbClr val="18354E"/>
+              <a:t>指标、研究价值、回退目标和正式写回仍由研究者判断</a:t>
+            </a:r>
+          </a:p>
+        </p:txBody>
+      </p:sp>
+      <p:sp>
+        <p:nvSpPr>
+          <p:cNvPr id="18" name="summary-11-boundary">
+            <a:extLst xmlns:a="http://schemas.openxmlformats.org/drawingml/2006/main">
+              <a:ext uri="{FF2B5EF4-FFF2-40B4-BE49-F238E27FC236}">
+                <a16:creationId xmlns:a16="http://schemas.microsoft.com/office/drawing/2014/main" id="{CF41EA5D-46BF-426F-9827-4B6BD4C49024}"/>
+              </a:ext>
+            </a:extLst>
+          </p:cNvPr>
+          <p:cNvSpPr>
+            <a:spLocks xmlns:a="http://schemas.openxmlformats.org/drawingml/2006/main" noGrp="1"/>
+          </p:cNvSpPr>
+          <p:nvPr/>
+        </p:nvSpPr>
+        <p:spPr>
+          <a:xfrm xmlns:a="http://schemas.openxmlformats.org/drawingml/2006/main">
+            <a:off x="1162050" y="4400550"/>
+            <a:ext cx="9867900" cy="876300"/>
+          </a:xfrm>
+          <a:prstGeom xmlns:a="http://schemas.openxmlformats.org/drawingml/2006/main" prst="roundRect">
+            <a:avLst>
+              <a:gd name="adj" fmla="val 8696"/>
+            </a:avLst>
+          </a:prstGeom>
+          <a:solidFill xmlns:a="http://schemas.openxmlformats.org/drawingml/2006/main">
+            <a:srgbClr val="F8E9EA"/>
           </a:solidFill>
           <a:ln xmlns:a="http://schemas.openxmlformats.org/drawingml/2006/main" w="0">
             <a:noFill/>
@@ -14492,396 +14807,18 @@
           <a:lstStyle xmlns:a="http://schemas.openxmlformats.org/drawingml/2006/main"/>
           <a:p xmlns:a="http://schemas.openxmlformats.org/drawingml/2006/main">
             <a:pPr algn="ctr">
-              <a:defRPr sz="1800" b="1">
-                <a:solidFill>
-                  <a:srgbClr val="FFFFFF"/>
-                </a:solidFill>
-              </a:defRPr>
-            </a:pPr>
-            <a:r>
-              <a:rPr sz="1800" b="1">
-                <a:solidFill>
-                  <a:srgbClr val="FFFFFF"/>
-                </a:solidFill>
-                <a:latin typeface="Microsoft YaHei"/>
-                <a:ea typeface="Microsoft YaHei"/>
-                <a:cs typeface="Microsoft YaHei"/>
-              </a:rPr>
-              <a:t>第 12 课：重新组合为个人工作流</a:t>
-            </a:r>
-          </a:p>
-        </p:txBody>
-      </p:sp>
-      <p:sp>
-        <p:nvSpPr>
-          <p:cNvPr id="16" name="p19-line-0">
-            <a:extLst xmlns:a="http://schemas.openxmlformats.org/drawingml/2006/main">
-              <a:ext uri="{FF2B5EF4-FFF2-40B4-BE49-F238E27FC236}">
-                <a16:creationId xmlns:a16="http://schemas.microsoft.com/office/drawing/2014/main" id="{B3ED17D2-9A23-4543-BE2C-88932B0A1F14}"/>
-              </a:ext>
-            </a:extLst>
-          </p:cNvPr>
-          <p:cNvSpPr>
-            <a:spLocks xmlns:a="http://schemas.openxmlformats.org/drawingml/2006/main" noGrp="1"/>
-          </p:cNvSpPr>
-          <p:nvPr/>
-        </p:nvSpPr>
-        <p:spPr>
-          <a:xfrm xmlns:a="http://schemas.openxmlformats.org/drawingml/2006/main" rot="5400000">
-            <a:off x="8801100" y="2190750"/>
-            <a:ext cx="342900" cy="38100"/>
-          </a:xfrm>
-          <a:prstGeom xmlns:a="http://schemas.openxmlformats.org/drawingml/2006/main" prst="rect">
-            <a:avLst/>
-          </a:prstGeom>
-          <a:solidFill xmlns:a="http://schemas.openxmlformats.org/drawingml/2006/main">
-            <a:srgbClr val="D6DDE2"/>
-          </a:solidFill>
-          <a:ln xmlns:a="http://schemas.openxmlformats.org/drawingml/2006/main" w="0">
-            <a:noFill/>
-            <a:prstDash val="solid"/>
-          </a:ln>
-        </p:spPr>
-      </p:sp>
-      <p:sp>
-        <p:nvSpPr>
-          <p:cNvPr id="17" name="p19-f-0">
-            <a:extLst xmlns:a="http://schemas.openxmlformats.org/drawingml/2006/main">
-              <a:ext uri="{FF2B5EF4-FFF2-40B4-BE49-F238E27FC236}">
-                <a16:creationId xmlns:a16="http://schemas.microsoft.com/office/drawing/2014/main" id="{5CFC39DA-3F1C-496E-B663-24A233028260}"/>
-              </a:ext>
-            </a:extLst>
-          </p:cNvPr>
-          <p:cNvSpPr>
-            <a:spLocks xmlns:a="http://schemas.openxmlformats.org/drawingml/2006/main" noGrp="1"/>
-          </p:cNvSpPr>
-          <p:nvPr/>
-        </p:nvSpPr>
-        <p:spPr>
-          <a:xfrm xmlns:a="http://schemas.openxmlformats.org/drawingml/2006/main">
-            <a:off x="7029450" y="1619250"/>
-            <a:ext cx="4171950" cy="552450"/>
-          </a:xfrm>
-          <a:prstGeom xmlns:a="http://schemas.openxmlformats.org/drawingml/2006/main" prst="roundRect">
-            <a:avLst>
-              <a:gd name="adj" fmla="val 13793"/>
-            </a:avLst>
-          </a:prstGeom>
-          <a:solidFill xmlns:a="http://schemas.openxmlformats.org/drawingml/2006/main">
-            <a:srgbClr val="E8F0F6"/>
-          </a:solidFill>
-          <a:ln xmlns:a="http://schemas.openxmlformats.org/drawingml/2006/main" w="19050">
-            <a:solidFill>
-              <a:srgbClr val="18354E"/>
-            </a:solidFill>
-            <a:prstDash val="solid"/>
-          </a:ln>
-        </p:spPr>
-        <p:txBody>
-          <a:bodyPr xmlns:a="http://schemas.openxmlformats.org/drawingml/2006/main" lIns="76200" tIns="38100" rIns="76200" bIns="38100" anchor="ctr"/>
-          <a:lstStyle xmlns:a="http://schemas.openxmlformats.org/drawingml/2006/main"/>
-          <a:p xmlns:a="http://schemas.openxmlformats.org/drawingml/2006/main">
-            <a:pPr algn="ctr">
-              <a:defRPr sz="1500" b="1">
-                <a:solidFill>
-                  <a:srgbClr val="18354E"/>
-                </a:solidFill>
-              </a:defRPr>
-            </a:pPr>
-            <a:r>
-              <a:rPr sz="1500" b="1">
-                <a:solidFill>
-                  <a:srgbClr val="18354E"/>
-                </a:solidFill>
-                <a:latin typeface="Microsoft YaHei"/>
-                <a:ea typeface="Microsoft YaHei"/>
-                <a:cs typeface="Microsoft YaHei"/>
-              </a:rPr>
-              <a:t>受限循环骨架</a:t>
-            </a:r>
-          </a:p>
-        </p:txBody>
-      </p:sp>
-      <p:sp>
-        <p:nvSpPr>
-          <p:cNvPr id="18" name="p19-line-1">
-            <a:extLst xmlns:a="http://schemas.openxmlformats.org/drawingml/2006/main">
-              <a:ext uri="{FF2B5EF4-FFF2-40B4-BE49-F238E27FC236}">
-                <a16:creationId xmlns:a16="http://schemas.microsoft.com/office/drawing/2014/main" id="{DDBD2FB8-1667-4DB6-A493-90300BCCA440}"/>
-              </a:ext>
-            </a:extLst>
-          </p:cNvPr>
-          <p:cNvSpPr>
-            <a:spLocks xmlns:a="http://schemas.openxmlformats.org/drawingml/2006/main" noGrp="1"/>
-          </p:cNvSpPr>
-          <p:nvPr/>
-        </p:nvSpPr>
-        <p:spPr>
-          <a:xfrm xmlns:a="http://schemas.openxmlformats.org/drawingml/2006/main" rot="5400000">
-            <a:off x="8801100" y="3048000"/>
-            <a:ext cx="342900" cy="38100"/>
-          </a:xfrm>
-          <a:prstGeom xmlns:a="http://schemas.openxmlformats.org/drawingml/2006/main" prst="rect">
-            <a:avLst/>
-          </a:prstGeom>
-          <a:solidFill xmlns:a="http://schemas.openxmlformats.org/drawingml/2006/main">
-            <a:srgbClr val="D6DDE2"/>
-          </a:solidFill>
-          <a:ln xmlns:a="http://schemas.openxmlformats.org/drawingml/2006/main" w="0">
-            <a:noFill/>
-            <a:prstDash val="solid"/>
-          </a:ln>
-        </p:spPr>
-      </p:sp>
-      <p:sp>
-        <p:nvSpPr>
-          <p:cNvPr id="19" name="p19-f-1">
-            <a:extLst xmlns:a="http://schemas.openxmlformats.org/drawingml/2006/main">
-              <a:ext uri="{FF2B5EF4-FFF2-40B4-BE49-F238E27FC236}">
-                <a16:creationId xmlns:a16="http://schemas.microsoft.com/office/drawing/2014/main" id="{CE5EAEFE-800E-4735-807C-6DAA522D5DAD}"/>
-              </a:ext>
-            </a:extLst>
-          </p:cNvPr>
-          <p:cNvSpPr>
-            <a:spLocks xmlns:a="http://schemas.openxmlformats.org/drawingml/2006/main" noGrp="1"/>
-          </p:cNvSpPr>
-          <p:nvPr/>
-        </p:nvSpPr>
-        <p:spPr>
-          <a:xfrm xmlns:a="http://schemas.openxmlformats.org/drawingml/2006/main">
-            <a:off x="7029450" y="2476500"/>
-            <a:ext cx="4171950" cy="552450"/>
-          </a:xfrm>
-          <a:prstGeom xmlns:a="http://schemas.openxmlformats.org/drawingml/2006/main" prst="roundRect">
-            <a:avLst>
-              <a:gd name="adj" fmla="val 13793"/>
-            </a:avLst>
-          </a:prstGeom>
-          <a:solidFill xmlns:a="http://schemas.openxmlformats.org/drawingml/2006/main">
-            <a:srgbClr val="E8F0F6"/>
-          </a:solidFill>
-          <a:ln xmlns:a="http://schemas.openxmlformats.org/drawingml/2006/main" w="19050">
-            <a:solidFill>
-              <a:srgbClr val="18354E"/>
-            </a:solidFill>
-            <a:prstDash val="solid"/>
-          </a:ln>
-        </p:spPr>
-        <p:txBody>
-          <a:bodyPr xmlns:a="http://schemas.openxmlformats.org/drawingml/2006/main" lIns="76200" tIns="38100" rIns="76200" bIns="38100" anchor="ctr"/>
-          <a:lstStyle xmlns:a="http://schemas.openxmlformats.org/drawingml/2006/main"/>
-          <a:p xmlns:a="http://schemas.openxmlformats.org/drawingml/2006/main">
-            <a:pPr algn="ctr">
-              <a:defRPr sz="1500" b="1">
-                <a:solidFill>
-                  <a:srgbClr val="18354E"/>
-                </a:solidFill>
-              </a:defRPr>
-            </a:pPr>
-            <a:r>
-              <a:rPr sz="1500" b="1">
-                <a:solidFill>
-                  <a:srgbClr val="18354E"/>
-                </a:solidFill>
-                <a:latin typeface="Microsoft YaHei"/>
-                <a:ea typeface="Microsoft YaHei"/>
-                <a:cs typeface="Microsoft YaHei"/>
-              </a:rPr>
-              <a:t>任务契约 · Context · Memory</a:t>
-            </a:r>
-          </a:p>
-        </p:txBody>
-      </p:sp>
-      <p:sp>
-        <p:nvSpPr>
-          <p:cNvPr id="20" name="p19-line-2">
-            <a:extLst xmlns:a="http://schemas.openxmlformats.org/drawingml/2006/main">
-              <a:ext uri="{FF2B5EF4-FFF2-40B4-BE49-F238E27FC236}">
-                <a16:creationId xmlns:a16="http://schemas.microsoft.com/office/drawing/2014/main" id="{90DD9D46-BC89-4281-8371-C0045880EA22}"/>
-              </a:ext>
-            </a:extLst>
-          </p:cNvPr>
-          <p:cNvSpPr>
-            <a:spLocks xmlns:a="http://schemas.openxmlformats.org/drawingml/2006/main" noGrp="1"/>
-          </p:cNvSpPr>
-          <p:nvPr/>
-        </p:nvSpPr>
-        <p:spPr>
-          <a:xfrm xmlns:a="http://schemas.openxmlformats.org/drawingml/2006/main" rot="5400000">
-            <a:off x="8801100" y="3905250"/>
-            <a:ext cx="342900" cy="38100"/>
-          </a:xfrm>
-          <a:prstGeom xmlns:a="http://schemas.openxmlformats.org/drawingml/2006/main" prst="rect">
-            <a:avLst/>
-          </a:prstGeom>
-          <a:solidFill xmlns:a="http://schemas.openxmlformats.org/drawingml/2006/main">
-            <a:srgbClr val="D6DDE2"/>
-          </a:solidFill>
-          <a:ln xmlns:a="http://schemas.openxmlformats.org/drawingml/2006/main" w="0">
-            <a:noFill/>
-            <a:prstDash val="solid"/>
-          </a:ln>
-        </p:spPr>
-      </p:sp>
-      <p:sp>
-        <p:nvSpPr>
-          <p:cNvPr id="21" name="p19-f-2">
-            <a:extLst xmlns:a="http://schemas.openxmlformats.org/drawingml/2006/main">
-              <a:ext uri="{FF2B5EF4-FFF2-40B4-BE49-F238E27FC236}">
-                <a16:creationId xmlns:a16="http://schemas.microsoft.com/office/drawing/2014/main" id="{3B9529C5-48EE-448D-9D0D-47242ABB355F}"/>
-              </a:ext>
-            </a:extLst>
-          </p:cNvPr>
-          <p:cNvSpPr>
-            <a:spLocks xmlns:a="http://schemas.openxmlformats.org/drawingml/2006/main" noGrp="1"/>
-          </p:cNvSpPr>
-          <p:nvPr/>
-        </p:nvSpPr>
-        <p:spPr>
-          <a:xfrm xmlns:a="http://schemas.openxmlformats.org/drawingml/2006/main">
-            <a:off x="7029450" y="3333750"/>
-            <a:ext cx="4171950" cy="552450"/>
-          </a:xfrm>
-          <a:prstGeom xmlns:a="http://schemas.openxmlformats.org/drawingml/2006/main" prst="roundRect">
-            <a:avLst>
-              <a:gd name="adj" fmla="val 13793"/>
-            </a:avLst>
-          </a:prstGeom>
-          <a:solidFill xmlns:a="http://schemas.openxmlformats.org/drawingml/2006/main">
-            <a:srgbClr val="E8F0F6"/>
-          </a:solidFill>
-          <a:ln xmlns:a="http://schemas.openxmlformats.org/drawingml/2006/main" w="19050">
-            <a:solidFill>
-              <a:srgbClr val="18354E"/>
-            </a:solidFill>
-            <a:prstDash val="solid"/>
-          </a:ln>
-        </p:spPr>
-        <p:txBody>
-          <a:bodyPr xmlns:a="http://schemas.openxmlformats.org/drawingml/2006/main" lIns="76200" tIns="38100" rIns="76200" bIns="38100" anchor="ctr"/>
-          <a:lstStyle xmlns:a="http://schemas.openxmlformats.org/drawingml/2006/main"/>
-          <a:p xmlns:a="http://schemas.openxmlformats.org/drawingml/2006/main">
-            <a:pPr algn="ctr">
-              <a:defRPr sz="1500" b="1">
-                <a:solidFill>
-                  <a:srgbClr val="18354E"/>
-                </a:solidFill>
-              </a:defRPr>
-            </a:pPr>
-            <a:r>
-              <a:rPr sz="1500" b="1">
-                <a:solidFill>
-                  <a:srgbClr val="18354E"/>
-                </a:solidFill>
-                <a:latin typeface="Microsoft YaHei"/>
-                <a:ea typeface="Microsoft YaHei"/>
-                <a:cs typeface="Microsoft YaHei"/>
-              </a:rPr>
-              <a:t>工具/权限 · Evals · 审核</a:t>
-            </a:r>
-          </a:p>
-        </p:txBody>
-      </p:sp>
-      <p:sp>
-        <p:nvSpPr>
-          <p:cNvPr id="22" name="p19-f-3">
-            <a:extLst xmlns:a="http://schemas.openxmlformats.org/drawingml/2006/main">
-              <a:ext uri="{FF2B5EF4-FFF2-40B4-BE49-F238E27FC236}">
-                <a16:creationId xmlns:a16="http://schemas.microsoft.com/office/drawing/2014/main" id="{E6156BC4-6345-4E65-A3D9-C5CDBB7D8B5F}"/>
-              </a:ext>
-            </a:extLst>
-          </p:cNvPr>
-          <p:cNvSpPr>
-            <a:spLocks xmlns:a="http://schemas.openxmlformats.org/drawingml/2006/main" noGrp="1"/>
-          </p:cNvSpPr>
-          <p:nvPr/>
-        </p:nvSpPr>
-        <p:spPr>
-          <a:xfrm xmlns:a="http://schemas.openxmlformats.org/drawingml/2006/main">
-            <a:off x="7029450" y="4191000"/>
-            <a:ext cx="4171950" cy="552450"/>
-          </a:xfrm>
-          <a:prstGeom xmlns:a="http://schemas.openxmlformats.org/drawingml/2006/main" prst="roundRect">
-            <a:avLst>
-              <a:gd name="adj" fmla="val 13793"/>
-            </a:avLst>
-          </a:prstGeom>
-          <a:solidFill xmlns:a="http://schemas.openxmlformats.org/drawingml/2006/main">
-            <a:srgbClr val="E7F2ED"/>
-          </a:solidFill>
-          <a:ln xmlns:a="http://schemas.openxmlformats.org/drawingml/2006/main" w="19050">
-            <a:solidFill>
-              <a:srgbClr val="28745A"/>
-            </a:solidFill>
-            <a:prstDash val="solid"/>
-          </a:ln>
-        </p:spPr>
-        <p:txBody>
-          <a:bodyPr xmlns:a="http://schemas.openxmlformats.org/drawingml/2006/main" lIns="76200" tIns="38100" rIns="76200" bIns="38100" anchor="ctr"/>
-          <a:lstStyle xmlns:a="http://schemas.openxmlformats.org/drawingml/2006/main"/>
-          <a:p xmlns:a="http://schemas.openxmlformats.org/drawingml/2006/main">
-            <a:pPr algn="ctr">
-              <a:defRPr sz="1500" b="1">
-                <a:solidFill>
-                  <a:srgbClr val="28745A"/>
-                </a:solidFill>
-              </a:defRPr>
-            </a:pPr>
-            <a:r>
-              <a:rPr sz="1500" b="1">
-                <a:solidFill>
-                  <a:srgbClr val="28745A"/>
-                </a:solidFill>
-                <a:latin typeface="Microsoft YaHei"/>
-                <a:ea typeface="Microsoft YaHei"/>
-                <a:cs typeface="Microsoft YaHei"/>
-              </a:rPr>
-              <a:t>可运行或可演示原型</a:t>
-            </a:r>
-          </a:p>
-        </p:txBody>
-      </p:sp>
-      <p:sp>
-        <p:nvSpPr>
-          <p:cNvPr id="23" name="p19-bottom">
-            <a:extLst xmlns:a="http://schemas.openxmlformats.org/drawingml/2006/main">
-              <a:ext uri="{FF2B5EF4-FFF2-40B4-BE49-F238E27FC236}">
-                <a16:creationId xmlns:a16="http://schemas.microsoft.com/office/drawing/2014/main" id="{96D123C9-05B9-4A6C-A7A9-67DEA0A0D14C}"/>
-              </a:ext>
-            </a:extLst>
-          </p:cNvPr>
-          <p:cNvSpPr>
-            <a:spLocks xmlns:a="http://schemas.openxmlformats.org/drawingml/2006/main" noGrp="1"/>
-          </p:cNvSpPr>
-          <p:nvPr/>
-        </p:nvSpPr>
-        <p:spPr>
-          <a:xfrm xmlns:a="http://schemas.openxmlformats.org/drawingml/2006/main">
-            <a:off x="1143000" y="5219700"/>
-            <a:ext cx="9906000" cy="419100"/>
-          </a:xfrm>
-          <a:prstGeom xmlns:a="http://schemas.openxmlformats.org/drawingml/2006/main" prst="rect">
-            <a:avLst/>
-          </a:prstGeom>
-          <a:noFill xmlns:a="http://schemas.openxmlformats.org/drawingml/2006/main"/>
-          <a:ln xmlns:a="http://schemas.openxmlformats.org/drawingml/2006/main" w="0">
-            <a:noFill/>
-            <a:prstDash val="solid"/>
-          </a:ln>
-        </p:spPr>
-        <p:txBody>
-          <a:bodyPr xmlns:a="http://schemas.openxmlformats.org/drawingml/2006/main" lIns="76200" tIns="38100" rIns="76200" bIns="38100" anchor="ctr"/>
-          <a:lstStyle xmlns:a="http://schemas.openxmlformats.org/drawingml/2006/main"/>
-          <a:p xmlns:a="http://schemas.openxmlformats.org/drawingml/2006/main">
-            <a:pPr algn="ctr">
-              <a:defRPr sz="1575" b="1">
+              <a:lnSpc>
+                <a:spcPct val="114000"/>
+              </a:lnSpc>
+              <a:buNone/>
+              <a:defRPr sz="1725" b="1">
                 <a:solidFill>
                   <a:srgbClr val="C8161E"/>
                 </a:solidFill>
               </a:defRPr>
             </a:pPr>
             <a:r>
-              <a:rPr sz="1575" b="1">
+              <a:rPr sz="1725" b="1">
                 <a:solidFill>
                   <a:srgbClr val="C8161E"/>
                 </a:solidFill>
@@ -14889,7 +14826,7 @@
                 <a:ea typeface="Microsoft YaHei"/>
                 <a:cs typeface="Microsoft YaHei"/>
               </a:rPr>
-              <a:t>本课无正式提交｜第 13 课验证门统一检查评价、失败保留与人工审核。</a:t>
+              <a:t>关键边界：自动循环可以重复动作，但不得在运行中自行改变评价协议或研究目标。</a:t>
             </a:r>
           </a:p>
         </p:txBody>
@@ -15021,6 +14958,7 @@
           <a:lstStyle xmlns:a="http://schemas.openxmlformats.org/drawingml/2006/main"/>
           <a:p xmlns:a="http://schemas.openxmlformats.org/drawingml/2006/main">
             <a:pPr algn="ctr">
+              <a:buNone/>
               <a:defRPr sz="1875" b="1">
                 <a:solidFill>
                   <a:srgbClr val="28745A"/>
@@ -15078,6 +15016,7 @@
           <a:lstStyle xmlns:a="http://schemas.openxmlformats.org/drawingml/2006/main"/>
           <a:p xmlns:a="http://schemas.openxmlformats.org/drawingml/2006/main">
             <a:pPr algn="ctr">
+              <a:buNone/>
               <a:defRPr sz="1500" b="1">
                 <a:solidFill>
                   <a:srgbClr val="28745A"/>
@@ -15135,6 +15074,7 @@
           <a:lstStyle xmlns:a="http://schemas.openxmlformats.org/drawingml/2006/main"/>
           <a:p xmlns:a="http://schemas.openxmlformats.org/drawingml/2006/main">
             <a:pPr algn="ctr">
+              <a:buNone/>
               <a:defRPr sz="1500" b="1">
                 <a:solidFill>
                   <a:srgbClr val="28745A"/>
@@ -15192,6 +15132,7 @@
           <a:lstStyle xmlns:a="http://schemas.openxmlformats.org/drawingml/2006/main"/>
           <a:p xmlns:a="http://schemas.openxmlformats.org/drawingml/2006/main">
             <a:pPr algn="ctr">
+              <a:buNone/>
               <a:defRPr sz="1500" b="1">
                 <a:solidFill>
                   <a:srgbClr val="28745A"/>
@@ -15245,6 +15186,7 @@
           <a:lstStyle xmlns:a="http://schemas.openxmlformats.org/drawingml/2006/main"/>
           <a:p xmlns:a="http://schemas.openxmlformats.org/drawingml/2006/main">
             <a:pPr algn="ctr">
+              <a:buNone/>
               <a:defRPr sz="3600" b="1">
                 <a:solidFill>
                   <a:srgbClr val="C8161E"/>
@@ -15298,6 +15240,7 @@
           <a:lstStyle xmlns:a="http://schemas.openxmlformats.org/drawingml/2006/main"/>
           <a:p xmlns:a="http://schemas.openxmlformats.org/drawingml/2006/main">
             <a:pPr algn="ctr">
+              <a:buNone/>
               <a:defRPr sz="1875" b="1">
                 <a:solidFill>
                   <a:srgbClr val="C8161E"/>
@@ -15355,6 +15298,7 @@
           <a:lstStyle xmlns:a="http://schemas.openxmlformats.org/drawingml/2006/main"/>
           <a:p xmlns:a="http://schemas.openxmlformats.org/drawingml/2006/main">
             <a:pPr algn="ctr">
+              <a:buNone/>
               <a:defRPr sz="1425" b="1">
                 <a:solidFill>
                   <a:srgbClr val="C8161E"/>
@@ -15412,6 +15356,7 @@
           <a:lstStyle xmlns:a="http://schemas.openxmlformats.org/drawingml/2006/main"/>
           <a:p xmlns:a="http://schemas.openxmlformats.org/drawingml/2006/main">
             <a:pPr algn="ctr">
+              <a:buNone/>
               <a:defRPr sz="1425" b="1">
                 <a:solidFill>
                   <a:srgbClr val="C8161E"/>
@@ -15469,6 +15414,7 @@
           <a:lstStyle xmlns:a="http://schemas.openxmlformats.org/drawingml/2006/main"/>
           <a:p xmlns:a="http://schemas.openxmlformats.org/drawingml/2006/main">
             <a:pPr algn="ctr">
+              <a:buNone/>
               <a:defRPr sz="1425" b="1">
                 <a:solidFill>
                   <a:srgbClr val="C8161E"/>
@@ -15526,6 +15472,7 @@
           <a:lstStyle xmlns:a="http://schemas.openxmlformats.org/drawingml/2006/main"/>
           <a:p xmlns:a="http://schemas.openxmlformats.org/drawingml/2006/main">
             <a:pPr algn="ctr">
+              <a:buNone/>
               <a:defRPr sz="1425" b="1">
                 <a:solidFill>
                   <a:srgbClr val="C8161E"/>
@@ -15583,6 +15530,7 @@
           <a:lstStyle xmlns:a="http://schemas.openxmlformats.org/drawingml/2006/main"/>
           <a:p xmlns:a="http://schemas.openxmlformats.org/drawingml/2006/main">
             <a:pPr algn="ctr">
+              <a:buNone/>
               <a:defRPr sz="1800" b="1">
                 <a:solidFill>
                   <a:srgbClr val="FFFFFF"/>
@@ -15599,6 +15547,1053 @@
                 <a:cs typeface="Microsoft YaHei"/>
               </a:rPr>
               <a:t>1 分钟动作｜在现有记录中圈出最缺的一项：指标 / 预算 / 停止 / 回退</a:t>
+            </a:r>
+          </a:p>
+        </p:txBody>
+      </p:sp>
+    </p:spTree>
+    <p:extLst>
+      <p:ext uri="{BB962C8B-B14F-4D97-AF65-F5344CB8AC3E}">
+        <p14:creationId xmlns:p14="http://schemas.microsoft.com/office/powerpoint/2010/main" val="1443728403"/>
+      </p:ext>
+    </p:extLst>
+  </p:cSld>
+</p:sld>
+</file>
+
+<file path=ppt/slides/slide20.xml><?xml version="1.0" encoding="utf-8"?>
+<p:sld xmlns:p="http://schemas.openxmlformats.org/presentationml/2006/main">
+  <p:cSld>
+    <p:spTree>
+      <p:nvGrpSpPr>
+        <p:cNvPr id="1" name=""/>
+        <p:cNvGrpSpPr/>
+        <p:nvPr/>
+      </p:nvGrpSpPr>
+      <p:grpSpPr>
+        <a:xfrm xmlns:a="http://schemas.openxmlformats.org/drawingml/2006/main"/>
+      </p:grpSpPr>
+      <p:sp>
+        <p:nvSpPr>
+          <p:cNvPr id="4" name="Text Placeholder 3">
+            <a:extLst xmlns:a="http://schemas.openxmlformats.org/drawingml/2006/main">
+              <a:ext uri="{FF2B5EF4-FFF2-40B4-BE49-F238E27FC236}">
+                <a16:creationId xmlns:a16="http://schemas.microsoft.com/office/drawing/2014/main" id="{4D941B40-7A0A-534E-3563-CA11753C8E3F}"/>
+              </a:ext>
+            </a:extLst>
+          </p:cNvPr>
+          <p:cNvSpPr>
+            <a:spLocks xmlns:a="http://schemas.openxmlformats.org/drawingml/2006/main" noGrp="1"/>
+          </p:cNvSpPr>
+          <p:nvPr>
+            <p:ph type="body" idx="14"/>
+          </p:nvPr>
+        </p:nvSpPr>
+        <p:spPr>
+          <a:xfrm xmlns:a="http://schemas.openxmlformats.org/drawingml/2006/main">
+            <a:off x="1028700" y="28575"/>
+            <a:ext cx="10668000" cy="628650"/>
+          </a:xfrm>
+        </p:spPr>
+        <p:txBody>
+          <a:bodyPr xmlns:a="http://schemas.openxmlformats.org/drawingml/2006/main" lIns="76200" tIns="0" rIns="76200" bIns="0" anchor="ctr"/>
+          <a:lstStyle xmlns:a="http://schemas.openxmlformats.org/drawingml/2006/main"/>
+          <a:p xmlns:a="http://schemas.openxmlformats.org/drawingml/2006/main">
+            <a:pPr algn="l">
+              <a:buNone/>
+            </a:pPr>
+            <a:r>
+              <a:rPr sz="2250" b="1">
+                <a:solidFill>
+                  <a:srgbClr val="FFFFFF"/>
+                </a:solidFill>
+                <a:latin typeface="Microsoft YaHei"/>
+                <a:ea typeface="Microsoft YaHei"/>
+                <a:cs typeface="Microsoft YaHei"/>
+              </a:rPr>
+              <a:t>退出卡与第 12 课预告</a:t>
+            </a:r>
+            <a:endParaRPr/>
+          </a:p>
+        </p:txBody>
+      </p:sp>
+      <p:sp>
+        <p:nvSpPr>
+          <p:cNvPr id="5" name="Slide Number Placeholder 4">
+            <a:extLst xmlns:a="http://schemas.openxmlformats.org/drawingml/2006/main">
+              <a:ext uri="{FF2B5EF4-FFF2-40B4-BE49-F238E27FC236}">
+                <a16:creationId xmlns:a16="http://schemas.microsoft.com/office/drawing/2014/main" id="{EBA5909F-738E-F60C-BE8C-B3F1D94548E5}"/>
+              </a:ext>
+            </a:extLst>
+          </p:cNvPr>
+          <p:cNvSpPr>
+            <a:spLocks xmlns:a="http://schemas.openxmlformats.org/drawingml/2006/main" noGrp="1"/>
+          </p:cNvSpPr>
+          <p:nvPr>
+            <p:ph type="sldNum" idx="10"/>
+          </p:nvPr>
+        </p:nvSpPr>
+        <p:spPr/>
+        <p:txBody>
+          <a:bodyPr xmlns:a="http://schemas.openxmlformats.org/drawingml/2006/main"/>
+          <a:lstStyle xmlns:a="http://schemas.openxmlformats.org/drawingml/2006/main"/>
+          <a:p xmlns:a="http://schemas.openxmlformats.org/drawingml/2006/main">
+            <a:fld id="{844E025A-983C-6D44-79C6-4612AACD43FC}" type="slidenum">
+              <a:t>20</a:t>
+            </a:fld>
+            <a:endParaRPr/>
+          </a:p>
+        </p:txBody>
+      </p:sp>
+      <p:sp>
+        <p:nvSpPr>
+          <p:cNvPr id="6" name="p19-left-h">
+            <a:extLst xmlns:a="http://schemas.openxmlformats.org/drawingml/2006/main">
+              <a:ext uri="{FF2B5EF4-FFF2-40B4-BE49-F238E27FC236}">
+                <a16:creationId xmlns:a16="http://schemas.microsoft.com/office/drawing/2014/main" id="{EDCA3F70-9960-4195-885E-4253381D5E0E}"/>
+              </a:ext>
+            </a:extLst>
+          </p:cNvPr>
+          <p:cNvSpPr>
+            <a:spLocks xmlns:a="http://schemas.openxmlformats.org/drawingml/2006/main" noGrp="1"/>
+          </p:cNvSpPr>
+          <p:nvPr/>
+        </p:nvSpPr>
+        <p:spPr>
+          <a:xfrm xmlns:a="http://schemas.openxmlformats.org/drawingml/2006/main">
+            <a:off x="628650" y="990600"/>
+            <a:ext cx="5429250" cy="514350"/>
+          </a:xfrm>
+          <a:prstGeom xmlns:a="http://schemas.openxmlformats.org/drawingml/2006/main" prst="rect">
+            <a:avLst/>
+          </a:prstGeom>
+          <a:noFill xmlns:a="http://schemas.openxmlformats.org/drawingml/2006/main"/>
+          <a:ln xmlns:a="http://schemas.openxmlformats.org/drawingml/2006/main" w="0">
+            <a:noFill/>
+            <a:prstDash val="solid"/>
+          </a:ln>
+        </p:spPr>
+        <p:txBody>
+          <a:bodyPr xmlns:a="http://schemas.openxmlformats.org/drawingml/2006/main" lIns="76200" tIns="38100" rIns="76200" bIns="38100" anchor="ctr"/>
+          <a:lstStyle xmlns:a="http://schemas.openxmlformats.org/drawingml/2006/main"/>
+          <a:p xmlns:a="http://schemas.openxmlformats.org/drawingml/2006/main">
+            <a:pPr algn="ctr">
+              <a:buNone/>
+              <a:defRPr sz="2025" b="1">
+                <a:solidFill>
+                  <a:srgbClr val="C8161E"/>
+                </a:solidFill>
+              </a:defRPr>
+            </a:pPr>
+            <a:r>
+              <a:rPr sz="2025" b="1">
+                <a:solidFill>
+                  <a:srgbClr val="C8161E"/>
+                </a:solidFill>
+                <a:latin typeface="Microsoft YaHei"/>
+                <a:ea typeface="Microsoft YaHei"/>
+                <a:cs typeface="Microsoft YaHei"/>
+              </a:rPr>
+              <a:t>退出卡</a:t>
+            </a:r>
+          </a:p>
+        </p:txBody>
+      </p:sp>
+      <p:sp>
+        <p:nvSpPr>
+          <p:cNvPr id="7" name="p19-n-0">
+            <a:extLst xmlns:a="http://schemas.openxmlformats.org/drawingml/2006/main">
+              <a:ext uri="{FF2B5EF4-FFF2-40B4-BE49-F238E27FC236}">
+                <a16:creationId xmlns:a16="http://schemas.microsoft.com/office/drawing/2014/main" id="{5AB31FEF-2823-46BD-8487-F2DBC2CFEDFD}"/>
+              </a:ext>
+            </a:extLst>
+          </p:cNvPr>
+          <p:cNvSpPr>
+            <a:spLocks xmlns:a="http://schemas.openxmlformats.org/drawingml/2006/main" noGrp="1"/>
+          </p:cNvSpPr>
+          <p:nvPr/>
+        </p:nvSpPr>
+        <p:spPr>
+          <a:xfrm xmlns:a="http://schemas.openxmlformats.org/drawingml/2006/main">
+            <a:off x="723900" y="1676400"/>
+            <a:ext cx="438150" cy="419100"/>
+          </a:xfrm>
+          <a:prstGeom xmlns:a="http://schemas.openxmlformats.org/drawingml/2006/main" prst="roundRect">
+            <a:avLst>
+              <a:gd name="adj" fmla="val 18182"/>
+            </a:avLst>
+          </a:prstGeom>
+          <a:solidFill xmlns:a="http://schemas.openxmlformats.org/drawingml/2006/main">
+            <a:srgbClr val="18354E"/>
+          </a:solidFill>
+          <a:ln xmlns:a="http://schemas.openxmlformats.org/drawingml/2006/main" w="0">
+            <a:noFill/>
+            <a:prstDash val="solid"/>
+          </a:ln>
+        </p:spPr>
+        <p:txBody>
+          <a:bodyPr xmlns:a="http://schemas.openxmlformats.org/drawingml/2006/main" lIns="76200" tIns="38100" rIns="76200" bIns="38100" anchor="ctr"/>
+          <a:lstStyle xmlns:a="http://schemas.openxmlformats.org/drawingml/2006/main"/>
+          <a:p xmlns:a="http://schemas.openxmlformats.org/drawingml/2006/main">
+            <a:pPr algn="ctr">
+              <a:buNone/>
+              <a:defRPr sz="1200" b="1">
+                <a:solidFill>
+                  <a:srgbClr val="FFFFFF"/>
+                </a:solidFill>
+              </a:defRPr>
+            </a:pPr>
+            <a:r>
+              <a:rPr sz="1200" b="1">
+                <a:solidFill>
+                  <a:srgbClr val="FFFFFF"/>
+                </a:solidFill>
+                <a:latin typeface="Arial"/>
+                <a:ea typeface="Arial"/>
+                <a:cs typeface="Arial"/>
+              </a:rPr>
+              <a:t>1</a:t>
+            </a:r>
+          </a:p>
+        </p:txBody>
+      </p:sp>
+      <p:sp>
+        <p:nvSpPr>
+          <p:cNvPr id="8" name="p19-q-0">
+            <a:extLst xmlns:a="http://schemas.openxmlformats.org/drawingml/2006/main">
+              <a:ext uri="{FF2B5EF4-FFF2-40B4-BE49-F238E27FC236}">
+                <a16:creationId xmlns:a16="http://schemas.microsoft.com/office/drawing/2014/main" id="{4E3358AA-1F51-4C93-940D-1E7DB8B57D8F}"/>
+              </a:ext>
+            </a:extLst>
+          </p:cNvPr>
+          <p:cNvSpPr>
+            <a:spLocks xmlns:a="http://schemas.openxmlformats.org/drawingml/2006/main" noGrp="1"/>
+          </p:cNvSpPr>
+          <p:nvPr/>
+        </p:nvSpPr>
+        <p:spPr>
+          <a:xfrm xmlns:a="http://schemas.openxmlformats.org/drawingml/2006/main">
+            <a:off x="1314450" y="1676400"/>
+            <a:ext cx="4629150" cy="419100"/>
+          </a:xfrm>
+          <a:prstGeom xmlns:a="http://schemas.openxmlformats.org/drawingml/2006/main" prst="rect">
+            <a:avLst/>
+          </a:prstGeom>
+          <a:solidFill xmlns:a="http://schemas.openxmlformats.org/drawingml/2006/main">
+            <a:srgbClr val="F3F6F7"/>
+          </a:solidFill>
+          <a:ln xmlns:a="http://schemas.openxmlformats.org/drawingml/2006/main" w="0">
+            <a:noFill/>
+            <a:prstDash val="solid"/>
+          </a:ln>
+        </p:spPr>
+        <p:txBody>
+          <a:bodyPr xmlns:a="http://schemas.openxmlformats.org/drawingml/2006/main" lIns="76200" tIns="38100" rIns="76200" bIns="38100" anchor="ctr"/>
+          <a:lstStyle xmlns:a="http://schemas.openxmlformats.org/drawingml/2006/main"/>
+          <a:p xmlns:a="http://schemas.openxmlformats.org/drawingml/2006/main">
+            <a:pPr algn="l">
+              <a:buNone/>
+              <a:defRPr sz="1350" b="1">
+                <a:solidFill>
+                  <a:srgbClr val="263746"/>
+                </a:solidFill>
+              </a:defRPr>
+            </a:pPr>
+            <a:r>
+              <a:rPr sz="1350" b="1">
+                <a:solidFill>
+                  <a:srgbClr val="263746"/>
+                </a:solidFill>
+                <a:latin typeface="Microsoft YaHei"/>
+                <a:ea typeface="Microsoft YaHei"/>
+                <a:cs typeface="Microsoft YaHei"/>
+              </a:rPr>
+              <a:t>四约束最容易缺哪一项？</a:t>
+            </a:r>
+          </a:p>
+        </p:txBody>
+      </p:sp>
+      <p:sp>
+        <p:nvSpPr>
+          <p:cNvPr id="9" name="p19-n-1">
+            <a:extLst xmlns:a="http://schemas.openxmlformats.org/drawingml/2006/main">
+              <a:ext uri="{FF2B5EF4-FFF2-40B4-BE49-F238E27FC236}">
+                <a16:creationId xmlns:a16="http://schemas.microsoft.com/office/drawing/2014/main" id="{4F308E6E-283E-461F-9226-6DA4379BA3BE}"/>
+              </a:ext>
+            </a:extLst>
+          </p:cNvPr>
+          <p:cNvSpPr>
+            <a:spLocks xmlns:a="http://schemas.openxmlformats.org/drawingml/2006/main" noGrp="1"/>
+          </p:cNvSpPr>
+          <p:nvPr/>
+        </p:nvSpPr>
+        <p:spPr>
+          <a:xfrm xmlns:a="http://schemas.openxmlformats.org/drawingml/2006/main">
+            <a:off x="723900" y="2362200"/>
+            <a:ext cx="438150" cy="419100"/>
+          </a:xfrm>
+          <a:prstGeom xmlns:a="http://schemas.openxmlformats.org/drawingml/2006/main" prst="roundRect">
+            <a:avLst>
+              <a:gd name="adj" fmla="val 18182"/>
+            </a:avLst>
+          </a:prstGeom>
+          <a:solidFill xmlns:a="http://schemas.openxmlformats.org/drawingml/2006/main">
+            <a:srgbClr val="18354E"/>
+          </a:solidFill>
+          <a:ln xmlns:a="http://schemas.openxmlformats.org/drawingml/2006/main" w="0">
+            <a:noFill/>
+            <a:prstDash val="solid"/>
+          </a:ln>
+        </p:spPr>
+        <p:txBody>
+          <a:bodyPr xmlns:a="http://schemas.openxmlformats.org/drawingml/2006/main" lIns="76200" tIns="38100" rIns="76200" bIns="38100" anchor="ctr"/>
+          <a:lstStyle xmlns:a="http://schemas.openxmlformats.org/drawingml/2006/main"/>
+          <a:p xmlns:a="http://schemas.openxmlformats.org/drawingml/2006/main">
+            <a:pPr algn="ctr">
+              <a:buNone/>
+              <a:defRPr sz="1200" b="1">
+                <a:solidFill>
+                  <a:srgbClr val="FFFFFF"/>
+                </a:solidFill>
+              </a:defRPr>
+            </a:pPr>
+            <a:r>
+              <a:rPr sz="1200" b="1">
+                <a:solidFill>
+                  <a:srgbClr val="FFFFFF"/>
+                </a:solidFill>
+                <a:latin typeface="Arial"/>
+                <a:ea typeface="Arial"/>
+                <a:cs typeface="Arial"/>
+              </a:rPr>
+              <a:t>2</a:t>
+            </a:r>
+          </a:p>
+        </p:txBody>
+      </p:sp>
+      <p:sp>
+        <p:nvSpPr>
+          <p:cNvPr id="10" name="p19-q-1">
+            <a:extLst xmlns:a="http://schemas.openxmlformats.org/drawingml/2006/main">
+              <a:ext uri="{FF2B5EF4-FFF2-40B4-BE49-F238E27FC236}">
+                <a16:creationId xmlns:a16="http://schemas.microsoft.com/office/drawing/2014/main" id="{B119FBEA-A27D-4862-8578-7A77E1201B8C}"/>
+              </a:ext>
+            </a:extLst>
+          </p:cNvPr>
+          <p:cNvSpPr>
+            <a:spLocks xmlns:a="http://schemas.openxmlformats.org/drawingml/2006/main" noGrp="1"/>
+          </p:cNvSpPr>
+          <p:nvPr/>
+        </p:nvSpPr>
+        <p:spPr>
+          <a:xfrm xmlns:a="http://schemas.openxmlformats.org/drawingml/2006/main">
+            <a:off x="1314450" y="2362200"/>
+            <a:ext cx="4629150" cy="419100"/>
+          </a:xfrm>
+          <a:prstGeom xmlns:a="http://schemas.openxmlformats.org/drawingml/2006/main" prst="rect">
+            <a:avLst/>
+          </a:prstGeom>
+          <a:solidFill xmlns:a="http://schemas.openxmlformats.org/drawingml/2006/main">
+            <a:srgbClr val="F3F6F7"/>
+          </a:solidFill>
+          <a:ln xmlns:a="http://schemas.openxmlformats.org/drawingml/2006/main" w="0">
+            <a:noFill/>
+            <a:prstDash val="solid"/>
+          </a:ln>
+        </p:spPr>
+        <p:txBody>
+          <a:bodyPr xmlns:a="http://schemas.openxmlformats.org/drawingml/2006/main" lIns="76200" tIns="38100" rIns="76200" bIns="38100" anchor="ctr"/>
+          <a:lstStyle xmlns:a="http://schemas.openxmlformats.org/drawingml/2006/main"/>
+          <a:p xmlns:a="http://schemas.openxmlformats.org/drawingml/2006/main">
+            <a:pPr algn="l">
+              <a:buNone/>
+              <a:defRPr sz="1350" b="1">
+                <a:solidFill>
+                  <a:srgbClr val="263746"/>
+                </a:solidFill>
+              </a:defRPr>
+            </a:pPr>
+            <a:r>
+              <a:rPr sz="1350" b="1">
+                <a:solidFill>
+                  <a:srgbClr val="263746"/>
+                </a:solidFill>
+                <a:latin typeface="Microsoft YaHei"/>
+                <a:ea typeface="Microsoft YaHei"/>
+                <a:cs typeface="Microsoft YaHei"/>
+              </a:rPr>
+              <a:t>哪个位置最需要人工确认？</a:t>
+            </a:r>
+          </a:p>
+        </p:txBody>
+      </p:sp>
+      <p:sp>
+        <p:nvSpPr>
+          <p:cNvPr id="11" name="p19-n-2">
+            <a:extLst xmlns:a="http://schemas.openxmlformats.org/drawingml/2006/main">
+              <a:ext uri="{FF2B5EF4-FFF2-40B4-BE49-F238E27FC236}">
+                <a16:creationId xmlns:a16="http://schemas.microsoft.com/office/drawing/2014/main" id="{49FCD9F5-00A0-48DC-8C7D-7BDBB0852813}"/>
+              </a:ext>
+            </a:extLst>
+          </p:cNvPr>
+          <p:cNvSpPr>
+            <a:spLocks xmlns:a="http://schemas.openxmlformats.org/drawingml/2006/main" noGrp="1"/>
+          </p:cNvSpPr>
+          <p:nvPr/>
+        </p:nvSpPr>
+        <p:spPr>
+          <a:xfrm xmlns:a="http://schemas.openxmlformats.org/drawingml/2006/main">
+            <a:off x="723900" y="3048000"/>
+            <a:ext cx="438150" cy="419100"/>
+          </a:xfrm>
+          <a:prstGeom xmlns:a="http://schemas.openxmlformats.org/drawingml/2006/main" prst="roundRect">
+            <a:avLst>
+              <a:gd name="adj" fmla="val 18182"/>
+            </a:avLst>
+          </a:prstGeom>
+          <a:solidFill xmlns:a="http://schemas.openxmlformats.org/drawingml/2006/main">
+            <a:srgbClr val="C8161E"/>
+          </a:solidFill>
+          <a:ln xmlns:a="http://schemas.openxmlformats.org/drawingml/2006/main" w="0">
+            <a:noFill/>
+            <a:prstDash val="solid"/>
+          </a:ln>
+        </p:spPr>
+        <p:txBody>
+          <a:bodyPr xmlns:a="http://schemas.openxmlformats.org/drawingml/2006/main" lIns="76200" tIns="38100" rIns="76200" bIns="38100" anchor="ctr"/>
+          <a:lstStyle xmlns:a="http://schemas.openxmlformats.org/drawingml/2006/main"/>
+          <a:p xmlns:a="http://schemas.openxmlformats.org/drawingml/2006/main">
+            <a:pPr algn="ctr">
+              <a:buNone/>
+              <a:defRPr sz="1200" b="1">
+                <a:solidFill>
+                  <a:srgbClr val="FFFFFF"/>
+                </a:solidFill>
+              </a:defRPr>
+            </a:pPr>
+            <a:r>
+              <a:rPr sz="1200" b="1">
+                <a:solidFill>
+                  <a:srgbClr val="FFFFFF"/>
+                </a:solidFill>
+                <a:latin typeface="Arial"/>
+                <a:ea typeface="Arial"/>
+                <a:cs typeface="Arial"/>
+              </a:rPr>
+              <a:t>3</a:t>
+            </a:r>
+          </a:p>
+        </p:txBody>
+      </p:sp>
+      <p:sp>
+        <p:nvSpPr>
+          <p:cNvPr id="12" name="p19-q-2">
+            <a:extLst xmlns:a="http://schemas.openxmlformats.org/drawingml/2006/main">
+              <a:ext uri="{FF2B5EF4-FFF2-40B4-BE49-F238E27FC236}">
+                <a16:creationId xmlns:a16="http://schemas.microsoft.com/office/drawing/2014/main" id="{60A963BD-194B-445B-9B56-B5763BD22110}"/>
+              </a:ext>
+            </a:extLst>
+          </p:cNvPr>
+          <p:cNvSpPr>
+            <a:spLocks xmlns:a="http://schemas.openxmlformats.org/drawingml/2006/main" noGrp="1"/>
+          </p:cNvSpPr>
+          <p:nvPr/>
+        </p:nvSpPr>
+        <p:spPr>
+          <a:xfrm xmlns:a="http://schemas.openxmlformats.org/drawingml/2006/main">
+            <a:off x="1314450" y="3048000"/>
+            <a:ext cx="4629150" cy="419100"/>
+          </a:xfrm>
+          <a:prstGeom xmlns:a="http://schemas.openxmlformats.org/drawingml/2006/main" prst="rect">
+            <a:avLst/>
+          </a:prstGeom>
+          <a:solidFill xmlns:a="http://schemas.openxmlformats.org/drawingml/2006/main">
+            <a:srgbClr val="F8E9EA"/>
+          </a:solidFill>
+          <a:ln xmlns:a="http://schemas.openxmlformats.org/drawingml/2006/main" w="0">
+            <a:noFill/>
+            <a:prstDash val="solid"/>
+          </a:ln>
+        </p:spPr>
+        <p:txBody>
+          <a:bodyPr xmlns:a="http://schemas.openxmlformats.org/drawingml/2006/main" lIns="76200" tIns="38100" rIns="76200" bIns="38100" anchor="ctr"/>
+          <a:lstStyle xmlns:a="http://schemas.openxmlformats.org/drawingml/2006/main"/>
+          <a:p xmlns:a="http://schemas.openxmlformats.org/drawingml/2006/main">
+            <a:pPr algn="l">
+              <a:buNone/>
+              <a:defRPr sz="1350" b="1">
+                <a:solidFill>
+                  <a:srgbClr val="C8161E"/>
+                </a:solidFill>
+              </a:defRPr>
+            </a:pPr>
+            <a:r>
+              <a:rPr sz="1350" b="1">
+                <a:solidFill>
+                  <a:srgbClr val="C8161E"/>
+                </a:solidFill>
+                <a:latin typeface="Microsoft YaHei"/>
+                <a:ea typeface="Microsoft YaHei"/>
+                <a:cs typeface="Microsoft YaHei"/>
+              </a:rPr>
+              <a:t>是否把两个案例外推成自主科研？</a:t>
+            </a:r>
+          </a:p>
+        </p:txBody>
+      </p:sp>
+      <p:sp>
+        <p:nvSpPr>
+          <p:cNvPr id="13" name="p19-n-3">
+            <a:extLst xmlns:a="http://schemas.openxmlformats.org/drawingml/2006/main">
+              <a:ext uri="{FF2B5EF4-FFF2-40B4-BE49-F238E27FC236}">
+                <a16:creationId xmlns:a16="http://schemas.microsoft.com/office/drawing/2014/main" id="{567C7C96-4CF9-4D8F-9F59-66FD5EF6AC42}"/>
+              </a:ext>
+            </a:extLst>
+          </p:cNvPr>
+          <p:cNvSpPr>
+            <a:spLocks xmlns:a="http://schemas.openxmlformats.org/drawingml/2006/main" noGrp="1"/>
+          </p:cNvSpPr>
+          <p:nvPr/>
+        </p:nvSpPr>
+        <p:spPr>
+          <a:xfrm xmlns:a="http://schemas.openxmlformats.org/drawingml/2006/main">
+            <a:off x="723900" y="3733800"/>
+            <a:ext cx="438150" cy="419100"/>
+          </a:xfrm>
+          <a:prstGeom xmlns:a="http://schemas.openxmlformats.org/drawingml/2006/main" prst="roundRect">
+            <a:avLst>
+              <a:gd name="adj" fmla="val 18182"/>
+            </a:avLst>
+          </a:prstGeom>
+          <a:solidFill xmlns:a="http://schemas.openxmlformats.org/drawingml/2006/main">
+            <a:srgbClr val="18354E"/>
+          </a:solidFill>
+          <a:ln xmlns:a="http://schemas.openxmlformats.org/drawingml/2006/main" w="0">
+            <a:noFill/>
+            <a:prstDash val="solid"/>
+          </a:ln>
+        </p:spPr>
+        <p:txBody>
+          <a:bodyPr xmlns:a="http://schemas.openxmlformats.org/drawingml/2006/main" lIns="76200" tIns="38100" rIns="76200" bIns="38100" anchor="ctr"/>
+          <a:lstStyle xmlns:a="http://schemas.openxmlformats.org/drawingml/2006/main"/>
+          <a:p xmlns:a="http://schemas.openxmlformats.org/drawingml/2006/main">
+            <a:pPr algn="ctr">
+              <a:buNone/>
+              <a:defRPr sz="1200" b="1">
+                <a:solidFill>
+                  <a:srgbClr val="FFFFFF"/>
+                </a:solidFill>
+              </a:defRPr>
+            </a:pPr>
+            <a:r>
+              <a:rPr sz="1200" b="1">
+                <a:solidFill>
+                  <a:srgbClr val="FFFFFF"/>
+                </a:solidFill>
+                <a:latin typeface="Arial"/>
+                <a:ea typeface="Arial"/>
+                <a:cs typeface="Arial"/>
+              </a:rPr>
+              <a:t>4</a:t>
+            </a:r>
+          </a:p>
+        </p:txBody>
+      </p:sp>
+      <p:sp>
+        <p:nvSpPr>
+          <p:cNvPr id="14" name="p19-q-3">
+            <a:extLst xmlns:a="http://schemas.openxmlformats.org/drawingml/2006/main">
+              <a:ext uri="{FF2B5EF4-FFF2-40B4-BE49-F238E27FC236}">
+                <a16:creationId xmlns:a16="http://schemas.microsoft.com/office/drawing/2014/main" id="{81B0B8AB-7317-410E-950D-18303074E901}"/>
+              </a:ext>
+            </a:extLst>
+          </p:cNvPr>
+          <p:cNvSpPr>
+            <a:spLocks xmlns:a="http://schemas.openxmlformats.org/drawingml/2006/main" noGrp="1"/>
+          </p:cNvSpPr>
+          <p:nvPr/>
+        </p:nvSpPr>
+        <p:spPr>
+          <a:xfrm xmlns:a="http://schemas.openxmlformats.org/drawingml/2006/main">
+            <a:off x="1314450" y="3733800"/>
+            <a:ext cx="4629150" cy="419100"/>
+          </a:xfrm>
+          <a:prstGeom xmlns:a="http://schemas.openxmlformats.org/drawingml/2006/main" prst="rect">
+            <a:avLst/>
+          </a:prstGeom>
+          <a:solidFill xmlns:a="http://schemas.openxmlformats.org/drawingml/2006/main">
+            <a:srgbClr val="F3F6F7"/>
+          </a:solidFill>
+          <a:ln xmlns:a="http://schemas.openxmlformats.org/drawingml/2006/main" w="0">
+            <a:noFill/>
+            <a:prstDash val="solid"/>
+          </a:ln>
+        </p:spPr>
+        <p:txBody>
+          <a:bodyPr xmlns:a="http://schemas.openxmlformats.org/drawingml/2006/main" lIns="76200" tIns="38100" rIns="76200" bIns="38100" anchor="ctr"/>
+          <a:lstStyle xmlns:a="http://schemas.openxmlformats.org/drawingml/2006/main"/>
+          <a:p xmlns:a="http://schemas.openxmlformats.org/drawingml/2006/main">
+            <a:pPr algn="l">
+              <a:buNone/>
+              <a:defRPr sz="1350" b="1">
+                <a:solidFill>
+                  <a:srgbClr val="263746"/>
+                </a:solidFill>
+              </a:defRPr>
+            </a:pPr>
+            <a:r>
+              <a:rPr sz="1350" b="1">
+                <a:solidFill>
+                  <a:srgbClr val="263746"/>
+                </a:solidFill>
+                <a:latin typeface="Microsoft YaHei"/>
+                <a:ea typeface="Microsoft YaHei"/>
+                <a:cs typeface="Microsoft YaHei"/>
+              </a:rPr>
+              <a:t>进入第 12 课前的最小卡点？</a:t>
+            </a:r>
+          </a:p>
+        </p:txBody>
+      </p:sp>
+      <p:sp>
+        <p:nvSpPr>
+          <p:cNvPr id="15" name="p19-right-h">
+            <a:extLst xmlns:a="http://schemas.openxmlformats.org/drawingml/2006/main">
+              <a:ext uri="{FF2B5EF4-FFF2-40B4-BE49-F238E27FC236}">
+                <a16:creationId xmlns:a16="http://schemas.microsoft.com/office/drawing/2014/main" id="{985278BB-3341-4954-BB09-2C4DEB9E41DA}"/>
+              </a:ext>
+            </a:extLst>
+          </p:cNvPr>
+          <p:cNvSpPr>
+            <a:spLocks xmlns:a="http://schemas.openxmlformats.org/drawingml/2006/main" noGrp="1"/>
+          </p:cNvSpPr>
+          <p:nvPr/>
+        </p:nvSpPr>
+        <p:spPr>
+          <a:xfrm xmlns:a="http://schemas.openxmlformats.org/drawingml/2006/main">
+            <a:off x="6667500" y="990600"/>
+            <a:ext cx="4895850" cy="514350"/>
+          </a:xfrm>
+          <a:prstGeom xmlns:a="http://schemas.openxmlformats.org/drawingml/2006/main" prst="rect">
+            <a:avLst/>
+          </a:prstGeom>
+          <a:solidFill xmlns:a="http://schemas.openxmlformats.org/drawingml/2006/main">
+            <a:srgbClr val="18354E"/>
+          </a:solidFill>
+          <a:ln xmlns:a="http://schemas.openxmlformats.org/drawingml/2006/main" w="0">
+            <a:noFill/>
+            <a:prstDash val="solid"/>
+          </a:ln>
+        </p:spPr>
+        <p:txBody>
+          <a:bodyPr xmlns:a="http://schemas.openxmlformats.org/drawingml/2006/main" lIns="76200" tIns="38100" rIns="76200" bIns="38100" anchor="ctr"/>
+          <a:lstStyle xmlns:a="http://schemas.openxmlformats.org/drawingml/2006/main"/>
+          <a:p xmlns:a="http://schemas.openxmlformats.org/drawingml/2006/main">
+            <a:pPr algn="ctr">
+              <a:buNone/>
+              <a:defRPr sz="1800" b="1">
+                <a:solidFill>
+                  <a:srgbClr val="FFFFFF"/>
+                </a:solidFill>
+              </a:defRPr>
+            </a:pPr>
+            <a:r>
+              <a:rPr sz="1800" b="1">
+                <a:solidFill>
+                  <a:srgbClr val="FFFFFF"/>
+                </a:solidFill>
+                <a:latin typeface="Microsoft YaHei"/>
+                <a:ea typeface="Microsoft YaHei"/>
+                <a:cs typeface="Microsoft YaHei"/>
+              </a:rPr>
+              <a:t>第 12 课：重新组合为个人工作流</a:t>
+            </a:r>
+          </a:p>
+        </p:txBody>
+      </p:sp>
+      <p:sp>
+        <p:nvSpPr>
+          <p:cNvPr id="16" name="p19-line-0">
+            <a:extLst xmlns:a="http://schemas.openxmlformats.org/drawingml/2006/main">
+              <a:ext uri="{FF2B5EF4-FFF2-40B4-BE49-F238E27FC236}">
+                <a16:creationId xmlns:a16="http://schemas.microsoft.com/office/drawing/2014/main" id="{B3ED17D2-9A23-4543-BE2C-88932B0A1F14}"/>
+              </a:ext>
+            </a:extLst>
+          </p:cNvPr>
+          <p:cNvSpPr>
+            <a:spLocks xmlns:a="http://schemas.openxmlformats.org/drawingml/2006/main" noGrp="1"/>
+          </p:cNvSpPr>
+          <p:nvPr/>
+        </p:nvSpPr>
+        <p:spPr>
+          <a:xfrm xmlns:a="http://schemas.openxmlformats.org/drawingml/2006/main" rot="5400000">
+            <a:off x="8801100" y="2190750"/>
+            <a:ext cx="342900" cy="38100"/>
+          </a:xfrm>
+          <a:prstGeom xmlns:a="http://schemas.openxmlformats.org/drawingml/2006/main" prst="rect">
+            <a:avLst/>
+          </a:prstGeom>
+          <a:solidFill xmlns:a="http://schemas.openxmlformats.org/drawingml/2006/main">
+            <a:srgbClr val="D6DDE2"/>
+          </a:solidFill>
+          <a:ln xmlns:a="http://schemas.openxmlformats.org/drawingml/2006/main" w="0">
+            <a:noFill/>
+            <a:prstDash val="solid"/>
+          </a:ln>
+        </p:spPr>
+      </p:sp>
+      <p:sp>
+        <p:nvSpPr>
+          <p:cNvPr id="17" name="p19-f-0">
+            <a:extLst xmlns:a="http://schemas.openxmlformats.org/drawingml/2006/main">
+              <a:ext uri="{FF2B5EF4-FFF2-40B4-BE49-F238E27FC236}">
+                <a16:creationId xmlns:a16="http://schemas.microsoft.com/office/drawing/2014/main" id="{5CFC39DA-3F1C-496E-B663-24A233028260}"/>
+              </a:ext>
+            </a:extLst>
+          </p:cNvPr>
+          <p:cNvSpPr>
+            <a:spLocks xmlns:a="http://schemas.openxmlformats.org/drawingml/2006/main" noGrp="1"/>
+          </p:cNvSpPr>
+          <p:nvPr/>
+        </p:nvSpPr>
+        <p:spPr>
+          <a:xfrm xmlns:a="http://schemas.openxmlformats.org/drawingml/2006/main">
+            <a:off x="7029450" y="1619250"/>
+            <a:ext cx="4171950" cy="552450"/>
+          </a:xfrm>
+          <a:prstGeom xmlns:a="http://schemas.openxmlformats.org/drawingml/2006/main" prst="roundRect">
+            <a:avLst>
+              <a:gd name="adj" fmla="val 13793"/>
+            </a:avLst>
+          </a:prstGeom>
+          <a:solidFill xmlns:a="http://schemas.openxmlformats.org/drawingml/2006/main">
+            <a:srgbClr val="E8F0F6"/>
+          </a:solidFill>
+          <a:ln xmlns:a="http://schemas.openxmlformats.org/drawingml/2006/main" w="19050">
+            <a:solidFill>
+              <a:srgbClr val="18354E"/>
+            </a:solidFill>
+            <a:prstDash val="solid"/>
+          </a:ln>
+        </p:spPr>
+        <p:txBody>
+          <a:bodyPr xmlns:a="http://schemas.openxmlformats.org/drawingml/2006/main" lIns="76200" tIns="38100" rIns="76200" bIns="38100" anchor="ctr"/>
+          <a:lstStyle xmlns:a="http://schemas.openxmlformats.org/drawingml/2006/main"/>
+          <a:p xmlns:a="http://schemas.openxmlformats.org/drawingml/2006/main">
+            <a:pPr algn="ctr">
+              <a:buNone/>
+              <a:defRPr sz="1500" b="1">
+                <a:solidFill>
+                  <a:srgbClr val="18354E"/>
+                </a:solidFill>
+              </a:defRPr>
+            </a:pPr>
+            <a:r>
+              <a:rPr sz="1500" b="1">
+                <a:solidFill>
+                  <a:srgbClr val="18354E"/>
+                </a:solidFill>
+                <a:latin typeface="Microsoft YaHei"/>
+                <a:ea typeface="Microsoft YaHei"/>
+                <a:cs typeface="Microsoft YaHei"/>
+              </a:rPr>
+              <a:t>受限循环骨架</a:t>
+            </a:r>
+          </a:p>
+        </p:txBody>
+      </p:sp>
+      <p:sp>
+        <p:nvSpPr>
+          <p:cNvPr id="18" name="p19-line-1">
+            <a:extLst xmlns:a="http://schemas.openxmlformats.org/drawingml/2006/main">
+              <a:ext uri="{FF2B5EF4-FFF2-40B4-BE49-F238E27FC236}">
+                <a16:creationId xmlns:a16="http://schemas.microsoft.com/office/drawing/2014/main" id="{DDBD2FB8-1667-4DB6-A493-90300BCCA440}"/>
+              </a:ext>
+            </a:extLst>
+          </p:cNvPr>
+          <p:cNvSpPr>
+            <a:spLocks xmlns:a="http://schemas.openxmlformats.org/drawingml/2006/main" noGrp="1"/>
+          </p:cNvSpPr>
+          <p:nvPr/>
+        </p:nvSpPr>
+        <p:spPr>
+          <a:xfrm xmlns:a="http://schemas.openxmlformats.org/drawingml/2006/main" rot="5400000">
+            <a:off x="8801100" y="3048000"/>
+            <a:ext cx="342900" cy="38100"/>
+          </a:xfrm>
+          <a:prstGeom xmlns:a="http://schemas.openxmlformats.org/drawingml/2006/main" prst="rect">
+            <a:avLst/>
+          </a:prstGeom>
+          <a:solidFill xmlns:a="http://schemas.openxmlformats.org/drawingml/2006/main">
+            <a:srgbClr val="D6DDE2"/>
+          </a:solidFill>
+          <a:ln xmlns:a="http://schemas.openxmlformats.org/drawingml/2006/main" w="0">
+            <a:noFill/>
+            <a:prstDash val="solid"/>
+          </a:ln>
+        </p:spPr>
+      </p:sp>
+      <p:sp>
+        <p:nvSpPr>
+          <p:cNvPr id="19" name="p19-f-1">
+            <a:extLst xmlns:a="http://schemas.openxmlformats.org/drawingml/2006/main">
+              <a:ext uri="{FF2B5EF4-FFF2-40B4-BE49-F238E27FC236}">
+                <a16:creationId xmlns:a16="http://schemas.microsoft.com/office/drawing/2014/main" id="{CE5EAEFE-800E-4735-807C-6DAA522D5DAD}"/>
+              </a:ext>
+            </a:extLst>
+          </p:cNvPr>
+          <p:cNvSpPr>
+            <a:spLocks xmlns:a="http://schemas.openxmlformats.org/drawingml/2006/main" noGrp="1"/>
+          </p:cNvSpPr>
+          <p:nvPr/>
+        </p:nvSpPr>
+        <p:spPr>
+          <a:xfrm xmlns:a="http://schemas.openxmlformats.org/drawingml/2006/main">
+            <a:off x="7029450" y="2476500"/>
+            <a:ext cx="4171950" cy="552450"/>
+          </a:xfrm>
+          <a:prstGeom xmlns:a="http://schemas.openxmlformats.org/drawingml/2006/main" prst="roundRect">
+            <a:avLst>
+              <a:gd name="adj" fmla="val 13793"/>
+            </a:avLst>
+          </a:prstGeom>
+          <a:solidFill xmlns:a="http://schemas.openxmlformats.org/drawingml/2006/main">
+            <a:srgbClr val="E8F0F6"/>
+          </a:solidFill>
+          <a:ln xmlns:a="http://schemas.openxmlformats.org/drawingml/2006/main" w="19050">
+            <a:solidFill>
+              <a:srgbClr val="18354E"/>
+            </a:solidFill>
+            <a:prstDash val="solid"/>
+          </a:ln>
+        </p:spPr>
+        <p:txBody>
+          <a:bodyPr xmlns:a="http://schemas.openxmlformats.org/drawingml/2006/main" lIns="76200" tIns="38100" rIns="76200" bIns="38100" anchor="ctr"/>
+          <a:lstStyle xmlns:a="http://schemas.openxmlformats.org/drawingml/2006/main"/>
+          <a:p xmlns:a="http://schemas.openxmlformats.org/drawingml/2006/main">
+            <a:pPr algn="ctr">
+              <a:buNone/>
+              <a:defRPr sz="1500" b="1">
+                <a:solidFill>
+                  <a:srgbClr val="18354E"/>
+                </a:solidFill>
+              </a:defRPr>
+            </a:pPr>
+            <a:r>
+              <a:rPr sz="1500" b="1">
+                <a:solidFill>
+                  <a:srgbClr val="18354E"/>
+                </a:solidFill>
+                <a:latin typeface="Microsoft YaHei"/>
+                <a:ea typeface="Microsoft YaHei"/>
+                <a:cs typeface="Microsoft YaHei"/>
+              </a:rPr>
+              <a:t>任务契约 · Context · Memory</a:t>
+            </a:r>
+          </a:p>
+        </p:txBody>
+      </p:sp>
+      <p:sp>
+        <p:nvSpPr>
+          <p:cNvPr id="20" name="p19-line-2">
+            <a:extLst xmlns:a="http://schemas.openxmlformats.org/drawingml/2006/main">
+              <a:ext uri="{FF2B5EF4-FFF2-40B4-BE49-F238E27FC236}">
+                <a16:creationId xmlns:a16="http://schemas.microsoft.com/office/drawing/2014/main" id="{90DD9D46-BC89-4281-8371-C0045880EA22}"/>
+              </a:ext>
+            </a:extLst>
+          </p:cNvPr>
+          <p:cNvSpPr>
+            <a:spLocks xmlns:a="http://schemas.openxmlformats.org/drawingml/2006/main" noGrp="1"/>
+          </p:cNvSpPr>
+          <p:nvPr/>
+        </p:nvSpPr>
+        <p:spPr>
+          <a:xfrm xmlns:a="http://schemas.openxmlformats.org/drawingml/2006/main" rot="5400000">
+            <a:off x="8801100" y="3905250"/>
+            <a:ext cx="342900" cy="38100"/>
+          </a:xfrm>
+          <a:prstGeom xmlns:a="http://schemas.openxmlformats.org/drawingml/2006/main" prst="rect">
+            <a:avLst/>
+          </a:prstGeom>
+          <a:solidFill xmlns:a="http://schemas.openxmlformats.org/drawingml/2006/main">
+            <a:srgbClr val="D6DDE2"/>
+          </a:solidFill>
+          <a:ln xmlns:a="http://schemas.openxmlformats.org/drawingml/2006/main" w="0">
+            <a:noFill/>
+            <a:prstDash val="solid"/>
+          </a:ln>
+        </p:spPr>
+      </p:sp>
+      <p:sp>
+        <p:nvSpPr>
+          <p:cNvPr id="21" name="p19-f-2">
+            <a:extLst xmlns:a="http://schemas.openxmlformats.org/drawingml/2006/main">
+              <a:ext uri="{FF2B5EF4-FFF2-40B4-BE49-F238E27FC236}">
+                <a16:creationId xmlns:a16="http://schemas.microsoft.com/office/drawing/2014/main" id="{3B9529C5-48EE-448D-9D0D-47242ABB355F}"/>
+              </a:ext>
+            </a:extLst>
+          </p:cNvPr>
+          <p:cNvSpPr>
+            <a:spLocks xmlns:a="http://schemas.openxmlformats.org/drawingml/2006/main" noGrp="1"/>
+          </p:cNvSpPr>
+          <p:nvPr/>
+        </p:nvSpPr>
+        <p:spPr>
+          <a:xfrm xmlns:a="http://schemas.openxmlformats.org/drawingml/2006/main">
+            <a:off x="7029450" y="3333750"/>
+            <a:ext cx="4171950" cy="552450"/>
+          </a:xfrm>
+          <a:prstGeom xmlns:a="http://schemas.openxmlformats.org/drawingml/2006/main" prst="roundRect">
+            <a:avLst>
+              <a:gd name="adj" fmla="val 13793"/>
+            </a:avLst>
+          </a:prstGeom>
+          <a:solidFill xmlns:a="http://schemas.openxmlformats.org/drawingml/2006/main">
+            <a:srgbClr val="E8F0F6"/>
+          </a:solidFill>
+          <a:ln xmlns:a="http://schemas.openxmlformats.org/drawingml/2006/main" w="19050">
+            <a:solidFill>
+              <a:srgbClr val="18354E"/>
+            </a:solidFill>
+            <a:prstDash val="solid"/>
+          </a:ln>
+        </p:spPr>
+        <p:txBody>
+          <a:bodyPr xmlns:a="http://schemas.openxmlformats.org/drawingml/2006/main" lIns="76200" tIns="38100" rIns="76200" bIns="38100" anchor="ctr"/>
+          <a:lstStyle xmlns:a="http://schemas.openxmlformats.org/drawingml/2006/main"/>
+          <a:p xmlns:a="http://schemas.openxmlformats.org/drawingml/2006/main">
+            <a:pPr algn="ctr">
+              <a:buNone/>
+              <a:defRPr sz="1500" b="1">
+                <a:solidFill>
+                  <a:srgbClr val="18354E"/>
+                </a:solidFill>
+              </a:defRPr>
+            </a:pPr>
+            <a:r>
+              <a:rPr sz="1500" b="1">
+                <a:solidFill>
+                  <a:srgbClr val="18354E"/>
+                </a:solidFill>
+                <a:latin typeface="Microsoft YaHei"/>
+                <a:ea typeface="Microsoft YaHei"/>
+                <a:cs typeface="Microsoft YaHei"/>
+              </a:rPr>
+              <a:t>工具/权限 · Evals · 审核</a:t>
+            </a:r>
+          </a:p>
+        </p:txBody>
+      </p:sp>
+      <p:sp>
+        <p:nvSpPr>
+          <p:cNvPr id="22" name="p19-f-3">
+            <a:extLst xmlns:a="http://schemas.openxmlformats.org/drawingml/2006/main">
+              <a:ext uri="{FF2B5EF4-FFF2-40B4-BE49-F238E27FC236}">
+                <a16:creationId xmlns:a16="http://schemas.microsoft.com/office/drawing/2014/main" id="{E6156BC4-6345-4E65-A3D9-C5CDBB7D8B5F}"/>
+              </a:ext>
+            </a:extLst>
+          </p:cNvPr>
+          <p:cNvSpPr>
+            <a:spLocks xmlns:a="http://schemas.openxmlformats.org/drawingml/2006/main" noGrp="1"/>
+          </p:cNvSpPr>
+          <p:nvPr/>
+        </p:nvSpPr>
+        <p:spPr>
+          <a:xfrm xmlns:a="http://schemas.openxmlformats.org/drawingml/2006/main">
+            <a:off x="7029450" y="4191000"/>
+            <a:ext cx="4171950" cy="552450"/>
+          </a:xfrm>
+          <a:prstGeom xmlns:a="http://schemas.openxmlformats.org/drawingml/2006/main" prst="roundRect">
+            <a:avLst>
+              <a:gd name="adj" fmla="val 13793"/>
+            </a:avLst>
+          </a:prstGeom>
+          <a:solidFill xmlns:a="http://schemas.openxmlformats.org/drawingml/2006/main">
+            <a:srgbClr val="E7F2ED"/>
+          </a:solidFill>
+          <a:ln xmlns:a="http://schemas.openxmlformats.org/drawingml/2006/main" w="19050">
+            <a:solidFill>
+              <a:srgbClr val="28745A"/>
+            </a:solidFill>
+            <a:prstDash val="solid"/>
+          </a:ln>
+        </p:spPr>
+        <p:txBody>
+          <a:bodyPr xmlns:a="http://schemas.openxmlformats.org/drawingml/2006/main" lIns="76200" tIns="38100" rIns="76200" bIns="38100" anchor="ctr"/>
+          <a:lstStyle xmlns:a="http://schemas.openxmlformats.org/drawingml/2006/main"/>
+          <a:p xmlns:a="http://schemas.openxmlformats.org/drawingml/2006/main">
+            <a:pPr algn="ctr">
+              <a:buNone/>
+              <a:defRPr sz="1500" b="1">
+                <a:solidFill>
+                  <a:srgbClr val="28745A"/>
+                </a:solidFill>
+              </a:defRPr>
+            </a:pPr>
+            <a:r>
+              <a:rPr sz="1500" b="1">
+                <a:solidFill>
+                  <a:srgbClr val="28745A"/>
+                </a:solidFill>
+                <a:latin typeface="Microsoft YaHei"/>
+                <a:ea typeface="Microsoft YaHei"/>
+                <a:cs typeface="Microsoft YaHei"/>
+              </a:rPr>
+              <a:t>可运行或可演示原型</a:t>
+            </a:r>
+          </a:p>
+        </p:txBody>
+      </p:sp>
+      <p:sp>
+        <p:nvSpPr>
+          <p:cNvPr id="23" name="p19-bottom">
+            <a:extLst xmlns:a="http://schemas.openxmlformats.org/drawingml/2006/main">
+              <a:ext uri="{FF2B5EF4-FFF2-40B4-BE49-F238E27FC236}">
+                <a16:creationId xmlns:a16="http://schemas.microsoft.com/office/drawing/2014/main" id="{96D123C9-05B9-4A6C-A7A9-67DEA0A0D14C}"/>
+              </a:ext>
+            </a:extLst>
+          </p:cNvPr>
+          <p:cNvSpPr>
+            <a:spLocks xmlns:a="http://schemas.openxmlformats.org/drawingml/2006/main" noGrp="1"/>
+          </p:cNvSpPr>
+          <p:nvPr/>
+        </p:nvSpPr>
+        <p:spPr>
+          <a:xfrm xmlns:a="http://schemas.openxmlformats.org/drawingml/2006/main">
+            <a:off x="1143000" y="5219700"/>
+            <a:ext cx="9906000" cy="419100"/>
+          </a:xfrm>
+          <a:prstGeom xmlns:a="http://schemas.openxmlformats.org/drawingml/2006/main" prst="rect">
+            <a:avLst/>
+          </a:prstGeom>
+          <a:noFill xmlns:a="http://schemas.openxmlformats.org/drawingml/2006/main"/>
+          <a:ln xmlns:a="http://schemas.openxmlformats.org/drawingml/2006/main" w="0">
+            <a:noFill/>
+            <a:prstDash val="solid"/>
+          </a:ln>
+        </p:spPr>
+        <p:txBody>
+          <a:bodyPr xmlns:a="http://schemas.openxmlformats.org/drawingml/2006/main" lIns="76200" tIns="38100" rIns="76200" bIns="38100" anchor="ctr"/>
+          <a:lstStyle xmlns:a="http://schemas.openxmlformats.org/drawingml/2006/main"/>
+          <a:p xmlns:a="http://schemas.openxmlformats.org/drawingml/2006/main">
+            <a:pPr algn="ctr">
+              <a:buNone/>
+              <a:defRPr sz="1575" b="1">
+                <a:solidFill>
+                  <a:srgbClr val="C8161E"/>
+                </a:solidFill>
+              </a:defRPr>
+            </a:pPr>
+            <a:r>
+              <a:rPr sz="1575" b="1">
+                <a:solidFill>
+                  <a:srgbClr val="C8161E"/>
+                </a:solidFill>
+                <a:latin typeface="Microsoft YaHei"/>
+                <a:ea typeface="Microsoft YaHei"/>
+                <a:cs typeface="Microsoft YaHei"/>
+              </a:rPr>
+              <a:t>本课无正式提交｜第 13 课验证门统一检查评价、失败保留与人工审核。</a:t>
             </a:r>
           </a:p>
         </p:txBody>
@@ -15889,6 +16884,7 @@
           <a:lstStyle xmlns:a="http://schemas.openxmlformats.org/drawingml/2006/main"/>
           <a:p xmlns:a="http://schemas.openxmlformats.org/drawingml/2006/main">
             <a:pPr algn="ctr">
+              <a:buNone/>
               <a:defRPr sz="1275" b="1">
                 <a:solidFill>
                   <a:srgbClr val="FFFFFF"/>
@@ -15944,6 +16940,7 @@
           <a:lstStyle xmlns:a="http://schemas.openxmlformats.org/drawingml/2006/main"/>
           <a:p xmlns:a="http://schemas.openxmlformats.org/drawingml/2006/main">
             <a:pPr algn="ctr">
+              <a:buNone/>
               <a:defRPr sz="1350" b="1">
                 <a:solidFill>
                   <a:srgbClr val="18354E"/>
@@ -16001,6 +16998,7 @@
           <a:lstStyle xmlns:a="http://schemas.openxmlformats.org/drawingml/2006/main"/>
           <a:p xmlns:a="http://schemas.openxmlformats.org/drawingml/2006/main">
             <a:pPr algn="ctr">
+              <a:buNone/>
               <a:defRPr sz="1275" b="1">
                 <a:solidFill>
                   <a:srgbClr val="FFFFFF"/>
@@ -16056,6 +17054,7 @@
           <a:lstStyle xmlns:a="http://schemas.openxmlformats.org/drawingml/2006/main"/>
           <a:p xmlns:a="http://schemas.openxmlformats.org/drawingml/2006/main">
             <a:pPr algn="ctr">
+              <a:buNone/>
               <a:defRPr sz="1350" b="1">
                 <a:solidFill>
                   <a:srgbClr val="18354E"/>
@@ -16113,6 +17112,7 @@
           <a:lstStyle xmlns:a="http://schemas.openxmlformats.org/drawingml/2006/main"/>
           <a:p xmlns:a="http://schemas.openxmlformats.org/drawingml/2006/main">
             <a:pPr algn="ctr">
+              <a:buNone/>
               <a:defRPr sz="1275" b="1">
                 <a:solidFill>
                   <a:srgbClr val="FFFFFF"/>
@@ -16168,6 +17168,7 @@
           <a:lstStyle xmlns:a="http://schemas.openxmlformats.org/drawingml/2006/main"/>
           <a:p xmlns:a="http://schemas.openxmlformats.org/drawingml/2006/main">
             <a:pPr algn="ctr">
+              <a:buNone/>
               <a:defRPr sz="1350" b="1">
                 <a:solidFill>
                   <a:srgbClr val="18354E"/>
@@ -16225,6 +17226,7 @@
           <a:lstStyle xmlns:a="http://schemas.openxmlformats.org/drawingml/2006/main"/>
           <a:p xmlns:a="http://schemas.openxmlformats.org/drawingml/2006/main">
             <a:pPr algn="ctr">
+              <a:buNone/>
               <a:defRPr sz="1275" b="1">
                 <a:solidFill>
                   <a:srgbClr val="FFFFFF"/>
@@ -16280,6 +17282,7 @@
           <a:lstStyle xmlns:a="http://schemas.openxmlformats.org/drawingml/2006/main"/>
           <a:p xmlns:a="http://schemas.openxmlformats.org/drawingml/2006/main">
             <a:pPr algn="ctr">
+              <a:buNone/>
               <a:defRPr sz="1350" b="1">
                 <a:solidFill>
                   <a:srgbClr val="18354E"/>
@@ -16337,6 +17340,7 @@
           <a:lstStyle xmlns:a="http://schemas.openxmlformats.org/drawingml/2006/main"/>
           <a:p xmlns:a="http://schemas.openxmlformats.org/drawingml/2006/main">
             <a:pPr algn="ctr">
+              <a:buNone/>
               <a:defRPr sz="1275" b="1">
                 <a:solidFill>
                   <a:srgbClr val="FFFFFF"/>
@@ -16392,6 +17396,7 @@
           <a:lstStyle xmlns:a="http://schemas.openxmlformats.org/drawingml/2006/main"/>
           <a:p xmlns:a="http://schemas.openxmlformats.org/drawingml/2006/main">
             <a:pPr algn="ctr">
+              <a:buNone/>
               <a:defRPr sz="1350" b="1">
                 <a:solidFill>
                   <a:srgbClr val="C8161E"/>
@@ -16449,6 +17454,7 @@
           <a:lstStyle xmlns:a="http://schemas.openxmlformats.org/drawingml/2006/main"/>
           <a:p xmlns:a="http://schemas.openxmlformats.org/drawingml/2006/main">
             <a:pPr algn="ctr">
+              <a:buNone/>
               <a:defRPr sz="1275" b="1">
                 <a:solidFill>
                   <a:srgbClr val="FFFFFF"/>
@@ -16504,6 +17510,7 @@
           <a:lstStyle xmlns:a="http://schemas.openxmlformats.org/drawingml/2006/main"/>
           <a:p xmlns:a="http://schemas.openxmlformats.org/drawingml/2006/main">
             <a:pPr algn="ctr">
+              <a:buNone/>
               <a:defRPr sz="1350" b="1">
                 <a:solidFill>
                   <a:srgbClr val="18354E"/>
@@ -16557,6 +17564,7 @@
           <a:lstStyle xmlns:a="http://schemas.openxmlformats.org/drawingml/2006/main"/>
           <a:p xmlns:a="http://schemas.openxmlformats.org/drawingml/2006/main">
             <a:pPr algn="ctr">
+              <a:buNone/>
               <a:defRPr sz="1950" b="1">
                 <a:solidFill>
                   <a:srgbClr val="C8161E"/>
@@ -16612,6 +17620,7 @@
           <a:lstStyle xmlns:a="http://schemas.openxmlformats.org/drawingml/2006/main"/>
           <a:p xmlns:a="http://schemas.openxmlformats.org/drawingml/2006/main">
             <a:pPr algn="ctr">
+              <a:buNone/>
               <a:defRPr sz="1650" b="1">
                 <a:solidFill>
                   <a:srgbClr val="FFFFFF"/>
@@ -16667,6 +17676,7 @@
           <a:lstStyle xmlns:a="http://schemas.openxmlformats.org/drawingml/2006/main"/>
           <a:p xmlns:a="http://schemas.openxmlformats.org/drawingml/2006/main">
             <a:pPr algn="ctr">
+              <a:buNone/>
               <a:defRPr sz="1500" b="1">
                 <a:solidFill>
                   <a:srgbClr val="263746"/>
@@ -16722,6 +17732,7 @@
           <a:lstStyle xmlns:a="http://schemas.openxmlformats.org/drawingml/2006/main"/>
           <a:p xmlns:a="http://schemas.openxmlformats.org/drawingml/2006/main">
             <a:pPr algn="ctr">
+              <a:buNone/>
               <a:defRPr sz="1650" b="1">
                 <a:solidFill>
                   <a:srgbClr val="FFFFFF"/>
@@ -16777,6 +17788,7 @@
           <a:lstStyle xmlns:a="http://schemas.openxmlformats.org/drawingml/2006/main"/>
           <a:p xmlns:a="http://schemas.openxmlformats.org/drawingml/2006/main">
             <a:pPr algn="ctr">
+              <a:buNone/>
               <a:defRPr sz="1500" b="1">
                 <a:solidFill>
                   <a:srgbClr val="263746"/>
@@ -16832,6 +17844,7 @@
           <a:lstStyle xmlns:a="http://schemas.openxmlformats.org/drawingml/2006/main"/>
           <a:p xmlns:a="http://schemas.openxmlformats.org/drawingml/2006/main">
             <a:pPr algn="ctr">
+              <a:buNone/>
               <a:defRPr sz="1650" b="1">
                 <a:solidFill>
                   <a:srgbClr val="FFFFFF"/>
@@ -16887,6 +17900,7 @@
           <a:lstStyle xmlns:a="http://schemas.openxmlformats.org/drawingml/2006/main"/>
           <a:p xmlns:a="http://schemas.openxmlformats.org/drawingml/2006/main">
             <a:pPr algn="ctr">
+              <a:buNone/>
               <a:defRPr sz="1500" b="1">
                 <a:solidFill>
                   <a:srgbClr val="263746"/>
@@ -16940,6 +17954,7 @@
           <a:lstStyle xmlns:a="http://schemas.openxmlformats.org/drawingml/2006/main"/>
           <a:p xmlns:a="http://schemas.openxmlformats.org/drawingml/2006/main">
             <a:pPr algn="ctr">
+              <a:buNone/>
               <a:defRPr sz="1650" b="1">
                 <a:solidFill>
                   <a:srgbClr val="C8161E"/>
@@ -17215,6 +18230,7 @@
           <a:lstStyle xmlns:a="http://schemas.openxmlformats.org/drawingml/2006/main"/>
           <a:p xmlns:a="http://schemas.openxmlformats.org/drawingml/2006/main">
             <a:pPr algn="ctr">
+              <a:buNone/>
               <a:defRPr sz="1350" b="1">
                 <a:solidFill>
                   <a:srgbClr val="FFFFFF"/>
@@ -17359,6 +18375,7 @@
           <a:lstStyle xmlns:a="http://schemas.openxmlformats.org/drawingml/2006/main"/>
           <a:p xmlns:a="http://schemas.openxmlformats.org/drawingml/2006/main">
             <a:pPr algn="ctr">
+              <a:buNone/>
               <a:defRPr sz="1350" b="1">
                 <a:solidFill>
                   <a:srgbClr val="FFFFFF"/>
@@ -17503,6 +18520,7 @@
           <a:lstStyle xmlns:a="http://schemas.openxmlformats.org/drawingml/2006/main"/>
           <a:p xmlns:a="http://schemas.openxmlformats.org/drawingml/2006/main">
             <a:pPr algn="ctr">
+              <a:buNone/>
               <a:defRPr sz="1350" b="1">
                 <a:solidFill>
                   <a:srgbClr val="FFFFFF"/>
@@ -17647,6 +18665,7 @@
           <a:lstStyle xmlns:a="http://schemas.openxmlformats.org/drawingml/2006/main"/>
           <a:p xmlns:a="http://schemas.openxmlformats.org/drawingml/2006/main">
             <a:pPr algn="ctr">
+              <a:buNone/>
               <a:defRPr sz="1350" b="1">
                 <a:solidFill>
                   <a:srgbClr val="FFFFFF"/>
@@ -17791,6 +18810,7 @@
           <a:lstStyle xmlns:a="http://schemas.openxmlformats.org/drawingml/2006/main"/>
           <a:p xmlns:a="http://schemas.openxmlformats.org/drawingml/2006/main">
             <a:pPr algn="ctr">
+              <a:buNone/>
               <a:defRPr sz="1350" b="1">
                 <a:solidFill>
                   <a:srgbClr val="FFFFFF"/>
@@ -17966,6 +18986,7 @@
           <a:lstStyle xmlns:a="http://schemas.openxmlformats.org/drawingml/2006/main"/>
           <a:p xmlns:a="http://schemas.openxmlformats.org/drawingml/2006/main">
             <a:pPr algn="ctr">
+              <a:buNone/>
               <a:defRPr sz="1350" b="1">
                 <a:solidFill>
                   <a:srgbClr val="FFFFFF"/>
@@ -18021,6 +19042,7 @@
           <a:lstStyle xmlns:a="http://schemas.openxmlformats.org/drawingml/2006/main"/>
           <a:p xmlns:a="http://schemas.openxmlformats.org/drawingml/2006/main">
             <a:pPr algn="l">
+              <a:buNone/>
               <a:defRPr sz="1575" b="1">
                 <a:solidFill>
                   <a:srgbClr val="263746"/>
@@ -18076,6 +19098,7 @@
           <a:lstStyle xmlns:a="http://schemas.openxmlformats.org/drawingml/2006/main"/>
           <a:p xmlns:a="http://schemas.openxmlformats.org/drawingml/2006/main">
             <a:pPr algn="l">
+              <a:buNone/>
               <a:defRPr sz="1575" b="1">
                 <a:solidFill>
                   <a:srgbClr val="263746"/>
@@ -18131,6 +19154,7 @@
           <a:lstStyle xmlns:a="http://schemas.openxmlformats.org/drawingml/2006/main"/>
           <a:p xmlns:a="http://schemas.openxmlformats.org/drawingml/2006/main">
             <a:pPr algn="l">
+              <a:buNone/>
               <a:defRPr sz="1575" b="1">
                 <a:solidFill>
                   <a:srgbClr val="263746"/>
@@ -18184,6 +19208,7 @@
           <a:lstStyle xmlns:a="http://schemas.openxmlformats.org/drawingml/2006/main"/>
           <a:p xmlns:a="http://schemas.openxmlformats.org/drawingml/2006/main">
             <a:pPr algn="ctr">
+              <a:buNone/>
               <a:defRPr sz="1575" b="1">
                 <a:solidFill>
                   <a:srgbClr val="C8161E"/>
@@ -18333,6 +19358,7 @@
           <a:lstStyle xmlns:a="http://schemas.openxmlformats.org/drawingml/2006/main"/>
           <a:p xmlns:a="http://schemas.openxmlformats.org/drawingml/2006/main">
             <a:pPr algn="ctr">
+              <a:buNone/>
               <a:defRPr sz="1875" b="1">
                 <a:solidFill>
                   <a:srgbClr val="FFFFFF"/>
@@ -18388,6 +19414,7 @@
           <a:lstStyle xmlns:a="http://schemas.openxmlformats.org/drawingml/2006/main"/>
           <a:p xmlns:a="http://schemas.openxmlformats.org/drawingml/2006/main">
             <a:pPr algn="l">
+              <a:buNone/>
               <a:defRPr sz="1575" b="1">
                 <a:solidFill>
                   <a:srgbClr val="28745A"/>
@@ -18443,6 +19470,7 @@
           <a:lstStyle xmlns:a="http://schemas.openxmlformats.org/drawingml/2006/main"/>
           <a:p xmlns:a="http://schemas.openxmlformats.org/drawingml/2006/main">
             <a:pPr algn="l">
+              <a:buNone/>
               <a:defRPr sz="1575" b="1">
                 <a:solidFill>
                   <a:srgbClr val="28745A"/>
@@ -18498,6 +19526,7 @@
           <a:lstStyle xmlns:a="http://schemas.openxmlformats.org/drawingml/2006/main"/>
           <a:p xmlns:a="http://schemas.openxmlformats.org/drawingml/2006/main">
             <a:pPr algn="l">
+              <a:buNone/>
               <a:defRPr sz="1575" b="1">
                 <a:solidFill>
                   <a:srgbClr val="28745A"/>
@@ -18553,6 +19582,7 @@
           <a:lstStyle xmlns:a="http://schemas.openxmlformats.org/drawingml/2006/main"/>
           <a:p xmlns:a="http://schemas.openxmlformats.org/drawingml/2006/main">
             <a:pPr algn="l">
+              <a:buNone/>
               <a:defRPr sz="1575" b="1">
                 <a:solidFill>
                   <a:srgbClr val="28745A"/>
@@ -18608,6 +19638,7 @@
           <a:lstStyle xmlns:a="http://schemas.openxmlformats.org/drawingml/2006/main"/>
           <a:p xmlns:a="http://schemas.openxmlformats.org/drawingml/2006/main">
             <a:pPr algn="ctr">
+              <a:buNone/>
               <a:defRPr sz="1875" b="1">
                 <a:solidFill>
                   <a:srgbClr val="FFFFFF"/>
@@ -18663,6 +19694,7 @@
           <a:lstStyle xmlns:a="http://schemas.openxmlformats.org/drawingml/2006/main"/>
           <a:p xmlns:a="http://schemas.openxmlformats.org/drawingml/2006/main">
             <a:pPr algn="l">
+              <a:buNone/>
               <a:defRPr sz="1575" b="1">
                 <a:solidFill>
                   <a:srgbClr val="C8161E"/>
@@ -18718,6 +19750,7 @@
           <a:lstStyle xmlns:a="http://schemas.openxmlformats.org/drawingml/2006/main"/>
           <a:p xmlns:a="http://schemas.openxmlformats.org/drawingml/2006/main">
             <a:pPr algn="l">
+              <a:buNone/>
               <a:defRPr sz="1575" b="1">
                 <a:solidFill>
                   <a:srgbClr val="C8161E"/>
@@ -18773,6 +19806,7 @@
           <a:lstStyle xmlns:a="http://schemas.openxmlformats.org/drawingml/2006/main"/>
           <a:p xmlns:a="http://schemas.openxmlformats.org/drawingml/2006/main">
             <a:pPr algn="l">
+              <a:buNone/>
               <a:defRPr sz="1575" b="1">
                 <a:solidFill>
                   <a:srgbClr val="C8161E"/>
@@ -18828,6 +19862,7 @@
           <a:lstStyle xmlns:a="http://schemas.openxmlformats.org/drawingml/2006/main"/>
           <a:p xmlns:a="http://schemas.openxmlformats.org/drawingml/2006/main">
             <a:pPr algn="l">
+              <a:buNone/>
               <a:defRPr sz="1575" b="1">
                 <a:solidFill>
                   <a:srgbClr val="C8161E"/>
@@ -18885,6 +19920,7 @@
           <a:lstStyle xmlns:a="http://schemas.openxmlformats.org/drawingml/2006/main"/>
           <a:p xmlns:a="http://schemas.openxmlformats.org/drawingml/2006/main">
             <a:pPr algn="ctr">
+              <a:buNone/>
               <a:defRPr sz="1800" b="1">
                 <a:solidFill>
                   <a:srgbClr val="FFFFFF"/>
@@ -19034,6 +20070,7 @@
           <a:lstStyle xmlns:a="http://schemas.openxmlformats.org/drawingml/2006/main"/>
           <a:p xmlns:a="http://schemas.openxmlformats.org/drawingml/2006/main">
             <a:pPr algn="ctr">
+              <a:buNone/>
               <a:defRPr sz="1800" b="1">
                 <a:solidFill>
                   <a:srgbClr val="FFFFFF"/>
@@ -19089,6 +20126,7 @@
           <a:lstStyle xmlns:a="http://schemas.openxmlformats.org/drawingml/2006/main"/>
           <a:p xmlns:a="http://schemas.openxmlformats.org/drawingml/2006/main">
             <a:pPr algn="ctr">
+              <a:buNone/>
               <a:defRPr sz="1350" b="1">
                 <a:solidFill>
                   <a:srgbClr val="FFFFFF"/>
@@ -19144,6 +20182,7 @@
           <a:lstStyle xmlns:a="http://schemas.openxmlformats.org/drawingml/2006/main"/>
           <a:p xmlns:a="http://schemas.openxmlformats.org/drawingml/2006/main">
             <a:pPr algn="l">
+              <a:buNone/>
               <a:defRPr sz="1425" b="1">
                 <a:solidFill>
                   <a:srgbClr val="263746"/>
@@ -19199,6 +20238,7 @@
           <a:lstStyle xmlns:a="http://schemas.openxmlformats.org/drawingml/2006/main"/>
           <a:p xmlns:a="http://schemas.openxmlformats.org/drawingml/2006/main">
             <a:pPr algn="ctr">
+              <a:buNone/>
               <a:defRPr sz="1350" b="1">
                 <a:solidFill>
                   <a:srgbClr val="FFFFFF"/>
@@ -19254,6 +20294,7 @@
           <a:lstStyle xmlns:a="http://schemas.openxmlformats.org/drawingml/2006/main"/>
           <a:p xmlns:a="http://schemas.openxmlformats.org/drawingml/2006/main">
             <a:pPr algn="l">
+              <a:buNone/>
               <a:defRPr sz="1425" b="1">
                 <a:solidFill>
                   <a:srgbClr val="263746"/>
@@ -19309,6 +20350,7 @@
           <a:lstStyle xmlns:a="http://schemas.openxmlformats.org/drawingml/2006/main"/>
           <a:p xmlns:a="http://schemas.openxmlformats.org/drawingml/2006/main">
             <a:pPr algn="ctr">
+              <a:buNone/>
               <a:defRPr sz="1350" b="1">
                 <a:solidFill>
                   <a:srgbClr val="FFFFFF"/>
@@ -19364,6 +20406,7 @@
           <a:lstStyle xmlns:a="http://schemas.openxmlformats.org/drawingml/2006/main"/>
           <a:p xmlns:a="http://schemas.openxmlformats.org/drawingml/2006/main">
             <a:pPr algn="l">
+              <a:buNone/>
               <a:defRPr sz="1425" b="1">
                 <a:solidFill>
                   <a:srgbClr val="263746"/>
@@ -19419,6 +20462,7 @@
           <a:lstStyle xmlns:a="http://schemas.openxmlformats.org/drawingml/2006/main"/>
           <a:p xmlns:a="http://schemas.openxmlformats.org/drawingml/2006/main">
             <a:pPr algn="ctr">
+              <a:buNone/>
               <a:defRPr sz="1350" b="1">
                 <a:solidFill>
                   <a:srgbClr val="FFFFFF"/>
@@ -19474,6 +20518,7 @@
           <a:lstStyle xmlns:a="http://schemas.openxmlformats.org/drawingml/2006/main"/>
           <a:p xmlns:a="http://schemas.openxmlformats.org/drawingml/2006/main">
             <a:pPr algn="l">
+              <a:buNone/>
               <a:defRPr sz="1425" b="1">
                 <a:solidFill>
                   <a:srgbClr val="263746"/>
@@ -19529,6 +20574,7 @@
           <a:lstStyle xmlns:a="http://schemas.openxmlformats.org/drawingml/2006/main"/>
           <a:p xmlns:a="http://schemas.openxmlformats.org/drawingml/2006/main">
             <a:pPr algn="ctr">
+              <a:buNone/>
               <a:defRPr sz="1350" b="1">
                 <a:solidFill>
                   <a:srgbClr val="FFFFFF"/>
@@ -19584,6 +20630,7 @@
           <a:lstStyle xmlns:a="http://schemas.openxmlformats.org/drawingml/2006/main"/>
           <a:p xmlns:a="http://schemas.openxmlformats.org/drawingml/2006/main">
             <a:pPr algn="l">
+              <a:buNone/>
               <a:defRPr sz="1425" b="1">
                 <a:solidFill>
                   <a:srgbClr val="263746"/>
@@ -19639,6 +20686,7 @@
           <a:lstStyle xmlns:a="http://schemas.openxmlformats.org/drawingml/2006/main"/>
           <a:p xmlns:a="http://schemas.openxmlformats.org/drawingml/2006/main">
             <a:pPr algn="ctr">
+              <a:buNone/>
               <a:defRPr sz="1875" b="1">
                 <a:solidFill>
                   <a:srgbClr val="FFFFFF"/>
@@ -19694,6 +20742,7 @@
           <a:lstStyle xmlns:a="http://schemas.openxmlformats.org/drawingml/2006/main"/>
           <a:p xmlns:a="http://schemas.openxmlformats.org/drawingml/2006/main">
             <a:pPr algn="l">
+              <a:buNone/>
               <a:defRPr sz="1575" b="1">
                 <a:solidFill>
                   <a:srgbClr val="C8161E"/>
@@ -19749,6 +20798,7 @@
           <a:lstStyle xmlns:a="http://schemas.openxmlformats.org/drawingml/2006/main"/>
           <a:p xmlns:a="http://schemas.openxmlformats.org/drawingml/2006/main">
             <a:pPr algn="l">
+              <a:buNone/>
               <a:defRPr sz="1575" b="1">
                 <a:solidFill>
                   <a:srgbClr val="C8161E"/>
@@ -19804,6 +20854,7 @@
           <a:lstStyle xmlns:a="http://schemas.openxmlformats.org/drawingml/2006/main"/>
           <a:p xmlns:a="http://schemas.openxmlformats.org/drawingml/2006/main">
             <a:pPr algn="l">
+              <a:buNone/>
               <a:defRPr sz="1575" b="1">
                 <a:solidFill>
                   <a:srgbClr val="C8161E"/>
@@ -20014,6 +21065,7 @@
           <a:lstStyle xmlns:a="http://schemas.openxmlformats.org/drawingml/2006/main"/>
           <a:p xmlns:a="http://schemas.openxmlformats.org/drawingml/2006/main">
             <a:pPr algn="ctr">
+              <a:buNone/>
               <a:defRPr sz="1875" b="1">
                 <a:solidFill>
                   <a:srgbClr val="C8161E"/>
@@ -20071,6 +21123,7 @@
           <a:lstStyle xmlns:a="http://schemas.openxmlformats.org/drawingml/2006/main"/>
           <a:p xmlns:a="http://schemas.openxmlformats.org/drawingml/2006/main">
             <a:pPr algn="ctr">
+              <a:buNone/>
               <a:defRPr sz="1350" b="1">
                 <a:solidFill>
                   <a:srgbClr val="FFFFFF"/>
@@ -20126,6 +21179,7 @@
           <a:lstStyle xmlns:a="http://schemas.openxmlformats.org/drawingml/2006/main"/>
           <a:p xmlns:a="http://schemas.openxmlformats.org/drawingml/2006/main">
             <a:pPr algn="ctr">
+              <a:buNone/>
               <a:defRPr sz="1350" b="1">
                 <a:solidFill>
                   <a:srgbClr val="263746"/>
@@ -20183,6 +21237,7 @@
           <a:lstStyle xmlns:a="http://schemas.openxmlformats.org/drawingml/2006/main"/>
           <a:p xmlns:a="http://schemas.openxmlformats.org/drawingml/2006/main">
             <a:pPr algn="ctr">
+              <a:buNone/>
               <a:defRPr sz="1350" b="1">
                 <a:solidFill>
                   <a:srgbClr val="FFFFFF"/>
@@ -20238,6 +21293,7 @@
           <a:lstStyle xmlns:a="http://schemas.openxmlformats.org/drawingml/2006/main"/>
           <a:p xmlns:a="http://schemas.openxmlformats.org/drawingml/2006/main">
             <a:pPr algn="ctr">
+              <a:buNone/>
               <a:defRPr sz="1350" b="1">
                 <a:solidFill>
                   <a:srgbClr val="263746"/>
@@ -20295,6 +21351,7 @@
           <a:lstStyle xmlns:a="http://schemas.openxmlformats.org/drawingml/2006/main"/>
           <a:p xmlns:a="http://schemas.openxmlformats.org/drawingml/2006/main">
             <a:pPr algn="ctr">
+              <a:buNone/>
               <a:defRPr sz="1350" b="1">
                 <a:solidFill>
                   <a:srgbClr val="FFFFFF"/>
@@ -20350,6 +21407,7 @@
           <a:lstStyle xmlns:a="http://schemas.openxmlformats.org/drawingml/2006/main"/>
           <a:p xmlns:a="http://schemas.openxmlformats.org/drawingml/2006/main">
             <a:pPr algn="ctr">
+              <a:buNone/>
               <a:defRPr sz="1350" b="1">
                 <a:solidFill>
                   <a:srgbClr val="263746"/>
@@ -20407,6 +21465,7 @@
           <a:lstStyle xmlns:a="http://schemas.openxmlformats.org/drawingml/2006/main"/>
           <a:p xmlns:a="http://schemas.openxmlformats.org/drawingml/2006/main">
             <a:pPr algn="ctr">
+              <a:buNone/>
               <a:defRPr sz="1350" b="1">
                 <a:solidFill>
                   <a:srgbClr val="FFFFFF"/>
@@ -20462,6 +21521,7 @@
           <a:lstStyle xmlns:a="http://schemas.openxmlformats.org/drawingml/2006/main"/>
           <a:p xmlns:a="http://schemas.openxmlformats.org/drawingml/2006/main">
             <a:pPr algn="ctr">
+              <a:buNone/>
               <a:defRPr sz="1350" b="1">
                 <a:solidFill>
                   <a:srgbClr val="263746"/>
@@ -20515,6 +21575,7 @@
           <a:lstStyle xmlns:a="http://schemas.openxmlformats.org/drawingml/2006/main"/>
           <a:p xmlns:a="http://schemas.openxmlformats.org/drawingml/2006/main">
             <a:pPr algn="ctr">
+              <a:buNone/>
               <a:defRPr sz="1875" b="1">
                 <a:solidFill>
                   <a:srgbClr val="18354E"/>
@@ -20570,6 +21631,7 @@
           <a:lstStyle xmlns:a="http://schemas.openxmlformats.org/drawingml/2006/main"/>
           <a:p xmlns:a="http://schemas.openxmlformats.org/drawingml/2006/main">
             <a:pPr algn="ctr">
+              <a:buNone/>
               <a:defRPr sz="1725" b="1">
                 <a:solidFill>
                   <a:srgbClr val="FFFFFF"/>
@@ -20708,6 +21770,7 @@
           <a:lstStyle xmlns:a="http://schemas.openxmlformats.org/drawingml/2006/main"/>
           <a:p xmlns:a="http://schemas.openxmlformats.org/drawingml/2006/main">
             <a:pPr algn="ctr">
+              <a:buNone/>
               <a:defRPr sz="1725" b="1">
                 <a:solidFill>
                   <a:srgbClr val="FFFFFF"/>
@@ -20846,6 +21909,7 @@
           <a:lstStyle xmlns:a="http://schemas.openxmlformats.org/drawingml/2006/main"/>
           <a:p xmlns:a="http://schemas.openxmlformats.org/drawingml/2006/main">
             <a:pPr algn="ctr">
+              <a:buNone/>
               <a:defRPr sz="1725" b="1">
                 <a:solidFill>
                   <a:srgbClr val="FFFFFF"/>
@@ -20982,6 +22046,7 @@
           <a:lstStyle xmlns:a="http://schemas.openxmlformats.org/drawingml/2006/main"/>
           <a:p xmlns:a="http://schemas.openxmlformats.org/drawingml/2006/main">
             <a:pPr algn="ctr">
+              <a:buNone/>
               <a:defRPr sz="1725" b="1">
                 <a:solidFill>
                   <a:srgbClr val="C8161E"/>
@@ -21131,6 +22196,7 @@
           <a:lstStyle xmlns:a="http://schemas.openxmlformats.org/drawingml/2006/main"/>
           <a:p xmlns:a="http://schemas.openxmlformats.org/drawingml/2006/main">
             <a:pPr algn="ctr">
+              <a:buNone/>
               <a:defRPr sz="2025" b="1">
                 <a:solidFill>
                   <a:srgbClr val="FFFFFF"/>
@@ -21186,6 +22252,7 @@
           <a:lstStyle xmlns:a="http://schemas.openxmlformats.org/drawingml/2006/main"/>
           <a:p xmlns:a="http://schemas.openxmlformats.org/drawingml/2006/main">
             <a:pPr algn="l">
+              <a:buNone/>
               <a:defRPr sz="1500" b="1">
                 <a:solidFill>
                   <a:srgbClr val="28745A"/>
@@ -21241,6 +22308,7 @@
           <a:lstStyle xmlns:a="http://schemas.openxmlformats.org/drawingml/2006/main"/>
           <a:p xmlns:a="http://schemas.openxmlformats.org/drawingml/2006/main">
             <a:pPr algn="l">
+              <a:buNone/>
               <a:defRPr sz="1500" b="1">
                 <a:solidFill>
                   <a:srgbClr val="28745A"/>
@@ -21296,6 +22364,7 @@
           <a:lstStyle xmlns:a="http://schemas.openxmlformats.org/drawingml/2006/main"/>
           <a:p xmlns:a="http://schemas.openxmlformats.org/drawingml/2006/main">
             <a:pPr algn="l">
+              <a:buNone/>
               <a:defRPr sz="1500" b="1">
                 <a:solidFill>
                   <a:srgbClr val="28745A"/>
@@ -21351,6 +22420,7 @@
           <a:lstStyle xmlns:a="http://schemas.openxmlformats.org/drawingml/2006/main"/>
           <a:p xmlns:a="http://schemas.openxmlformats.org/drawingml/2006/main">
             <a:pPr algn="l">
+              <a:buNone/>
               <a:defRPr sz="1500" b="1">
                 <a:solidFill>
                   <a:srgbClr val="28745A"/>
@@ -21406,6 +22476,7 @@
           <a:lstStyle xmlns:a="http://schemas.openxmlformats.org/drawingml/2006/main"/>
           <a:p xmlns:a="http://schemas.openxmlformats.org/drawingml/2006/main">
             <a:pPr algn="ctr">
+              <a:buNone/>
               <a:defRPr sz="2025" b="1">
                 <a:solidFill>
                   <a:srgbClr val="FFFFFF"/>
@@ -21461,6 +22532,7 @@
           <a:lstStyle xmlns:a="http://schemas.openxmlformats.org/drawingml/2006/main"/>
           <a:p xmlns:a="http://schemas.openxmlformats.org/drawingml/2006/main">
             <a:pPr algn="l">
+              <a:buNone/>
               <a:defRPr sz="1500" b="1">
                 <a:solidFill>
                   <a:srgbClr val="C8161E"/>
@@ -21516,6 +22588,7 @@
           <a:lstStyle xmlns:a="http://schemas.openxmlformats.org/drawingml/2006/main"/>
           <a:p xmlns:a="http://schemas.openxmlformats.org/drawingml/2006/main">
             <a:pPr algn="l">
+              <a:buNone/>
               <a:defRPr sz="1500" b="1">
                 <a:solidFill>
                   <a:srgbClr val="C8161E"/>
@@ -21571,6 +22644,7 @@
           <a:lstStyle xmlns:a="http://schemas.openxmlformats.org/drawingml/2006/main"/>
           <a:p xmlns:a="http://schemas.openxmlformats.org/drawingml/2006/main">
             <a:pPr algn="l">
+              <a:buNone/>
               <a:defRPr sz="1500" b="1">
                 <a:solidFill>
                   <a:srgbClr val="C8161E"/>
@@ -21626,6 +22700,7 @@
           <a:lstStyle xmlns:a="http://schemas.openxmlformats.org/drawingml/2006/main"/>
           <a:p xmlns:a="http://schemas.openxmlformats.org/drawingml/2006/main">
             <a:pPr algn="l">
+              <a:buNone/>
               <a:defRPr sz="1500" b="1">
                 <a:solidFill>
                   <a:srgbClr val="C8161E"/>
@@ -21683,6 +22758,7 @@
           <a:lstStyle xmlns:a="http://schemas.openxmlformats.org/drawingml/2006/main"/>
           <a:p xmlns:a="http://schemas.openxmlformats.org/drawingml/2006/main">
             <a:pPr algn="ctr">
+              <a:buNone/>
               <a:defRPr sz="1800" b="1">
                 <a:solidFill>
                   <a:srgbClr val="FFFFFF"/>
@@ -21832,6 +22908,7 @@
           <a:lstStyle xmlns:a="http://schemas.openxmlformats.org/drawingml/2006/main"/>
           <a:p xmlns:a="http://schemas.openxmlformats.org/drawingml/2006/main">
             <a:pPr algn="ctr">
+              <a:buNone/>
               <a:defRPr sz="1425" b="1">
                 <a:solidFill>
                   <a:srgbClr val="C8161E"/>
@@ -22107,6 +23184,7 @@
           <a:lstStyle xmlns:a="http://schemas.openxmlformats.org/drawingml/2006/main"/>
           <a:p xmlns:a="http://schemas.openxmlformats.org/drawingml/2006/main">
             <a:pPr algn="ctr">
+              <a:buNone/>
               <a:defRPr sz="1575" b="1">
                 <a:solidFill>
                   <a:srgbClr val="FFFFFF"/>
@@ -22219,6 +23297,7 @@
           <a:lstStyle xmlns:a="http://schemas.openxmlformats.org/drawingml/2006/main"/>
           <a:p xmlns:a="http://schemas.openxmlformats.org/drawingml/2006/main">
             <a:pPr algn="ctr">
+              <a:buNone/>
               <a:defRPr sz="1800" b="1">
                 <a:solidFill>
                   <a:srgbClr val="C8161E"/>
